--- a/presentation/OptiCart_Main.pptx
+++ b/presentation/OptiCart_Main.pptx
@@ -5,30 +5,30 @@
     <p:sldMasterId id="2147483648" r:id="rId1"/>
   </p:sldMasterIdLst>
   <p:sldIdLst>
-    <p:sldId id="256" r:id="rId7"/>
-    <p:sldId id="257" r:id="rId8"/>
-    <p:sldId id="258" r:id="rId9"/>
-    <p:sldId id="259" r:id="rId10"/>
-    <p:sldId id="260" r:id="rId11"/>
-    <p:sldId id="261" r:id="rId12"/>
-    <p:sldId id="262" r:id="rId13"/>
-    <p:sldId id="263" r:id="rId14"/>
-    <p:sldId id="264" r:id="rId15"/>
-    <p:sldId id="265" r:id="rId16"/>
-    <p:sldId id="266" r:id="rId17"/>
-    <p:sldId id="267" r:id="rId18"/>
-    <p:sldId id="268" r:id="rId19"/>
-    <p:sldId id="269" r:id="rId20"/>
-    <p:sldId id="270" r:id="rId21"/>
-    <p:sldId id="271" r:id="rId22"/>
-    <p:sldId id="272" r:id="rId23"/>
-    <p:sldId id="273" r:id="rId24"/>
-    <p:sldId id="274" r:id="rId25"/>
-    <p:sldId id="275" r:id="rId26"/>
-    <p:sldId id="276" r:id="rId27"/>
-    <p:sldId id="277" r:id="rId28"/>
+    <p:sldId id="256" r:id="rId2"/>
+    <p:sldId id="257" r:id="rId3"/>
+    <p:sldId id="258" r:id="rId4"/>
+    <p:sldId id="259" r:id="rId5"/>
+    <p:sldId id="260" r:id="rId6"/>
+    <p:sldId id="261" r:id="rId7"/>
+    <p:sldId id="262" r:id="rId8"/>
+    <p:sldId id="263" r:id="rId9"/>
+    <p:sldId id="264" r:id="rId10"/>
+    <p:sldId id="265" r:id="rId11"/>
+    <p:sldId id="266" r:id="rId12"/>
+    <p:sldId id="267" r:id="rId13"/>
+    <p:sldId id="268" r:id="rId14"/>
+    <p:sldId id="269" r:id="rId15"/>
+    <p:sldId id="270" r:id="rId16"/>
+    <p:sldId id="271" r:id="rId17"/>
+    <p:sldId id="272" r:id="rId18"/>
+    <p:sldId id="273" r:id="rId19"/>
+    <p:sldId id="274" r:id="rId20"/>
+    <p:sldId id="275" r:id="rId21"/>
+    <p:sldId id="276" r:id="rId22"/>
+    <p:sldId id="277" r:id="rId23"/>
   </p:sldIdLst>
-  <p:sldSz cx="12191695" cy="6858000" type="screen4x3"/>
+  <p:sldSz cx="12192000" cy="6858000"/>
   <p:notesSz cx="6858000" cy="9144000"/>
   <p:defaultTextStyle>
     <a:defPPr>
@@ -125,6 +125,22 @@
       </a:defRPr>
     </a:lvl9pPr>
   </p:defaultTextStyle>
+  <p:extLst>
+    <p:ext uri="{EFAFB233-063F-42B5-8137-9DF3F51BA10A}">
+      <p15:sldGuideLst xmlns:p15="http://schemas.microsoft.com/office/powerpoint/2012/main">
+        <p15:guide id="1" orient="horz" pos="2160">
+          <p15:clr>
+            <a:srgbClr val="A4A3A4"/>
+          </p15:clr>
+        </p15:guide>
+        <p15:guide id="2" pos="2880">
+          <p15:clr>
+            <a:srgbClr val="A4A3A4"/>
+          </p15:clr>
+        </p15:guide>
+      </p15:sldGuideLst>
+    </p:ext>
+  </p:extLst>
 </p:presentation>
 </file>
 
@@ -166,10 +182,9 @@
           <a:lstStyle/>
           <a:p>
             <a:r>
-              <a:rPr lang="en-US" smtClean="0"/>
+              <a:rPr lang="en-US"/>
               <a:t>Click to edit Master title style</a:t>
             </a:r>
-            <a:endParaRPr lang="en-US"/>
           </a:p>
         </p:txBody>
       </p:sp>
@@ -285,10 +300,9 @@
           </a:lstStyle>
           <a:p>
             <a:r>
-              <a:rPr lang="en-US" smtClean="0"/>
+              <a:rPr lang="en-US"/>
               <a:t>Click to edit Master subtitle style</a:t>
             </a:r>
-            <a:endParaRPr lang="en-US"/>
           </a:p>
         </p:txBody>
       </p:sp>
@@ -309,7 +323,7 @@
           <a:p>
             <a:fld id="{5BCAD085-E8A6-8845-BD4E-CB4CCA059FC4}" type="datetimeFigureOut">
               <a:rPr lang="en-US" smtClean="0"/>
-              <a:t>1/27/13</a:t>
+              <a:t>7/11/2026</a:t>
             </a:fld>
             <a:endParaRPr lang="en-US"/>
           </a:p>
@@ -403,10 +417,9 @@
           <a:lstStyle/>
           <a:p>
             <a:r>
-              <a:rPr lang="en-US" smtClean="0"/>
+              <a:rPr lang="en-US"/>
               <a:t>Click to edit Master title style</a:t>
             </a:r>
-            <a:endParaRPr lang="en-US"/>
           </a:p>
         </p:txBody>
       </p:sp>
@@ -427,38 +440,37 @@
           <a:p>
             <a:pPr lvl="0"/>
             <a:r>
-              <a:rPr lang="en-US" smtClean="0"/>
+              <a:rPr lang="en-US"/>
               <a:t>Click to edit Master text styles</a:t>
             </a:r>
           </a:p>
           <a:p>
             <a:pPr lvl="1"/>
             <a:r>
-              <a:rPr lang="en-US" smtClean="0"/>
+              <a:rPr lang="en-US"/>
               <a:t>Second level</a:t>
             </a:r>
           </a:p>
           <a:p>
             <a:pPr lvl="2"/>
             <a:r>
-              <a:rPr lang="en-US" smtClean="0"/>
+              <a:rPr lang="en-US"/>
               <a:t>Third level</a:t>
             </a:r>
           </a:p>
           <a:p>
             <a:pPr lvl="3"/>
             <a:r>
-              <a:rPr lang="en-US" smtClean="0"/>
+              <a:rPr lang="en-US"/>
               <a:t>Fourth level</a:t>
             </a:r>
           </a:p>
           <a:p>
             <a:pPr lvl="4"/>
             <a:r>
-              <a:rPr lang="en-US" smtClean="0"/>
+              <a:rPr lang="en-US"/>
               <a:t>Fifth level</a:t>
             </a:r>
-            <a:endParaRPr lang="en-US"/>
           </a:p>
         </p:txBody>
       </p:sp>
@@ -479,7 +491,7 @@
           <a:p>
             <a:fld id="{5BCAD085-E8A6-8845-BD4E-CB4CCA059FC4}" type="datetimeFigureOut">
               <a:rPr lang="en-US" smtClean="0"/>
-              <a:t>1/27/13</a:t>
+              <a:t>7/11/2026</a:t>
             </a:fld>
             <a:endParaRPr lang="en-US"/>
           </a:p>
@@ -578,10 +590,9 @@
           <a:lstStyle/>
           <a:p>
             <a:r>
-              <a:rPr lang="en-US" smtClean="0"/>
+              <a:rPr lang="en-US"/>
               <a:t>Click to edit Master title style</a:t>
             </a:r>
-            <a:endParaRPr lang="en-US"/>
           </a:p>
         </p:txBody>
       </p:sp>
@@ -607,38 +618,37 @@
           <a:p>
             <a:pPr lvl="0"/>
             <a:r>
-              <a:rPr lang="en-US" smtClean="0"/>
+              <a:rPr lang="en-US"/>
               <a:t>Click to edit Master text styles</a:t>
             </a:r>
           </a:p>
           <a:p>
             <a:pPr lvl="1"/>
             <a:r>
-              <a:rPr lang="en-US" smtClean="0"/>
+              <a:rPr lang="en-US"/>
               <a:t>Second level</a:t>
             </a:r>
           </a:p>
           <a:p>
             <a:pPr lvl="2"/>
             <a:r>
-              <a:rPr lang="en-US" smtClean="0"/>
+              <a:rPr lang="en-US"/>
               <a:t>Third level</a:t>
             </a:r>
           </a:p>
           <a:p>
             <a:pPr lvl="3"/>
             <a:r>
-              <a:rPr lang="en-US" smtClean="0"/>
+              <a:rPr lang="en-US"/>
               <a:t>Fourth level</a:t>
             </a:r>
           </a:p>
           <a:p>
             <a:pPr lvl="4"/>
             <a:r>
-              <a:rPr lang="en-US" smtClean="0"/>
+              <a:rPr lang="en-US"/>
               <a:t>Fifth level</a:t>
             </a:r>
-            <a:endParaRPr lang="en-US"/>
           </a:p>
         </p:txBody>
       </p:sp>
@@ -659,7 +669,7 @@
           <a:p>
             <a:fld id="{5BCAD085-E8A6-8845-BD4E-CB4CCA059FC4}" type="datetimeFigureOut">
               <a:rPr lang="en-US" smtClean="0"/>
-              <a:t>1/27/13</a:t>
+              <a:t>7/11/2026</a:t>
             </a:fld>
             <a:endParaRPr lang="en-US"/>
           </a:p>
@@ -753,10 +763,9 @@
           <a:lstStyle/>
           <a:p>
             <a:r>
-              <a:rPr lang="en-US" smtClean="0"/>
+              <a:rPr lang="en-US"/>
               <a:t>Click to edit Master title style</a:t>
             </a:r>
-            <a:endParaRPr lang="en-US"/>
           </a:p>
         </p:txBody>
       </p:sp>
@@ -777,38 +786,37 @@
           <a:p>
             <a:pPr lvl="0"/>
             <a:r>
-              <a:rPr lang="en-US" smtClean="0"/>
+              <a:rPr lang="en-US"/>
               <a:t>Click to edit Master text styles</a:t>
             </a:r>
           </a:p>
           <a:p>
             <a:pPr lvl="1"/>
             <a:r>
-              <a:rPr lang="en-US" smtClean="0"/>
+              <a:rPr lang="en-US"/>
               <a:t>Second level</a:t>
             </a:r>
           </a:p>
           <a:p>
             <a:pPr lvl="2"/>
             <a:r>
-              <a:rPr lang="en-US" smtClean="0"/>
+              <a:rPr lang="en-US"/>
               <a:t>Third level</a:t>
             </a:r>
           </a:p>
           <a:p>
             <a:pPr lvl="3"/>
             <a:r>
-              <a:rPr lang="en-US" smtClean="0"/>
+              <a:rPr lang="en-US"/>
               <a:t>Fourth level</a:t>
             </a:r>
           </a:p>
           <a:p>
             <a:pPr lvl="4"/>
             <a:r>
-              <a:rPr lang="en-US" smtClean="0"/>
+              <a:rPr lang="en-US"/>
               <a:t>Fifth level</a:t>
             </a:r>
-            <a:endParaRPr lang="en-US"/>
           </a:p>
         </p:txBody>
       </p:sp>
@@ -829,7 +837,7 @@
           <a:p>
             <a:fld id="{5BCAD085-E8A6-8845-BD4E-CB4CCA059FC4}" type="datetimeFigureOut">
               <a:rPr lang="en-US" smtClean="0"/>
-              <a:t>1/27/13</a:t>
+              <a:t>7/11/2026</a:t>
             </a:fld>
             <a:endParaRPr lang="en-US"/>
           </a:p>
@@ -932,10 +940,9 @@
           </a:lstStyle>
           <a:p>
             <a:r>
-              <a:rPr lang="en-US" smtClean="0"/>
+              <a:rPr lang="en-US"/>
               <a:t>Click to edit Master title style</a:t>
             </a:r>
-            <a:endParaRPr lang="en-US"/>
           </a:p>
         </p:txBody>
       </p:sp>
@@ -1052,7 +1059,7 @@
           <a:p>
             <a:pPr lvl="0"/>
             <a:r>
-              <a:rPr lang="en-US" smtClean="0"/>
+              <a:rPr lang="en-US"/>
               <a:t>Click to edit Master text styles</a:t>
             </a:r>
           </a:p>
@@ -1075,7 +1082,7 @@
           <a:p>
             <a:fld id="{5BCAD085-E8A6-8845-BD4E-CB4CCA059FC4}" type="datetimeFigureOut">
               <a:rPr lang="en-US" smtClean="0"/>
-              <a:t>1/27/13</a:t>
+              <a:t>7/11/2026</a:t>
             </a:fld>
             <a:endParaRPr lang="en-US"/>
           </a:p>
@@ -1169,10 +1176,9 @@
           <a:lstStyle/>
           <a:p>
             <a:r>
-              <a:rPr lang="en-US" smtClean="0"/>
+              <a:rPr lang="en-US"/>
               <a:t>Click to edit Master title style</a:t>
             </a:r>
-            <a:endParaRPr lang="en-US"/>
           </a:p>
         </p:txBody>
       </p:sp>
@@ -1226,38 +1232,37 @@
           <a:p>
             <a:pPr lvl="0"/>
             <a:r>
-              <a:rPr lang="en-US" smtClean="0"/>
+              <a:rPr lang="en-US"/>
               <a:t>Click to edit Master text styles</a:t>
             </a:r>
           </a:p>
           <a:p>
             <a:pPr lvl="1"/>
             <a:r>
-              <a:rPr lang="en-US" smtClean="0"/>
+              <a:rPr lang="en-US"/>
               <a:t>Second level</a:t>
             </a:r>
           </a:p>
           <a:p>
             <a:pPr lvl="2"/>
             <a:r>
-              <a:rPr lang="en-US" smtClean="0"/>
+              <a:rPr lang="en-US"/>
               <a:t>Third level</a:t>
             </a:r>
           </a:p>
           <a:p>
             <a:pPr lvl="3"/>
             <a:r>
-              <a:rPr lang="en-US" smtClean="0"/>
+              <a:rPr lang="en-US"/>
               <a:t>Fourth level</a:t>
             </a:r>
           </a:p>
           <a:p>
             <a:pPr lvl="4"/>
             <a:r>
-              <a:rPr lang="en-US" smtClean="0"/>
+              <a:rPr lang="en-US"/>
               <a:t>Fifth level</a:t>
             </a:r>
-            <a:endParaRPr lang="en-US"/>
           </a:p>
         </p:txBody>
       </p:sp>
@@ -1311,38 +1316,37 @@
           <a:p>
             <a:pPr lvl="0"/>
             <a:r>
-              <a:rPr lang="en-US" smtClean="0"/>
+              <a:rPr lang="en-US"/>
               <a:t>Click to edit Master text styles</a:t>
             </a:r>
           </a:p>
           <a:p>
             <a:pPr lvl="1"/>
             <a:r>
-              <a:rPr lang="en-US" smtClean="0"/>
+              <a:rPr lang="en-US"/>
               <a:t>Second level</a:t>
             </a:r>
           </a:p>
           <a:p>
             <a:pPr lvl="2"/>
             <a:r>
-              <a:rPr lang="en-US" smtClean="0"/>
+              <a:rPr lang="en-US"/>
               <a:t>Third level</a:t>
             </a:r>
           </a:p>
           <a:p>
             <a:pPr lvl="3"/>
             <a:r>
-              <a:rPr lang="en-US" smtClean="0"/>
+              <a:rPr lang="en-US"/>
               <a:t>Fourth level</a:t>
             </a:r>
           </a:p>
           <a:p>
             <a:pPr lvl="4"/>
             <a:r>
-              <a:rPr lang="en-US" smtClean="0"/>
+              <a:rPr lang="en-US"/>
               <a:t>Fifth level</a:t>
             </a:r>
-            <a:endParaRPr lang="en-US"/>
           </a:p>
         </p:txBody>
       </p:sp>
@@ -1363,7 +1367,7 @@
           <a:p>
             <a:fld id="{5BCAD085-E8A6-8845-BD4E-CB4CCA059FC4}" type="datetimeFigureOut">
               <a:rPr lang="en-US" smtClean="0"/>
-              <a:t>1/27/13</a:t>
+              <a:t>7/11/2026</a:t>
             </a:fld>
             <a:endParaRPr lang="en-US"/>
           </a:p>
@@ -1461,10 +1465,9 @@
           </a:lstStyle>
           <a:p>
             <a:r>
-              <a:rPr lang="en-US" smtClean="0"/>
+              <a:rPr lang="en-US"/>
               <a:t>Click to edit Master title style</a:t>
             </a:r>
-            <a:endParaRPr lang="en-US"/>
           </a:p>
         </p:txBody>
       </p:sp>
@@ -1527,7 +1530,7 @@
           <a:p>
             <a:pPr lvl="0"/>
             <a:r>
-              <a:rPr lang="en-US" smtClean="0"/>
+              <a:rPr lang="en-US"/>
               <a:t>Click to edit Master text styles</a:t>
             </a:r>
           </a:p>
@@ -1583,38 +1586,37 @@
           <a:p>
             <a:pPr lvl="0"/>
             <a:r>
-              <a:rPr lang="en-US" smtClean="0"/>
+              <a:rPr lang="en-US"/>
               <a:t>Click to edit Master text styles</a:t>
             </a:r>
           </a:p>
           <a:p>
             <a:pPr lvl="1"/>
             <a:r>
-              <a:rPr lang="en-US" smtClean="0"/>
+              <a:rPr lang="en-US"/>
               <a:t>Second level</a:t>
             </a:r>
           </a:p>
           <a:p>
             <a:pPr lvl="2"/>
             <a:r>
-              <a:rPr lang="en-US" smtClean="0"/>
+              <a:rPr lang="en-US"/>
               <a:t>Third level</a:t>
             </a:r>
           </a:p>
           <a:p>
             <a:pPr lvl="3"/>
             <a:r>
-              <a:rPr lang="en-US" smtClean="0"/>
+              <a:rPr lang="en-US"/>
               <a:t>Fourth level</a:t>
             </a:r>
           </a:p>
           <a:p>
             <a:pPr lvl="4"/>
             <a:r>
-              <a:rPr lang="en-US" smtClean="0"/>
+              <a:rPr lang="en-US"/>
               <a:t>Fifth level</a:t>
             </a:r>
-            <a:endParaRPr lang="en-US"/>
           </a:p>
         </p:txBody>
       </p:sp>
@@ -1677,7 +1679,7 @@
           <a:p>
             <a:pPr lvl="0"/>
             <a:r>
-              <a:rPr lang="en-US" smtClean="0"/>
+              <a:rPr lang="en-US"/>
               <a:t>Click to edit Master text styles</a:t>
             </a:r>
           </a:p>
@@ -1733,38 +1735,37 @@
           <a:p>
             <a:pPr lvl="0"/>
             <a:r>
-              <a:rPr lang="en-US" smtClean="0"/>
+              <a:rPr lang="en-US"/>
               <a:t>Click to edit Master text styles</a:t>
             </a:r>
           </a:p>
           <a:p>
             <a:pPr lvl="1"/>
             <a:r>
-              <a:rPr lang="en-US" smtClean="0"/>
+              <a:rPr lang="en-US"/>
               <a:t>Second level</a:t>
             </a:r>
           </a:p>
           <a:p>
             <a:pPr lvl="2"/>
             <a:r>
-              <a:rPr lang="en-US" smtClean="0"/>
+              <a:rPr lang="en-US"/>
               <a:t>Third level</a:t>
             </a:r>
           </a:p>
           <a:p>
             <a:pPr lvl="3"/>
             <a:r>
-              <a:rPr lang="en-US" smtClean="0"/>
+              <a:rPr lang="en-US"/>
               <a:t>Fourth level</a:t>
             </a:r>
           </a:p>
           <a:p>
             <a:pPr lvl="4"/>
             <a:r>
-              <a:rPr lang="en-US" smtClean="0"/>
+              <a:rPr lang="en-US"/>
               <a:t>Fifth level</a:t>
             </a:r>
-            <a:endParaRPr lang="en-US"/>
           </a:p>
         </p:txBody>
       </p:sp>
@@ -1785,7 +1786,7 @@
           <a:p>
             <a:fld id="{5BCAD085-E8A6-8845-BD4E-CB4CCA059FC4}" type="datetimeFigureOut">
               <a:rPr lang="en-US" smtClean="0"/>
-              <a:t>1/27/13</a:t>
+              <a:t>7/11/2026</a:t>
             </a:fld>
             <a:endParaRPr lang="en-US"/>
           </a:p>
@@ -1879,10 +1880,9 @@
           <a:lstStyle/>
           <a:p>
             <a:r>
-              <a:rPr lang="en-US" smtClean="0"/>
+              <a:rPr lang="en-US"/>
               <a:t>Click to edit Master title style</a:t>
             </a:r>
-            <a:endParaRPr lang="en-US"/>
           </a:p>
         </p:txBody>
       </p:sp>
@@ -1903,7 +1903,7 @@
           <a:p>
             <a:fld id="{5BCAD085-E8A6-8845-BD4E-CB4CCA059FC4}" type="datetimeFigureOut">
               <a:rPr lang="en-US" smtClean="0"/>
-              <a:t>1/27/13</a:t>
+              <a:t>7/11/2026</a:t>
             </a:fld>
             <a:endParaRPr lang="en-US"/>
           </a:p>
@@ -1998,7 +1998,7 @@
           <a:p>
             <a:fld id="{5BCAD085-E8A6-8845-BD4E-CB4CCA059FC4}" type="datetimeFigureOut">
               <a:rPr lang="en-US" smtClean="0"/>
-              <a:t>1/27/13</a:t>
+              <a:t>7/11/2026</a:t>
             </a:fld>
             <a:endParaRPr lang="en-US"/>
           </a:p>
@@ -2101,10 +2101,9 @@
           </a:lstStyle>
           <a:p>
             <a:r>
-              <a:rPr lang="en-US" smtClean="0"/>
+              <a:rPr lang="en-US"/>
               <a:t>Click to edit Master title style</a:t>
             </a:r>
-            <a:endParaRPr lang="en-US"/>
           </a:p>
         </p:txBody>
       </p:sp>
@@ -2158,38 +2157,37 @@
           <a:p>
             <a:pPr lvl="0"/>
             <a:r>
-              <a:rPr lang="en-US" smtClean="0"/>
+              <a:rPr lang="en-US"/>
               <a:t>Click to edit Master text styles</a:t>
             </a:r>
           </a:p>
           <a:p>
             <a:pPr lvl="1"/>
             <a:r>
-              <a:rPr lang="en-US" smtClean="0"/>
+              <a:rPr lang="en-US"/>
               <a:t>Second level</a:t>
             </a:r>
           </a:p>
           <a:p>
             <a:pPr lvl="2"/>
             <a:r>
-              <a:rPr lang="en-US" smtClean="0"/>
+              <a:rPr lang="en-US"/>
               <a:t>Third level</a:t>
             </a:r>
           </a:p>
           <a:p>
             <a:pPr lvl="3"/>
             <a:r>
-              <a:rPr lang="en-US" smtClean="0"/>
+              <a:rPr lang="en-US"/>
               <a:t>Fourth level</a:t>
             </a:r>
           </a:p>
           <a:p>
             <a:pPr lvl="4"/>
             <a:r>
-              <a:rPr lang="en-US" smtClean="0"/>
+              <a:rPr lang="en-US"/>
               <a:t>Fifth level</a:t>
             </a:r>
-            <a:endParaRPr lang="en-US"/>
           </a:p>
         </p:txBody>
       </p:sp>
@@ -2252,7 +2250,7 @@
           <a:p>
             <a:pPr lvl="0"/>
             <a:r>
-              <a:rPr lang="en-US" smtClean="0"/>
+              <a:rPr lang="en-US"/>
               <a:t>Click to edit Master text styles</a:t>
             </a:r>
           </a:p>
@@ -2275,7 +2273,7 @@
           <a:p>
             <a:fld id="{5BCAD085-E8A6-8845-BD4E-CB4CCA059FC4}" type="datetimeFigureOut">
               <a:rPr lang="en-US" smtClean="0"/>
-              <a:t>1/27/13</a:t>
+              <a:t>7/11/2026</a:t>
             </a:fld>
             <a:endParaRPr lang="en-US"/>
           </a:p>
@@ -2378,10 +2376,9 @@
           </a:lstStyle>
           <a:p>
             <a:r>
-              <a:rPr lang="en-US" smtClean="0"/>
+              <a:rPr lang="en-US"/>
               <a:t>Click to edit Master title style</a:t>
             </a:r>
-            <a:endParaRPr lang="en-US"/>
           </a:p>
         </p:txBody>
       </p:sp>
@@ -2505,7 +2502,7 @@
           <a:p>
             <a:pPr lvl="0"/>
             <a:r>
-              <a:rPr lang="en-US" smtClean="0"/>
+              <a:rPr lang="en-US"/>
               <a:t>Click to edit Master text styles</a:t>
             </a:r>
           </a:p>
@@ -2528,7 +2525,7 @@
           <a:p>
             <a:fld id="{5BCAD085-E8A6-8845-BD4E-CB4CCA059FC4}" type="datetimeFigureOut">
               <a:rPr lang="en-US" smtClean="0"/>
-              <a:t>1/27/13</a:t>
+              <a:t>7/11/2026</a:t>
             </a:fld>
             <a:endParaRPr lang="en-US"/>
           </a:p>
@@ -2637,10 +2634,9 @@
           <a:lstStyle/>
           <a:p>
             <a:r>
-              <a:rPr lang="en-US" smtClean="0"/>
+              <a:rPr lang="en-US"/>
               <a:t>Click to edit Master title style</a:t>
             </a:r>
-            <a:endParaRPr lang="en-US"/>
           </a:p>
         </p:txBody>
       </p:sp>
@@ -2671,38 +2667,37 @@
           <a:p>
             <a:pPr lvl="0"/>
             <a:r>
-              <a:rPr lang="en-US" smtClean="0"/>
+              <a:rPr lang="en-US"/>
               <a:t>Click to edit Master text styles</a:t>
             </a:r>
           </a:p>
           <a:p>
             <a:pPr lvl="1"/>
             <a:r>
-              <a:rPr lang="en-US" smtClean="0"/>
+              <a:rPr lang="en-US"/>
               <a:t>Second level</a:t>
             </a:r>
           </a:p>
           <a:p>
             <a:pPr lvl="2"/>
             <a:r>
-              <a:rPr lang="en-US" smtClean="0"/>
+              <a:rPr lang="en-US"/>
               <a:t>Third level</a:t>
             </a:r>
           </a:p>
           <a:p>
             <a:pPr lvl="3"/>
             <a:r>
-              <a:rPr lang="en-US" smtClean="0"/>
+              <a:rPr lang="en-US"/>
               <a:t>Fourth level</a:t>
             </a:r>
           </a:p>
           <a:p>
             <a:pPr lvl="4"/>
             <a:r>
-              <a:rPr lang="en-US" smtClean="0"/>
+              <a:rPr lang="en-US"/>
               <a:t>Fifth level</a:t>
             </a:r>
-            <a:endParaRPr lang="en-US"/>
           </a:p>
         </p:txBody>
       </p:sp>
@@ -2741,7 +2736,7 @@
           <a:p>
             <a:fld id="{5BCAD085-E8A6-8845-BD4E-CB4CCA059FC4}" type="datetimeFigureOut">
               <a:rPr lang="en-US" smtClean="0"/>
-              <a:t>1/27/13</a:t>
+              <a:t>7/11/2026</a:t>
             </a:fld>
             <a:endParaRPr lang="en-US"/>
           </a:p>
@@ -3100,7 +3095,7 @@
 </file>
 
 <file path=ppt/slides/slide1.xml><?xml version="1.0" encoding="utf-8"?>
-<p:sld xmlns:a="http://schemas.openxmlformats.org/drawingml/2006/main" xmlns:p="http://schemas.openxmlformats.org/presentationml/2006/main" xmlns:r="http://schemas.openxmlformats.org/officeDocument/2006/relationships">
+<p:sld xmlns:a="http://schemas.openxmlformats.org/drawingml/2006/main" xmlns:r="http://schemas.openxmlformats.org/officeDocument/2006/relationships" xmlns:p="http://schemas.openxmlformats.org/presentationml/2006/main">
   <p:cSld>
     <p:spTree>
       <p:nvGrpSpPr>
@@ -3108,7 +3103,14 @@
         <p:cNvGrpSpPr/>
         <p:nvPr/>
       </p:nvGrpSpPr>
-      <p:grpSpPr/>
+      <p:grpSpPr>
+        <a:xfrm>
+          <a:off x="0" y="0"/>
+          <a:ext cx="0" cy="0"/>
+          <a:chOff x="0" y="0"/>
+          <a:chExt cx="0" cy="0"/>
+        </a:xfrm>
+      </p:grpSpPr>
       <p:sp>
         <p:nvSpPr>
           <p:cNvPr id="2" name="Rectangle 1"/>
@@ -3149,6 +3151,7 @@
           <a:lstStyle/>
           <a:p>
             <a:pPr algn="ctr"/>
+            <a:endParaRPr/>
           </a:p>
         </p:txBody>
       </p:sp>
@@ -3192,6 +3195,7 @@
           <a:lstStyle/>
           <a:p>
             <a:pPr algn="ctr"/>
+            <a:endParaRPr/>
           </a:p>
         </p:txBody>
       </p:sp>
@@ -3212,7 +3216,7 @@
           <a:noFill/>
         </p:spPr>
         <p:txBody>
-          <a:bodyPr wrap="square" anchor="t" lIns="45720" rIns="45720" tIns="18288" bIns="18288">
+          <a:bodyPr wrap="square" lIns="45720" tIns="18288" rIns="45720" bIns="18288" anchor="t">
             <a:spAutoFit/>
           </a:bodyPr>
           <a:lstStyle/>
@@ -3254,7 +3258,7 @@
           <a:noFill/>
         </p:spPr>
         <p:txBody>
-          <a:bodyPr wrap="square" anchor="t" lIns="45720" rIns="45720" tIns="18288" bIns="18288">
+          <a:bodyPr wrap="square" lIns="45720" tIns="18288" rIns="45720" bIns="18288" anchor="t">
             <a:spAutoFit/>
           </a:bodyPr>
           <a:lstStyle/>
@@ -3296,7 +3300,7 @@
           <a:noFill/>
         </p:spPr>
         <p:txBody>
-          <a:bodyPr wrap="square" anchor="t" lIns="45720" rIns="45720" tIns="18288" bIns="18288">
+          <a:bodyPr wrap="square" lIns="45720" tIns="18288" rIns="45720" bIns="18288" anchor="t">
             <a:spAutoFit/>
           </a:bodyPr>
           <a:lstStyle/>
@@ -3376,7 +3380,7 @@
           <a:noFill/>
         </p:spPr>
         <p:txBody>
-          <a:bodyPr wrap="square" anchor="t" lIns="45720" rIns="45720" tIns="18288" bIns="18288">
+          <a:bodyPr wrap="square" lIns="45720" tIns="18288" rIns="45720" bIns="18288" anchor="t">
             <a:spAutoFit/>
           </a:bodyPr>
           <a:lstStyle/>
@@ -3410,7 +3414,7 @@
 </file>
 
 <file path=ppt/slides/slide10.xml><?xml version="1.0" encoding="utf-8"?>
-<p:sld xmlns:a="http://schemas.openxmlformats.org/drawingml/2006/main" xmlns:p="http://schemas.openxmlformats.org/presentationml/2006/main" xmlns:r="http://schemas.openxmlformats.org/officeDocument/2006/relationships">
+<p:sld xmlns:a="http://schemas.openxmlformats.org/drawingml/2006/main" xmlns:r="http://schemas.openxmlformats.org/officeDocument/2006/relationships" xmlns:p="http://schemas.openxmlformats.org/presentationml/2006/main">
   <p:cSld>
     <p:spTree>
       <p:nvGrpSpPr>
@@ -3418,7 +3422,14 @@
         <p:cNvGrpSpPr/>
         <p:nvPr/>
       </p:nvGrpSpPr>
-      <p:grpSpPr/>
+      <p:grpSpPr>
+        <a:xfrm>
+          <a:off x="0" y="0"/>
+          <a:ext cx="0" cy="0"/>
+          <a:chOff x="0" y="0"/>
+          <a:chExt cx="0" cy="0"/>
+        </a:xfrm>
+      </p:grpSpPr>
       <p:sp>
         <p:nvSpPr>
           <p:cNvPr id="2" name="Rectangle 1"/>
@@ -3459,6 +3470,7 @@
           <a:lstStyle/>
           <a:p>
             <a:pPr algn="ctr"/>
+            <a:endParaRPr/>
           </a:p>
         </p:txBody>
       </p:sp>
@@ -3502,6 +3514,7 @@
           <a:lstStyle/>
           <a:p>
             <a:pPr algn="ctr"/>
+            <a:endParaRPr/>
           </a:p>
         </p:txBody>
       </p:sp>
@@ -3522,7 +3535,7 @@
           <a:noFill/>
         </p:spPr>
         <p:txBody>
-          <a:bodyPr wrap="square" anchor="ctr" lIns="45720" rIns="45720" tIns="18288" bIns="18288">
+          <a:bodyPr wrap="square" lIns="45720" tIns="18288" rIns="45720" bIns="18288" anchor="ctr">
             <a:spAutoFit/>
           </a:bodyPr>
           <a:lstStyle/>
@@ -3587,6 +3600,7 @@
           <a:lstStyle/>
           <a:p>
             <a:pPr algn="ctr"/>
+            <a:endParaRPr/>
           </a:p>
         </p:txBody>
       </p:sp>
@@ -3661,7 +3675,7 @@
           <a:noFill/>
         </p:spPr>
         <p:txBody>
-          <a:bodyPr wrap="square" anchor="t" lIns="45720" rIns="45720" tIns="18288" bIns="18288">
+          <a:bodyPr wrap="square" lIns="45720" tIns="18288" rIns="45720" bIns="18288" anchor="t">
             <a:spAutoFit/>
           </a:bodyPr>
           <a:lstStyle/>
@@ -3703,7 +3717,7 @@
           <a:noFill/>
         </p:spPr>
         <p:txBody>
-          <a:bodyPr wrap="square" anchor="t" lIns="45720" rIns="45720" tIns="18288" bIns="18288">
+          <a:bodyPr wrap="square" lIns="45720" tIns="18288" rIns="45720" bIns="18288" anchor="t">
             <a:spAutoFit/>
           </a:bodyPr>
           <a:lstStyle/>
@@ -3745,7 +3759,7 @@
           <a:noFill/>
         </p:spPr>
         <p:txBody>
-          <a:bodyPr wrap="square" anchor="t" lIns="45720" rIns="45720" tIns="18288" bIns="18288">
+          <a:bodyPr wrap="square" lIns="45720" tIns="18288" rIns="45720" bIns="18288" anchor="t">
             <a:spAutoFit/>
           </a:bodyPr>
           <a:lstStyle/>
@@ -3855,7 +3869,7 @@
 </file>
 
 <file path=ppt/slides/slide11.xml><?xml version="1.0" encoding="utf-8"?>
-<p:sld xmlns:a="http://schemas.openxmlformats.org/drawingml/2006/main" xmlns:p="http://schemas.openxmlformats.org/presentationml/2006/main" xmlns:r="http://schemas.openxmlformats.org/officeDocument/2006/relationships">
+<p:sld xmlns:a="http://schemas.openxmlformats.org/drawingml/2006/main" xmlns:r="http://schemas.openxmlformats.org/officeDocument/2006/relationships" xmlns:p="http://schemas.openxmlformats.org/presentationml/2006/main">
   <p:cSld>
     <p:spTree>
       <p:nvGrpSpPr>
@@ -3863,7 +3877,14 @@
         <p:cNvGrpSpPr/>
         <p:nvPr/>
       </p:nvGrpSpPr>
-      <p:grpSpPr/>
+      <p:grpSpPr>
+        <a:xfrm>
+          <a:off x="0" y="0"/>
+          <a:ext cx="0" cy="0"/>
+          <a:chOff x="0" y="0"/>
+          <a:chExt cx="0" cy="0"/>
+        </a:xfrm>
+      </p:grpSpPr>
       <p:sp>
         <p:nvSpPr>
           <p:cNvPr id="2" name="Rectangle 1"/>
@@ -3904,6 +3925,7 @@
           <a:lstStyle/>
           <a:p>
             <a:pPr algn="ctr"/>
+            <a:endParaRPr/>
           </a:p>
         </p:txBody>
       </p:sp>
@@ -3947,6 +3969,7 @@
           <a:lstStyle/>
           <a:p>
             <a:pPr algn="ctr"/>
+            <a:endParaRPr/>
           </a:p>
         </p:txBody>
       </p:sp>
@@ -3967,7 +3990,7 @@
           <a:noFill/>
         </p:spPr>
         <p:txBody>
-          <a:bodyPr wrap="square" anchor="ctr" lIns="45720" rIns="45720" tIns="18288" bIns="18288">
+          <a:bodyPr wrap="square" lIns="45720" tIns="18288" rIns="45720" bIns="18288" anchor="ctr">
             <a:spAutoFit/>
           </a:bodyPr>
           <a:lstStyle/>
@@ -4032,6 +4055,7 @@
           <a:lstStyle/>
           <a:p>
             <a:pPr algn="ctr"/>
+            <a:endParaRPr/>
           </a:p>
         </p:txBody>
       </p:sp>
@@ -4106,7 +4130,7 @@
           <a:noFill/>
         </p:spPr>
         <p:txBody>
-          <a:bodyPr wrap="square" anchor="t" lIns="45720" rIns="45720" tIns="18288" bIns="18288">
+          <a:bodyPr wrap="square" lIns="45720" tIns="18288" rIns="45720" bIns="18288" anchor="t">
             <a:spAutoFit/>
           </a:bodyPr>
           <a:lstStyle/>
@@ -4148,7 +4172,7 @@
           <a:noFill/>
         </p:spPr>
         <p:txBody>
-          <a:bodyPr wrap="square" anchor="t" lIns="45720" rIns="45720" tIns="18288" bIns="18288">
+          <a:bodyPr wrap="square" lIns="45720" tIns="18288" rIns="45720" bIns="18288" anchor="t">
             <a:spAutoFit/>
           </a:bodyPr>
           <a:lstStyle/>
@@ -4190,7 +4214,7 @@
           <a:noFill/>
         </p:spPr>
         <p:txBody>
-          <a:bodyPr wrap="square" anchor="t" lIns="45720" rIns="45720" tIns="18288" bIns="18288">
+          <a:bodyPr wrap="square" lIns="45720" tIns="18288" rIns="45720" bIns="18288" anchor="t">
             <a:spAutoFit/>
           </a:bodyPr>
           <a:lstStyle/>
@@ -4281,7 +4305,7 @@
 </file>
 
 <file path=ppt/slides/slide12.xml><?xml version="1.0" encoding="utf-8"?>
-<p:sld xmlns:a="http://schemas.openxmlformats.org/drawingml/2006/main" xmlns:p="http://schemas.openxmlformats.org/presentationml/2006/main" xmlns:r="http://schemas.openxmlformats.org/officeDocument/2006/relationships">
+<p:sld xmlns:a="http://schemas.openxmlformats.org/drawingml/2006/main" xmlns:r="http://schemas.openxmlformats.org/officeDocument/2006/relationships" xmlns:p="http://schemas.openxmlformats.org/presentationml/2006/main">
   <p:cSld>
     <p:spTree>
       <p:nvGrpSpPr>
@@ -4289,7 +4313,14 @@
         <p:cNvGrpSpPr/>
         <p:nvPr/>
       </p:nvGrpSpPr>
-      <p:grpSpPr/>
+      <p:grpSpPr>
+        <a:xfrm>
+          <a:off x="0" y="0"/>
+          <a:ext cx="0" cy="0"/>
+          <a:chOff x="0" y="0"/>
+          <a:chExt cx="0" cy="0"/>
+        </a:xfrm>
+      </p:grpSpPr>
       <p:sp>
         <p:nvSpPr>
           <p:cNvPr id="2" name="Rectangle 1"/>
@@ -4330,6 +4361,7 @@
           <a:lstStyle/>
           <a:p>
             <a:pPr algn="ctr"/>
+            <a:endParaRPr/>
           </a:p>
         </p:txBody>
       </p:sp>
@@ -4373,6 +4405,7 @@
           <a:lstStyle/>
           <a:p>
             <a:pPr algn="ctr"/>
+            <a:endParaRPr/>
           </a:p>
         </p:txBody>
       </p:sp>
@@ -4393,7 +4426,7 @@
           <a:noFill/>
         </p:spPr>
         <p:txBody>
-          <a:bodyPr wrap="square" anchor="ctr" lIns="45720" rIns="45720" tIns="18288" bIns="18288">
+          <a:bodyPr wrap="square" lIns="45720" tIns="18288" rIns="45720" bIns="18288" anchor="ctr">
             <a:spAutoFit/>
           </a:bodyPr>
           <a:lstStyle/>
@@ -4458,6 +4491,7 @@
           <a:lstStyle/>
           <a:p>
             <a:pPr algn="ctr"/>
+            <a:endParaRPr/>
           </a:p>
         </p:txBody>
       </p:sp>
@@ -4532,7 +4566,7 @@
           <a:noFill/>
         </p:spPr>
         <p:txBody>
-          <a:bodyPr wrap="square" anchor="t" lIns="45720" rIns="45720" tIns="18288" bIns="18288">
+          <a:bodyPr wrap="square" lIns="45720" tIns="18288" rIns="45720" bIns="18288" anchor="t">
             <a:spAutoFit/>
           </a:bodyPr>
           <a:lstStyle/>
@@ -4574,7 +4608,7 @@
           <a:noFill/>
         </p:spPr>
         <p:txBody>
-          <a:bodyPr wrap="square" anchor="t" lIns="45720" rIns="45720" tIns="18288" bIns="18288">
+          <a:bodyPr wrap="square" lIns="45720" tIns="18288" rIns="45720" bIns="18288" anchor="t">
             <a:spAutoFit/>
           </a:bodyPr>
           <a:lstStyle/>
@@ -4616,7 +4650,7 @@
           <a:noFill/>
         </p:spPr>
         <p:txBody>
-          <a:bodyPr wrap="square" anchor="t" lIns="45720" rIns="45720" tIns="18288" bIns="18288">
+          <a:bodyPr wrap="square" lIns="45720" tIns="18288" rIns="45720" bIns="18288" anchor="t">
             <a:spAutoFit/>
           </a:bodyPr>
           <a:lstStyle/>
@@ -4707,7 +4741,7 @@
 </file>
 
 <file path=ppt/slides/slide13.xml><?xml version="1.0" encoding="utf-8"?>
-<p:sld xmlns:a="http://schemas.openxmlformats.org/drawingml/2006/main" xmlns:p="http://schemas.openxmlformats.org/presentationml/2006/main" xmlns:r="http://schemas.openxmlformats.org/officeDocument/2006/relationships">
+<p:sld xmlns:a="http://schemas.openxmlformats.org/drawingml/2006/main" xmlns:r="http://schemas.openxmlformats.org/officeDocument/2006/relationships" xmlns:p="http://schemas.openxmlformats.org/presentationml/2006/main">
   <p:cSld>
     <p:spTree>
       <p:nvGrpSpPr>
@@ -4715,7 +4749,14 @@
         <p:cNvGrpSpPr/>
         <p:nvPr/>
       </p:nvGrpSpPr>
-      <p:grpSpPr/>
+      <p:grpSpPr>
+        <a:xfrm>
+          <a:off x="0" y="0"/>
+          <a:ext cx="0" cy="0"/>
+          <a:chOff x="0" y="0"/>
+          <a:chExt cx="0" cy="0"/>
+        </a:xfrm>
+      </p:grpSpPr>
       <p:sp>
         <p:nvSpPr>
           <p:cNvPr id="2" name="Rectangle 1"/>
@@ -4756,6 +4797,7 @@
           <a:lstStyle/>
           <a:p>
             <a:pPr algn="ctr"/>
+            <a:endParaRPr/>
           </a:p>
         </p:txBody>
       </p:sp>
@@ -4799,6 +4841,7 @@
           <a:lstStyle/>
           <a:p>
             <a:pPr algn="ctr"/>
+            <a:endParaRPr/>
           </a:p>
         </p:txBody>
       </p:sp>
@@ -4819,7 +4862,7 @@
           <a:noFill/>
         </p:spPr>
         <p:txBody>
-          <a:bodyPr wrap="square" anchor="ctr" lIns="45720" rIns="45720" tIns="18288" bIns="18288">
+          <a:bodyPr wrap="square" lIns="45720" tIns="18288" rIns="45720" bIns="18288" anchor="ctr">
             <a:spAutoFit/>
           </a:bodyPr>
           <a:lstStyle/>
@@ -4884,6 +4927,7 @@
           <a:lstStyle/>
           <a:p>
             <a:pPr algn="ctr"/>
+            <a:endParaRPr/>
           </a:p>
         </p:txBody>
       </p:sp>
@@ -4958,7 +5002,7 @@
           <a:noFill/>
         </p:spPr>
         <p:txBody>
-          <a:bodyPr wrap="square" anchor="t" lIns="45720" rIns="45720" tIns="18288" bIns="18288">
+          <a:bodyPr wrap="square" lIns="45720" tIns="18288" rIns="45720" bIns="18288" anchor="t">
             <a:spAutoFit/>
           </a:bodyPr>
           <a:lstStyle/>
@@ -5000,7 +5044,7 @@
           <a:noFill/>
         </p:spPr>
         <p:txBody>
-          <a:bodyPr wrap="square" anchor="t" lIns="45720" rIns="45720" tIns="18288" bIns="18288">
+          <a:bodyPr wrap="square" lIns="45720" tIns="18288" rIns="45720" bIns="18288" anchor="t">
             <a:spAutoFit/>
           </a:bodyPr>
           <a:lstStyle/>
@@ -5042,7 +5086,7 @@
           <a:noFill/>
         </p:spPr>
         <p:txBody>
-          <a:bodyPr wrap="square" anchor="t" lIns="45720" rIns="45720" tIns="18288" bIns="18288">
+          <a:bodyPr wrap="square" lIns="45720" tIns="18288" rIns="45720" bIns="18288" anchor="t">
             <a:spAutoFit/>
           </a:bodyPr>
           <a:lstStyle/>
@@ -5133,7 +5177,7 @@
 </file>
 
 <file path=ppt/slides/slide14.xml><?xml version="1.0" encoding="utf-8"?>
-<p:sld xmlns:a="http://schemas.openxmlformats.org/drawingml/2006/main" xmlns:p="http://schemas.openxmlformats.org/presentationml/2006/main" xmlns:r="http://schemas.openxmlformats.org/officeDocument/2006/relationships">
+<p:sld xmlns:a="http://schemas.openxmlformats.org/drawingml/2006/main" xmlns:r="http://schemas.openxmlformats.org/officeDocument/2006/relationships" xmlns:p="http://schemas.openxmlformats.org/presentationml/2006/main">
   <p:cSld>
     <p:spTree>
       <p:nvGrpSpPr>
@@ -5141,7 +5185,14 @@
         <p:cNvGrpSpPr/>
         <p:nvPr/>
       </p:nvGrpSpPr>
-      <p:grpSpPr/>
+      <p:grpSpPr>
+        <a:xfrm>
+          <a:off x="0" y="0"/>
+          <a:ext cx="0" cy="0"/>
+          <a:chOff x="0" y="0"/>
+          <a:chExt cx="0" cy="0"/>
+        </a:xfrm>
+      </p:grpSpPr>
       <p:sp>
         <p:nvSpPr>
           <p:cNvPr id="2" name="Rectangle 1"/>
@@ -5182,6 +5233,7 @@
           <a:lstStyle/>
           <a:p>
             <a:pPr algn="ctr"/>
+            <a:endParaRPr/>
           </a:p>
         </p:txBody>
       </p:sp>
@@ -5225,6 +5277,7 @@
           <a:lstStyle/>
           <a:p>
             <a:pPr algn="ctr"/>
+            <a:endParaRPr/>
           </a:p>
         </p:txBody>
       </p:sp>
@@ -5245,7 +5298,7 @@
           <a:noFill/>
         </p:spPr>
         <p:txBody>
-          <a:bodyPr wrap="square" anchor="ctr" lIns="45720" rIns="45720" tIns="18288" bIns="18288">
+          <a:bodyPr wrap="square" lIns="45720" tIns="18288" rIns="45720" bIns="18288" anchor="ctr">
             <a:spAutoFit/>
           </a:bodyPr>
           <a:lstStyle/>
@@ -5310,6 +5363,7 @@
           <a:lstStyle/>
           <a:p>
             <a:pPr algn="ctr"/>
+            <a:endParaRPr/>
           </a:p>
         </p:txBody>
       </p:sp>
@@ -5384,7 +5438,7 @@
           <a:noFill/>
         </p:spPr>
         <p:txBody>
-          <a:bodyPr wrap="square" anchor="t" lIns="45720" rIns="45720" tIns="18288" bIns="18288">
+          <a:bodyPr wrap="square" lIns="45720" tIns="18288" rIns="45720" bIns="18288" anchor="t">
             <a:spAutoFit/>
           </a:bodyPr>
           <a:lstStyle/>
@@ -5426,7 +5480,7 @@
           <a:noFill/>
         </p:spPr>
         <p:txBody>
-          <a:bodyPr wrap="square" anchor="t" lIns="45720" rIns="45720" tIns="18288" bIns="18288">
+          <a:bodyPr wrap="square" lIns="45720" tIns="18288" rIns="45720" bIns="18288" anchor="t">
             <a:spAutoFit/>
           </a:bodyPr>
           <a:lstStyle/>
@@ -5468,7 +5522,7 @@
           <a:noFill/>
         </p:spPr>
         <p:txBody>
-          <a:bodyPr wrap="square" anchor="t" lIns="45720" rIns="45720" tIns="18288" bIns="18288">
+          <a:bodyPr wrap="square" lIns="45720" tIns="18288" rIns="45720" bIns="18288" anchor="t">
             <a:spAutoFit/>
           </a:bodyPr>
           <a:lstStyle/>
@@ -5559,7 +5613,7 @@
 </file>
 
 <file path=ppt/slides/slide15.xml><?xml version="1.0" encoding="utf-8"?>
-<p:sld xmlns:a="http://schemas.openxmlformats.org/drawingml/2006/main" xmlns:p="http://schemas.openxmlformats.org/presentationml/2006/main" xmlns:r="http://schemas.openxmlformats.org/officeDocument/2006/relationships">
+<p:sld xmlns:a="http://schemas.openxmlformats.org/drawingml/2006/main" xmlns:r="http://schemas.openxmlformats.org/officeDocument/2006/relationships" xmlns:p="http://schemas.openxmlformats.org/presentationml/2006/main">
   <p:cSld>
     <p:spTree>
       <p:nvGrpSpPr>
@@ -5567,7 +5621,14 @@
         <p:cNvGrpSpPr/>
         <p:nvPr/>
       </p:nvGrpSpPr>
-      <p:grpSpPr/>
+      <p:grpSpPr>
+        <a:xfrm>
+          <a:off x="0" y="0"/>
+          <a:ext cx="0" cy="0"/>
+          <a:chOff x="0" y="0"/>
+          <a:chExt cx="0" cy="0"/>
+        </a:xfrm>
+      </p:grpSpPr>
       <p:sp>
         <p:nvSpPr>
           <p:cNvPr id="2" name="Rectangle 1"/>
@@ -5608,6 +5669,7 @@
           <a:lstStyle/>
           <a:p>
             <a:pPr algn="ctr"/>
+            <a:endParaRPr/>
           </a:p>
         </p:txBody>
       </p:sp>
@@ -5651,6 +5713,7 @@
           <a:lstStyle/>
           <a:p>
             <a:pPr algn="ctr"/>
+            <a:endParaRPr/>
           </a:p>
         </p:txBody>
       </p:sp>
@@ -5671,7 +5734,7 @@
           <a:noFill/>
         </p:spPr>
         <p:txBody>
-          <a:bodyPr wrap="square" anchor="ctr" lIns="45720" rIns="45720" tIns="18288" bIns="18288">
+          <a:bodyPr wrap="square" lIns="45720" tIns="18288" rIns="45720" bIns="18288" anchor="ctr">
             <a:spAutoFit/>
           </a:bodyPr>
           <a:lstStyle/>
@@ -5736,6 +5799,7 @@
           <a:lstStyle/>
           <a:p>
             <a:pPr algn="ctr"/>
+            <a:endParaRPr/>
           </a:p>
         </p:txBody>
       </p:sp>
@@ -5810,7 +5874,7 @@
           <a:noFill/>
         </p:spPr>
         <p:txBody>
-          <a:bodyPr wrap="square" anchor="t" lIns="45720" rIns="45720" tIns="18288" bIns="18288">
+          <a:bodyPr wrap="square" lIns="45720" tIns="18288" rIns="45720" bIns="18288" anchor="t">
             <a:spAutoFit/>
           </a:bodyPr>
           <a:lstStyle/>
@@ -5852,7 +5916,7 @@
           <a:noFill/>
         </p:spPr>
         <p:txBody>
-          <a:bodyPr wrap="square" anchor="t" lIns="45720" rIns="45720" tIns="18288" bIns="18288">
+          <a:bodyPr wrap="square" lIns="45720" tIns="18288" rIns="45720" bIns="18288" anchor="t">
             <a:spAutoFit/>
           </a:bodyPr>
           <a:lstStyle/>
@@ -5894,7 +5958,7 @@
           <a:noFill/>
         </p:spPr>
         <p:txBody>
-          <a:bodyPr wrap="square" anchor="t" lIns="45720" rIns="45720" tIns="18288" bIns="18288">
+          <a:bodyPr wrap="square" lIns="45720" tIns="18288" rIns="45720" bIns="18288" anchor="t">
             <a:spAutoFit/>
           </a:bodyPr>
           <a:lstStyle/>
@@ -5966,7 +6030,7 @@
 </file>
 
 <file path=ppt/slides/slide16.xml><?xml version="1.0" encoding="utf-8"?>
-<p:sld xmlns:a="http://schemas.openxmlformats.org/drawingml/2006/main" xmlns:p="http://schemas.openxmlformats.org/presentationml/2006/main" xmlns:r="http://schemas.openxmlformats.org/officeDocument/2006/relationships">
+<p:sld xmlns:a="http://schemas.openxmlformats.org/drawingml/2006/main" xmlns:r="http://schemas.openxmlformats.org/officeDocument/2006/relationships" xmlns:p="http://schemas.openxmlformats.org/presentationml/2006/main">
   <p:cSld>
     <p:spTree>
       <p:nvGrpSpPr>
@@ -5974,7 +6038,14 @@
         <p:cNvGrpSpPr/>
         <p:nvPr/>
       </p:nvGrpSpPr>
-      <p:grpSpPr/>
+      <p:grpSpPr>
+        <a:xfrm>
+          <a:off x="0" y="0"/>
+          <a:ext cx="0" cy="0"/>
+          <a:chOff x="0" y="0"/>
+          <a:chExt cx="0" cy="0"/>
+        </a:xfrm>
+      </p:grpSpPr>
       <p:sp>
         <p:nvSpPr>
           <p:cNvPr id="2" name="Rectangle 1"/>
@@ -6015,6 +6086,7 @@
           <a:lstStyle/>
           <a:p>
             <a:pPr algn="ctr"/>
+            <a:endParaRPr/>
           </a:p>
         </p:txBody>
       </p:sp>
@@ -6058,6 +6130,7 @@
           <a:lstStyle/>
           <a:p>
             <a:pPr algn="ctr"/>
+            <a:endParaRPr/>
           </a:p>
         </p:txBody>
       </p:sp>
@@ -6078,7 +6151,7 @@
           <a:noFill/>
         </p:spPr>
         <p:txBody>
-          <a:bodyPr wrap="square" anchor="ctr" lIns="45720" rIns="45720" tIns="18288" bIns="18288">
+          <a:bodyPr wrap="square" lIns="45720" tIns="18288" rIns="45720" bIns="18288" anchor="ctr">
             <a:spAutoFit/>
           </a:bodyPr>
           <a:lstStyle/>
@@ -6143,6 +6216,7 @@
           <a:lstStyle/>
           <a:p>
             <a:pPr algn="ctr"/>
+            <a:endParaRPr/>
           </a:p>
         </p:txBody>
       </p:sp>
@@ -6217,7 +6291,7 @@
           <a:noFill/>
         </p:spPr>
         <p:txBody>
-          <a:bodyPr wrap="square" anchor="t" lIns="45720" rIns="45720" tIns="18288" bIns="18288">
+          <a:bodyPr wrap="square" lIns="45720" tIns="18288" rIns="45720" bIns="18288" anchor="t">
             <a:spAutoFit/>
           </a:bodyPr>
           <a:lstStyle/>
@@ -6259,7 +6333,7 @@
           <a:noFill/>
         </p:spPr>
         <p:txBody>
-          <a:bodyPr wrap="square" anchor="t" lIns="45720" rIns="45720" tIns="18288" bIns="18288">
+          <a:bodyPr wrap="square" lIns="45720" tIns="18288" rIns="45720" bIns="18288" anchor="t">
             <a:spAutoFit/>
           </a:bodyPr>
           <a:lstStyle/>
@@ -6322,10 +6396,11 @@
           </a:fontRef>
         </p:style>
         <p:txBody>
-          <a:bodyPr rtlCol="0" anchor="ctr" wrap="square" lIns="54864" rIns="54864" tIns="27432" bIns="27432"/>
+          <a:bodyPr wrap="square" lIns="54864" tIns="27432" rIns="54864" bIns="27432" rtlCol="0" anchor="ctr"/>
           <a:lstStyle/>
           <a:p>
             <a:pPr algn="ctr"/>
+            <a:endParaRPr/>
           </a:p>
         </p:txBody>
       </p:sp>
@@ -6346,7 +6421,7 @@
           <a:noFill/>
         </p:spPr>
         <p:txBody>
-          <a:bodyPr wrap="square" anchor="t" lIns="45720" rIns="45720" tIns="18288" bIns="18288">
+          <a:bodyPr wrap="square" lIns="45720" tIns="18288" rIns="45720" bIns="18288" anchor="t">
             <a:spAutoFit/>
           </a:bodyPr>
           <a:lstStyle/>
@@ -6428,10 +6503,11 @@
           </a:fontRef>
         </p:style>
         <p:txBody>
-          <a:bodyPr rtlCol="0" anchor="ctr" wrap="square" lIns="54864" rIns="54864" tIns="27432" bIns="27432"/>
+          <a:bodyPr wrap="square" lIns="54864" tIns="27432" rIns="54864" bIns="27432" rtlCol="0" anchor="ctr"/>
           <a:lstStyle/>
           <a:p>
             <a:pPr algn="ctr"/>
+            <a:endParaRPr/>
           </a:p>
         </p:txBody>
       </p:sp>
@@ -6452,7 +6528,7 @@
           <a:noFill/>
         </p:spPr>
         <p:txBody>
-          <a:bodyPr wrap="square" anchor="t" lIns="45720" rIns="45720" tIns="18288" bIns="18288">
+          <a:bodyPr wrap="square" lIns="45720" tIns="18288" rIns="45720" bIns="18288" anchor="t">
             <a:spAutoFit/>
           </a:bodyPr>
           <a:lstStyle/>
@@ -6534,10 +6610,11 @@
           </a:fontRef>
         </p:style>
         <p:txBody>
-          <a:bodyPr rtlCol="0" anchor="ctr" wrap="square" lIns="54864" rIns="54864" tIns="27432" bIns="27432"/>
+          <a:bodyPr wrap="square" lIns="54864" tIns="27432" rIns="54864" bIns="27432" rtlCol="0" anchor="ctr"/>
           <a:lstStyle/>
           <a:p>
             <a:pPr algn="ctr"/>
+            <a:endParaRPr/>
           </a:p>
         </p:txBody>
       </p:sp>
@@ -6558,7 +6635,7 @@
           <a:noFill/>
         </p:spPr>
         <p:txBody>
-          <a:bodyPr wrap="square" anchor="t" lIns="45720" rIns="45720" tIns="18288" bIns="18288">
+          <a:bodyPr wrap="square" lIns="45720" tIns="18288" rIns="45720" bIns="18288" anchor="t">
             <a:spAutoFit/>
           </a:bodyPr>
           <a:lstStyle/>
@@ -6611,7 +6688,7 @@
 </file>
 
 <file path=ppt/slides/slide17.xml><?xml version="1.0" encoding="utf-8"?>
-<p:sld xmlns:a="http://schemas.openxmlformats.org/drawingml/2006/main" xmlns:p="http://schemas.openxmlformats.org/presentationml/2006/main" xmlns:r="http://schemas.openxmlformats.org/officeDocument/2006/relationships">
+<p:sld xmlns:a="http://schemas.openxmlformats.org/drawingml/2006/main" xmlns:r="http://schemas.openxmlformats.org/officeDocument/2006/relationships" xmlns:p="http://schemas.openxmlformats.org/presentationml/2006/main">
   <p:cSld>
     <p:spTree>
       <p:nvGrpSpPr>
@@ -6619,7 +6696,14 @@
         <p:cNvGrpSpPr/>
         <p:nvPr/>
       </p:nvGrpSpPr>
-      <p:grpSpPr/>
+      <p:grpSpPr>
+        <a:xfrm>
+          <a:off x="0" y="0"/>
+          <a:ext cx="0" cy="0"/>
+          <a:chOff x="0" y="0"/>
+          <a:chExt cx="0" cy="0"/>
+        </a:xfrm>
+      </p:grpSpPr>
       <p:sp>
         <p:nvSpPr>
           <p:cNvPr id="2" name="Rectangle 1"/>
@@ -6660,6 +6744,7 @@
           <a:lstStyle/>
           <a:p>
             <a:pPr algn="ctr"/>
+            <a:endParaRPr/>
           </a:p>
         </p:txBody>
       </p:sp>
@@ -6703,6 +6788,7 @@
           <a:lstStyle/>
           <a:p>
             <a:pPr algn="ctr"/>
+            <a:endParaRPr/>
           </a:p>
         </p:txBody>
       </p:sp>
@@ -6723,7 +6809,7 @@
           <a:noFill/>
         </p:spPr>
         <p:txBody>
-          <a:bodyPr wrap="square" anchor="ctr" lIns="45720" rIns="45720" tIns="18288" bIns="18288">
+          <a:bodyPr wrap="square" lIns="45720" tIns="18288" rIns="45720" bIns="18288" anchor="ctr">
             <a:spAutoFit/>
           </a:bodyPr>
           <a:lstStyle/>
@@ -6788,6 +6874,7 @@
           <a:lstStyle/>
           <a:p>
             <a:pPr algn="ctr"/>
+            <a:endParaRPr/>
           </a:p>
         </p:txBody>
       </p:sp>
@@ -6862,7 +6949,7 @@
           <a:noFill/>
         </p:spPr>
         <p:txBody>
-          <a:bodyPr wrap="square" anchor="t" lIns="45720" rIns="45720" tIns="18288" bIns="18288">
+          <a:bodyPr wrap="square" lIns="45720" tIns="18288" rIns="45720" bIns="18288" anchor="t">
             <a:spAutoFit/>
           </a:bodyPr>
           <a:lstStyle/>
@@ -6904,7 +6991,7 @@
           <a:noFill/>
         </p:spPr>
         <p:txBody>
-          <a:bodyPr wrap="square" anchor="t" lIns="45720" rIns="45720" tIns="18288" bIns="18288">
+          <a:bodyPr wrap="square" lIns="45720" tIns="18288" rIns="45720" bIns="18288" anchor="t">
             <a:spAutoFit/>
           </a:bodyPr>
           <a:lstStyle/>
@@ -6946,7 +7033,7 @@
           <a:noFill/>
         </p:spPr>
         <p:txBody>
-          <a:bodyPr wrap="square" anchor="t" lIns="45720" rIns="45720" tIns="18288" bIns="18288">
+          <a:bodyPr wrap="square" lIns="45720" tIns="18288" rIns="45720" bIns="18288" anchor="t">
             <a:spAutoFit/>
           </a:bodyPr>
           <a:lstStyle/>
@@ -7037,7 +7124,7 @@
 </file>
 
 <file path=ppt/slides/slide18.xml><?xml version="1.0" encoding="utf-8"?>
-<p:sld xmlns:a="http://schemas.openxmlformats.org/drawingml/2006/main" xmlns:p="http://schemas.openxmlformats.org/presentationml/2006/main" xmlns:r="http://schemas.openxmlformats.org/officeDocument/2006/relationships">
+<p:sld xmlns:a="http://schemas.openxmlformats.org/drawingml/2006/main" xmlns:r="http://schemas.openxmlformats.org/officeDocument/2006/relationships" xmlns:p="http://schemas.openxmlformats.org/presentationml/2006/main">
   <p:cSld>
     <p:spTree>
       <p:nvGrpSpPr>
@@ -7045,7 +7132,14 @@
         <p:cNvGrpSpPr/>
         <p:nvPr/>
       </p:nvGrpSpPr>
-      <p:grpSpPr/>
+      <p:grpSpPr>
+        <a:xfrm>
+          <a:off x="0" y="0"/>
+          <a:ext cx="0" cy="0"/>
+          <a:chOff x="0" y="0"/>
+          <a:chExt cx="0" cy="0"/>
+        </a:xfrm>
+      </p:grpSpPr>
       <p:sp>
         <p:nvSpPr>
           <p:cNvPr id="2" name="Rectangle 1"/>
@@ -7086,6 +7180,7 @@
           <a:lstStyle/>
           <a:p>
             <a:pPr algn="ctr"/>
+            <a:endParaRPr/>
           </a:p>
         </p:txBody>
       </p:sp>
@@ -7129,6 +7224,7 @@
           <a:lstStyle/>
           <a:p>
             <a:pPr algn="ctr"/>
+            <a:endParaRPr/>
           </a:p>
         </p:txBody>
       </p:sp>
@@ -7149,7 +7245,7 @@
           <a:noFill/>
         </p:spPr>
         <p:txBody>
-          <a:bodyPr wrap="square" anchor="ctr" lIns="45720" rIns="45720" tIns="18288" bIns="18288">
+          <a:bodyPr wrap="square" lIns="45720" tIns="18288" rIns="45720" bIns="18288" anchor="ctr">
             <a:spAutoFit/>
           </a:bodyPr>
           <a:lstStyle/>
@@ -7214,6 +7310,7 @@
           <a:lstStyle/>
           <a:p>
             <a:pPr algn="ctr"/>
+            <a:endParaRPr/>
           </a:p>
         </p:txBody>
       </p:sp>
@@ -7288,7 +7385,7 @@
           <a:noFill/>
         </p:spPr>
         <p:txBody>
-          <a:bodyPr wrap="square" anchor="t" lIns="45720" rIns="45720" tIns="18288" bIns="18288">
+          <a:bodyPr wrap="square" lIns="45720" tIns="18288" rIns="45720" bIns="18288" anchor="t">
             <a:spAutoFit/>
           </a:bodyPr>
           <a:lstStyle/>
@@ -7330,7 +7427,7 @@
           <a:noFill/>
         </p:spPr>
         <p:txBody>
-          <a:bodyPr wrap="square" anchor="t" lIns="45720" rIns="45720" tIns="18288" bIns="18288">
+          <a:bodyPr wrap="square" lIns="45720" tIns="18288" rIns="45720" bIns="18288" anchor="t">
             <a:spAutoFit/>
           </a:bodyPr>
           <a:lstStyle/>
@@ -7374,14 +7471,32 @@
                 <a:tableStyleId>{5C22544A-7EE6-4342-B048-85BDC9FD1C3A}</a:tableStyleId>
               </a:tblPr>
               <a:tblGrid>
-                <a:gridCol w="3291840"/>
-                <a:gridCol w="5943600"/>
-                <a:gridCol w="1645920"/>
+                <a:gridCol w="3291840">
+                  <a:extLst>
+                    <a:ext uri="{9D8B030D-6E8A-4147-A177-3AD203B41FA5}">
+                      <a16:colId xmlns:a16="http://schemas.microsoft.com/office/drawing/2014/main" val="20000"/>
+                    </a:ext>
+                  </a:extLst>
+                </a:gridCol>
+                <a:gridCol w="5943600">
+                  <a:extLst>
+                    <a:ext uri="{9D8B030D-6E8A-4147-A177-3AD203B41FA5}">
+                      <a16:colId xmlns:a16="http://schemas.microsoft.com/office/drawing/2014/main" val="20001"/>
+                    </a:ext>
+                  </a:extLst>
+                </a:gridCol>
+                <a:gridCol w="1645920">
+                  <a:extLst>
+                    <a:ext uri="{9D8B030D-6E8A-4147-A177-3AD203B41FA5}">
+                      <a16:colId xmlns:a16="http://schemas.microsoft.com/office/drawing/2014/main" val="20002"/>
+                    </a:ext>
+                  </a:extLst>
+                </a:gridCol>
               </a:tblGrid>
               <a:tr h="566928">
                 <a:tc>
                   <a:txBody>
-                    <a:bodyPr wrap="square"/>
+                    <a:bodyPr/>
                     <a:lstStyle/>
                     <a:p>
                       <a:r>
@@ -7403,7 +7518,7 @@
                 </a:tc>
                 <a:tc>
                   <a:txBody>
-                    <a:bodyPr wrap="square"/>
+                    <a:bodyPr/>
                     <a:lstStyle/>
                     <a:p>
                       <a:r>
@@ -7425,7 +7540,7 @@
                 </a:tc>
                 <a:tc>
                   <a:txBody>
-                    <a:bodyPr wrap="square"/>
+                    <a:bodyPr/>
                     <a:lstStyle/>
                     <a:p>
                       <a:r>
@@ -7445,11 +7560,16 @@
                     </a:solidFill>
                   </a:tcPr>
                 </a:tc>
+                <a:extLst>
+                  <a:ext uri="{0D108BD9-81ED-4DB2-BD59-A6C34878D82A}">
+                    <a16:rowId xmlns:a16="http://schemas.microsoft.com/office/drawing/2014/main" val="10000"/>
+                  </a:ext>
+                </a:extLst>
               </a:tr>
               <a:tr h="566928">
                 <a:tc>
                   <a:txBody>
-                    <a:bodyPr wrap="square"/>
+                    <a:bodyPr/>
                     <a:lstStyle/>
                     <a:p>
                       <a:r>
@@ -7471,7 +7591,7 @@
                 </a:tc>
                 <a:tc>
                   <a:txBody>
-                    <a:bodyPr wrap="square"/>
+                    <a:bodyPr/>
                     <a:lstStyle/>
                     <a:p>
                       <a:r>
@@ -7493,7 +7613,7 @@
                 </a:tc>
                 <a:tc>
                   <a:txBody>
-                    <a:bodyPr wrap="square"/>
+                    <a:bodyPr/>
                     <a:lstStyle/>
                     <a:p>
                       <a:r>
@@ -7513,11 +7633,16 @@
                     </a:solidFill>
                   </a:tcPr>
                 </a:tc>
+                <a:extLst>
+                  <a:ext uri="{0D108BD9-81ED-4DB2-BD59-A6C34878D82A}">
+                    <a16:rowId xmlns:a16="http://schemas.microsoft.com/office/drawing/2014/main" val="10001"/>
+                  </a:ext>
+                </a:extLst>
               </a:tr>
               <a:tr h="566928">
                 <a:tc>
                   <a:txBody>
-                    <a:bodyPr wrap="square"/>
+                    <a:bodyPr/>
                     <a:lstStyle/>
                     <a:p>
                       <a:r>
@@ -7539,7 +7664,7 @@
                 </a:tc>
                 <a:tc>
                   <a:txBody>
-                    <a:bodyPr wrap="square"/>
+                    <a:bodyPr/>
                     <a:lstStyle/>
                     <a:p>
                       <a:r>
@@ -7561,7 +7686,7 @@
                 </a:tc>
                 <a:tc>
                   <a:txBody>
-                    <a:bodyPr wrap="square"/>
+                    <a:bodyPr/>
                     <a:lstStyle/>
                     <a:p>
                       <a:r>
@@ -7581,11 +7706,16 @@
                     </a:solidFill>
                   </a:tcPr>
                 </a:tc>
+                <a:extLst>
+                  <a:ext uri="{0D108BD9-81ED-4DB2-BD59-A6C34878D82A}">
+                    <a16:rowId xmlns:a16="http://schemas.microsoft.com/office/drawing/2014/main" val="10002"/>
+                  </a:ext>
+                </a:extLst>
               </a:tr>
               <a:tr h="566928">
                 <a:tc>
                   <a:txBody>
-                    <a:bodyPr wrap="square"/>
+                    <a:bodyPr/>
                     <a:lstStyle/>
                     <a:p>
                       <a:r>
@@ -7607,7 +7737,7 @@
                 </a:tc>
                 <a:tc>
                   <a:txBody>
-                    <a:bodyPr wrap="square"/>
+                    <a:bodyPr/>
                     <a:lstStyle/>
                     <a:p>
                       <a:r>
@@ -7629,7 +7759,7 @@
                 </a:tc>
                 <a:tc>
                   <a:txBody>
-                    <a:bodyPr wrap="square"/>
+                    <a:bodyPr/>
                     <a:lstStyle/>
                     <a:p>
                       <a:r>
@@ -7649,11 +7779,16 @@
                     </a:solidFill>
                   </a:tcPr>
                 </a:tc>
+                <a:extLst>
+                  <a:ext uri="{0D108BD9-81ED-4DB2-BD59-A6C34878D82A}">
+                    <a16:rowId xmlns:a16="http://schemas.microsoft.com/office/drawing/2014/main" val="10003"/>
+                  </a:ext>
+                </a:extLst>
               </a:tr>
               <a:tr h="566928">
                 <a:tc>
                   <a:txBody>
-                    <a:bodyPr wrap="square"/>
+                    <a:bodyPr/>
                     <a:lstStyle/>
                     <a:p>
                       <a:r>
@@ -7675,7 +7810,7 @@
                 </a:tc>
                 <a:tc>
                   <a:txBody>
-                    <a:bodyPr wrap="square"/>
+                    <a:bodyPr/>
                     <a:lstStyle/>
                     <a:p>
                       <a:r>
@@ -7697,7 +7832,7 @@
                 </a:tc>
                 <a:tc>
                   <a:txBody>
-                    <a:bodyPr wrap="square"/>
+                    <a:bodyPr/>
                     <a:lstStyle/>
                     <a:p>
                       <a:r>
@@ -7717,11 +7852,16 @@
                     </a:solidFill>
                   </a:tcPr>
                 </a:tc>
+                <a:extLst>
+                  <a:ext uri="{0D108BD9-81ED-4DB2-BD59-A6C34878D82A}">
+                    <a16:rowId xmlns:a16="http://schemas.microsoft.com/office/drawing/2014/main" val="10004"/>
+                  </a:ext>
+                </a:extLst>
               </a:tr>
               <a:tr h="566928">
                 <a:tc>
                   <a:txBody>
-                    <a:bodyPr wrap="square"/>
+                    <a:bodyPr/>
                     <a:lstStyle/>
                     <a:p>
                       <a:r>
@@ -7743,7 +7883,7 @@
                 </a:tc>
                 <a:tc>
                   <a:txBody>
-                    <a:bodyPr wrap="square"/>
+                    <a:bodyPr/>
                     <a:lstStyle/>
                     <a:p>
                       <a:r>
@@ -7765,7 +7905,7 @@
                 </a:tc>
                 <a:tc>
                   <a:txBody>
-                    <a:bodyPr wrap="square"/>
+                    <a:bodyPr/>
                     <a:lstStyle/>
                     <a:p>
                       <a:r>
@@ -7785,11 +7925,16 @@
                     </a:solidFill>
                   </a:tcPr>
                 </a:tc>
+                <a:extLst>
+                  <a:ext uri="{0D108BD9-81ED-4DB2-BD59-A6C34878D82A}">
+                    <a16:rowId xmlns:a16="http://schemas.microsoft.com/office/drawing/2014/main" val="10005"/>
+                  </a:ext>
+                </a:extLst>
               </a:tr>
               <a:tr h="566928">
                 <a:tc>
                   <a:txBody>
-                    <a:bodyPr wrap="square"/>
+                    <a:bodyPr/>
                     <a:lstStyle/>
                     <a:p>
                       <a:r>
@@ -7811,7 +7956,7 @@
                 </a:tc>
                 <a:tc>
                   <a:txBody>
-                    <a:bodyPr wrap="square"/>
+                    <a:bodyPr/>
                     <a:lstStyle/>
                     <a:p>
                       <a:r>
@@ -7833,7 +7978,7 @@
                 </a:tc>
                 <a:tc>
                   <a:txBody>
-                    <a:bodyPr wrap="square"/>
+                    <a:bodyPr/>
                     <a:lstStyle/>
                     <a:p>
                       <a:r>
@@ -7853,6 +7998,11 @@
                     </a:solidFill>
                   </a:tcPr>
                 </a:tc>
+                <a:extLst>
+                  <a:ext uri="{0D108BD9-81ED-4DB2-BD59-A6C34878D82A}">
+                    <a16:rowId xmlns:a16="http://schemas.microsoft.com/office/drawing/2014/main" val="10006"/>
+                  </a:ext>
+                </a:extLst>
               </a:tr>
             </a:tbl>
           </a:graphicData>
@@ -7867,7 +8017,7 @@
 </file>
 
 <file path=ppt/slides/slide19.xml><?xml version="1.0" encoding="utf-8"?>
-<p:sld xmlns:a="http://schemas.openxmlformats.org/drawingml/2006/main" xmlns:p="http://schemas.openxmlformats.org/presentationml/2006/main" xmlns:r="http://schemas.openxmlformats.org/officeDocument/2006/relationships">
+<p:sld xmlns:a="http://schemas.openxmlformats.org/drawingml/2006/main" xmlns:r="http://schemas.openxmlformats.org/officeDocument/2006/relationships" xmlns:p="http://schemas.openxmlformats.org/presentationml/2006/main">
   <p:cSld>
     <p:spTree>
       <p:nvGrpSpPr>
@@ -7875,7 +8025,14 @@
         <p:cNvGrpSpPr/>
         <p:nvPr/>
       </p:nvGrpSpPr>
-      <p:grpSpPr/>
+      <p:grpSpPr>
+        <a:xfrm>
+          <a:off x="0" y="0"/>
+          <a:ext cx="0" cy="0"/>
+          <a:chOff x="0" y="0"/>
+          <a:chExt cx="0" cy="0"/>
+        </a:xfrm>
+      </p:grpSpPr>
       <p:sp>
         <p:nvSpPr>
           <p:cNvPr id="2" name="Rectangle 1"/>
@@ -7916,6 +8073,7 @@
           <a:lstStyle/>
           <a:p>
             <a:pPr algn="ctr"/>
+            <a:endParaRPr/>
           </a:p>
         </p:txBody>
       </p:sp>
@@ -7959,6 +8117,7 @@
           <a:lstStyle/>
           <a:p>
             <a:pPr algn="ctr"/>
+            <a:endParaRPr/>
           </a:p>
         </p:txBody>
       </p:sp>
@@ -7979,7 +8138,7 @@
           <a:noFill/>
         </p:spPr>
         <p:txBody>
-          <a:bodyPr wrap="square" anchor="ctr" lIns="45720" rIns="45720" tIns="18288" bIns="18288">
+          <a:bodyPr wrap="square" lIns="45720" tIns="18288" rIns="45720" bIns="18288" anchor="ctr">
             <a:spAutoFit/>
           </a:bodyPr>
           <a:lstStyle/>
@@ -8044,6 +8203,7 @@
           <a:lstStyle/>
           <a:p>
             <a:pPr algn="ctr"/>
+            <a:endParaRPr/>
           </a:p>
         </p:txBody>
       </p:sp>
@@ -8118,7 +8278,7 @@
           <a:noFill/>
         </p:spPr>
         <p:txBody>
-          <a:bodyPr wrap="square" anchor="t" lIns="45720" rIns="45720" tIns="18288" bIns="18288">
+          <a:bodyPr wrap="square" lIns="45720" tIns="18288" rIns="45720" bIns="18288" anchor="t">
             <a:spAutoFit/>
           </a:bodyPr>
           <a:lstStyle/>
@@ -8160,7 +8320,7 @@
           <a:noFill/>
         </p:spPr>
         <p:txBody>
-          <a:bodyPr wrap="square" anchor="t" lIns="45720" rIns="45720" tIns="18288" bIns="18288">
+          <a:bodyPr wrap="square" lIns="45720" tIns="18288" rIns="45720" bIns="18288" anchor="t">
             <a:spAutoFit/>
           </a:bodyPr>
           <a:lstStyle/>
@@ -8204,14 +8364,32 @@
                 <a:tableStyleId>{5C22544A-7EE6-4342-B048-85BDC9FD1C3A}</a:tableStyleId>
               </a:tblPr>
               <a:tblGrid>
-                <a:gridCol w="4206240"/>
-                <a:gridCol w="4206240"/>
-                <a:gridCol w="2468880"/>
+                <a:gridCol w="4206240">
+                  <a:extLst>
+                    <a:ext uri="{9D8B030D-6E8A-4147-A177-3AD203B41FA5}">
+                      <a16:colId xmlns:a16="http://schemas.microsoft.com/office/drawing/2014/main" val="20000"/>
+                    </a:ext>
+                  </a:extLst>
+                </a:gridCol>
+                <a:gridCol w="4206240">
+                  <a:extLst>
+                    <a:ext uri="{9D8B030D-6E8A-4147-A177-3AD203B41FA5}">
+                      <a16:colId xmlns:a16="http://schemas.microsoft.com/office/drawing/2014/main" val="20001"/>
+                    </a:ext>
+                  </a:extLst>
+                </a:gridCol>
+                <a:gridCol w="2468880">
+                  <a:extLst>
+                    <a:ext uri="{9D8B030D-6E8A-4147-A177-3AD203B41FA5}">
+                      <a16:colId xmlns:a16="http://schemas.microsoft.com/office/drawing/2014/main" val="20002"/>
+                    </a:ext>
+                  </a:extLst>
+                </a:gridCol>
               </a:tblGrid>
               <a:tr h="566928">
                 <a:tc>
                   <a:txBody>
-                    <a:bodyPr wrap="square"/>
+                    <a:bodyPr/>
                     <a:lstStyle/>
                     <a:p>
                       <a:r>
@@ -8233,7 +8411,7 @@
                 </a:tc>
                 <a:tc>
                   <a:txBody>
-                    <a:bodyPr wrap="square"/>
+                    <a:bodyPr/>
                     <a:lstStyle/>
                     <a:p>
                       <a:r>
@@ -8255,7 +8433,7 @@
                 </a:tc>
                 <a:tc>
                   <a:txBody>
-                    <a:bodyPr wrap="square"/>
+                    <a:bodyPr/>
                     <a:lstStyle/>
                     <a:p>
                       <a:r>
@@ -8275,11 +8453,16 @@
                     </a:solidFill>
                   </a:tcPr>
                 </a:tc>
+                <a:extLst>
+                  <a:ext uri="{0D108BD9-81ED-4DB2-BD59-A6C34878D82A}">
+                    <a16:rowId xmlns:a16="http://schemas.microsoft.com/office/drawing/2014/main" val="10000"/>
+                  </a:ext>
+                </a:extLst>
               </a:tr>
               <a:tr h="566928">
                 <a:tc>
                   <a:txBody>
-                    <a:bodyPr wrap="square"/>
+                    <a:bodyPr/>
                     <a:lstStyle/>
                     <a:p>
                       <a:r>
@@ -8301,7 +8484,7 @@
                 </a:tc>
                 <a:tc>
                   <a:txBody>
-                    <a:bodyPr wrap="square"/>
+                    <a:bodyPr/>
                     <a:lstStyle/>
                     <a:p>
                       <a:r>
@@ -8323,7 +8506,7 @@
                 </a:tc>
                 <a:tc>
                   <a:txBody>
-                    <a:bodyPr wrap="square"/>
+                    <a:bodyPr/>
                     <a:lstStyle/>
                     <a:p>
                       <a:r>
@@ -8343,11 +8526,16 @@
                     </a:solidFill>
                   </a:tcPr>
                 </a:tc>
+                <a:extLst>
+                  <a:ext uri="{0D108BD9-81ED-4DB2-BD59-A6C34878D82A}">
+                    <a16:rowId xmlns:a16="http://schemas.microsoft.com/office/drawing/2014/main" val="10001"/>
+                  </a:ext>
+                </a:extLst>
               </a:tr>
               <a:tr h="566928">
                 <a:tc>
                   <a:txBody>
-                    <a:bodyPr wrap="square"/>
+                    <a:bodyPr/>
                     <a:lstStyle/>
                     <a:p>
                       <a:r>
@@ -8369,7 +8557,7 @@
                 </a:tc>
                 <a:tc>
                   <a:txBody>
-                    <a:bodyPr wrap="square"/>
+                    <a:bodyPr/>
                     <a:lstStyle/>
                     <a:p>
                       <a:r>
@@ -8391,7 +8579,7 @@
                 </a:tc>
                 <a:tc>
                   <a:txBody>
-                    <a:bodyPr wrap="square"/>
+                    <a:bodyPr/>
                     <a:lstStyle/>
                     <a:p>
                       <a:r>
@@ -8411,11 +8599,16 @@
                     </a:solidFill>
                   </a:tcPr>
                 </a:tc>
+                <a:extLst>
+                  <a:ext uri="{0D108BD9-81ED-4DB2-BD59-A6C34878D82A}">
+                    <a16:rowId xmlns:a16="http://schemas.microsoft.com/office/drawing/2014/main" val="10002"/>
+                  </a:ext>
+                </a:extLst>
               </a:tr>
               <a:tr h="566928">
                 <a:tc>
                   <a:txBody>
-                    <a:bodyPr wrap="square"/>
+                    <a:bodyPr/>
                     <a:lstStyle/>
                     <a:p>
                       <a:r>
@@ -8437,7 +8630,7 @@
                 </a:tc>
                 <a:tc>
                   <a:txBody>
-                    <a:bodyPr wrap="square"/>
+                    <a:bodyPr/>
                     <a:lstStyle/>
                     <a:p>
                       <a:r>
@@ -8459,7 +8652,7 @@
                 </a:tc>
                 <a:tc>
                   <a:txBody>
-                    <a:bodyPr wrap="square"/>
+                    <a:bodyPr/>
                     <a:lstStyle/>
                     <a:p>
                       <a:r>
@@ -8479,11 +8672,16 @@
                     </a:solidFill>
                   </a:tcPr>
                 </a:tc>
+                <a:extLst>
+                  <a:ext uri="{0D108BD9-81ED-4DB2-BD59-A6C34878D82A}">
+                    <a16:rowId xmlns:a16="http://schemas.microsoft.com/office/drawing/2014/main" val="10003"/>
+                  </a:ext>
+                </a:extLst>
               </a:tr>
               <a:tr h="566928">
                 <a:tc>
                   <a:txBody>
-                    <a:bodyPr wrap="square"/>
+                    <a:bodyPr/>
                     <a:lstStyle/>
                     <a:p>
                       <a:r>
@@ -8505,7 +8703,7 @@
                 </a:tc>
                 <a:tc>
                   <a:txBody>
-                    <a:bodyPr wrap="square"/>
+                    <a:bodyPr/>
                     <a:lstStyle/>
                     <a:p>
                       <a:r>
@@ -8527,7 +8725,7 @@
                 </a:tc>
                 <a:tc>
                   <a:txBody>
-                    <a:bodyPr wrap="square"/>
+                    <a:bodyPr/>
                     <a:lstStyle/>
                     <a:p>
                       <a:r>
@@ -8547,6 +8745,11 @@
                     </a:solidFill>
                   </a:tcPr>
                 </a:tc>
+                <a:extLst>
+                  <a:ext uri="{0D108BD9-81ED-4DB2-BD59-A6C34878D82A}">
+                    <a16:rowId xmlns:a16="http://schemas.microsoft.com/office/drawing/2014/main" val="10004"/>
+                  </a:ext>
+                </a:extLst>
               </a:tr>
             </a:tbl>
           </a:graphicData>
@@ -8561,7 +8764,7 @@
 </file>
 
 <file path=ppt/slides/slide2.xml><?xml version="1.0" encoding="utf-8"?>
-<p:sld xmlns:a="http://schemas.openxmlformats.org/drawingml/2006/main" xmlns:p="http://schemas.openxmlformats.org/presentationml/2006/main" xmlns:r="http://schemas.openxmlformats.org/officeDocument/2006/relationships">
+<p:sld xmlns:a="http://schemas.openxmlformats.org/drawingml/2006/main" xmlns:r="http://schemas.openxmlformats.org/officeDocument/2006/relationships" xmlns:p="http://schemas.openxmlformats.org/presentationml/2006/main">
   <p:cSld>
     <p:spTree>
       <p:nvGrpSpPr>
@@ -8569,7 +8772,14 @@
         <p:cNvGrpSpPr/>
         <p:nvPr/>
       </p:nvGrpSpPr>
-      <p:grpSpPr/>
+      <p:grpSpPr>
+        <a:xfrm>
+          <a:off x="0" y="0"/>
+          <a:ext cx="0" cy="0"/>
+          <a:chOff x="0" y="0"/>
+          <a:chExt cx="0" cy="0"/>
+        </a:xfrm>
+      </p:grpSpPr>
       <p:sp>
         <p:nvSpPr>
           <p:cNvPr id="2" name="Rectangle 1"/>
@@ -8610,6 +8820,7 @@
           <a:lstStyle/>
           <a:p>
             <a:pPr algn="ctr"/>
+            <a:endParaRPr/>
           </a:p>
         </p:txBody>
       </p:sp>
@@ -8653,6 +8864,7 @@
           <a:lstStyle/>
           <a:p>
             <a:pPr algn="ctr"/>
+            <a:endParaRPr/>
           </a:p>
         </p:txBody>
       </p:sp>
@@ -8673,7 +8885,7 @@
           <a:noFill/>
         </p:spPr>
         <p:txBody>
-          <a:bodyPr wrap="square" anchor="ctr" lIns="45720" rIns="45720" tIns="18288" bIns="18288">
+          <a:bodyPr wrap="square" lIns="45720" tIns="18288" rIns="45720" bIns="18288" anchor="ctr">
             <a:spAutoFit/>
           </a:bodyPr>
           <a:lstStyle/>
@@ -8738,6 +8950,7 @@
           <a:lstStyle/>
           <a:p>
             <a:pPr algn="ctr"/>
+            <a:endParaRPr/>
           </a:p>
         </p:txBody>
       </p:sp>
@@ -8812,7 +9025,7 @@
           <a:noFill/>
         </p:spPr>
         <p:txBody>
-          <a:bodyPr wrap="square" anchor="t" lIns="45720" rIns="45720" tIns="18288" bIns="18288">
+          <a:bodyPr wrap="square" lIns="45720" tIns="18288" rIns="45720" bIns="18288" anchor="t">
             <a:spAutoFit/>
           </a:bodyPr>
           <a:lstStyle/>
@@ -8854,7 +9067,7 @@
           <a:noFill/>
         </p:spPr>
         <p:txBody>
-          <a:bodyPr wrap="square" anchor="t" lIns="45720" rIns="45720" tIns="18288" bIns="18288">
+          <a:bodyPr wrap="square" lIns="45720" tIns="18288" rIns="45720" bIns="18288" anchor="t">
             <a:spAutoFit/>
           </a:bodyPr>
           <a:lstStyle/>
@@ -8896,7 +9109,7 @@
           <a:noFill/>
         </p:spPr>
         <p:txBody>
-          <a:bodyPr wrap="square" anchor="t" lIns="45720" rIns="45720" tIns="18288" bIns="18288">
+          <a:bodyPr wrap="square" lIns="45720" tIns="18288" rIns="45720" bIns="18288" anchor="t">
             <a:spAutoFit/>
           </a:bodyPr>
           <a:lstStyle/>
@@ -8987,7 +9200,7 @@
 </file>
 
 <file path=ppt/slides/slide20.xml><?xml version="1.0" encoding="utf-8"?>
-<p:sld xmlns:a="http://schemas.openxmlformats.org/drawingml/2006/main" xmlns:p="http://schemas.openxmlformats.org/presentationml/2006/main" xmlns:r="http://schemas.openxmlformats.org/officeDocument/2006/relationships">
+<p:sld xmlns:a="http://schemas.openxmlformats.org/drawingml/2006/main" xmlns:r="http://schemas.openxmlformats.org/officeDocument/2006/relationships" xmlns:p="http://schemas.openxmlformats.org/presentationml/2006/main">
   <p:cSld>
     <p:spTree>
       <p:nvGrpSpPr>
@@ -8995,7 +9208,14 @@
         <p:cNvGrpSpPr/>
         <p:nvPr/>
       </p:nvGrpSpPr>
-      <p:grpSpPr/>
+      <p:grpSpPr>
+        <a:xfrm>
+          <a:off x="0" y="0"/>
+          <a:ext cx="0" cy="0"/>
+          <a:chOff x="0" y="0"/>
+          <a:chExt cx="0" cy="0"/>
+        </a:xfrm>
+      </p:grpSpPr>
       <p:sp>
         <p:nvSpPr>
           <p:cNvPr id="2" name="Rectangle 1"/>
@@ -9036,6 +9256,7 @@
           <a:lstStyle/>
           <a:p>
             <a:pPr algn="ctr"/>
+            <a:endParaRPr/>
           </a:p>
         </p:txBody>
       </p:sp>
@@ -9079,6 +9300,7 @@
           <a:lstStyle/>
           <a:p>
             <a:pPr algn="ctr"/>
+            <a:endParaRPr/>
           </a:p>
         </p:txBody>
       </p:sp>
@@ -9099,7 +9321,7 @@
           <a:noFill/>
         </p:spPr>
         <p:txBody>
-          <a:bodyPr wrap="square" anchor="ctr" lIns="45720" rIns="45720" tIns="18288" bIns="18288">
+          <a:bodyPr wrap="square" lIns="45720" tIns="18288" rIns="45720" bIns="18288" anchor="ctr">
             <a:spAutoFit/>
           </a:bodyPr>
           <a:lstStyle/>
@@ -9164,6 +9386,7 @@
           <a:lstStyle/>
           <a:p>
             <a:pPr algn="ctr"/>
+            <a:endParaRPr/>
           </a:p>
         </p:txBody>
       </p:sp>
@@ -9238,7 +9461,7 @@
           <a:noFill/>
         </p:spPr>
         <p:txBody>
-          <a:bodyPr wrap="square" anchor="t" lIns="45720" rIns="45720" tIns="18288" bIns="18288">
+          <a:bodyPr wrap="square" lIns="45720" tIns="18288" rIns="45720" bIns="18288" anchor="t">
             <a:spAutoFit/>
           </a:bodyPr>
           <a:lstStyle/>
@@ -9280,7 +9503,7 @@
           <a:noFill/>
         </p:spPr>
         <p:txBody>
-          <a:bodyPr wrap="square" anchor="t" lIns="45720" rIns="45720" tIns="18288" bIns="18288">
+          <a:bodyPr wrap="square" lIns="45720" tIns="18288" rIns="45720" bIns="18288" anchor="t">
             <a:spAutoFit/>
           </a:bodyPr>
           <a:lstStyle/>
@@ -9322,7 +9545,7 @@
           <a:noFill/>
         </p:spPr>
         <p:txBody>
-          <a:bodyPr wrap="square" anchor="t" lIns="45720" rIns="45720" tIns="18288" bIns="18288">
+          <a:bodyPr wrap="square" lIns="45720" tIns="18288" rIns="45720" bIns="18288" anchor="t">
             <a:spAutoFit/>
           </a:bodyPr>
           <a:lstStyle/>
@@ -9413,7 +9636,7 @@
 </file>
 
 <file path=ppt/slides/slide21.xml><?xml version="1.0" encoding="utf-8"?>
-<p:sld xmlns:a="http://schemas.openxmlformats.org/drawingml/2006/main" xmlns:p="http://schemas.openxmlformats.org/presentationml/2006/main" xmlns:r="http://schemas.openxmlformats.org/officeDocument/2006/relationships">
+<p:sld xmlns:a="http://schemas.openxmlformats.org/drawingml/2006/main" xmlns:r="http://schemas.openxmlformats.org/officeDocument/2006/relationships" xmlns:p="http://schemas.openxmlformats.org/presentationml/2006/main">
   <p:cSld>
     <p:spTree>
       <p:nvGrpSpPr>
@@ -9421,7 +9644,14 @@
         <p:cNvGrpSpPr/>
         <p:nvPr/>
       </p:nvGrpSpPr>
-      <p:grpSpPr/>
+      <p:grpSpPr>
+        <a:xfrm>
+          <a:off x="0" y="0"/>
+          <a:ext cx="0" cy="0"/>
+          <a:chOff x="0" y="0"/>
+          <a:chExt cx="0" cy="0"/>
+        </a:xfrm>
+      </p:grpSpPr>
       <p:sp>
         <p:nvSpPr>
           <p:cNvPr id="2" name="Rectangle 1"/>
@@ -9462,6 +9692,7 @@
           <a:lstStyle/>
           <a:p>
             <a:pPr algn="ctr"/>
+            <a:endParaRPr/>
           </a:p>
         </p:txBody>
       </p:sp>
@@ -9505,6 +9736,7 @@
           <a:lstStyle/>
           <a:p>
             <a:pPr algn="ctr"/>
+            <a:endParaRPr/>
           </a:p>
         </p:txBody>
       </p:sp>
@@ -9525,7 +9757,7 @@
           <a:noFill/>
         </p:spPr>
         <p:txBody>
-          <a:bodyPr wrap="square" anchor="ctr" lIns="45720" rIns="45720" tIns="18288" bIns="18288">
+          <a:bodyPr wrap="square" lIns="45720" tIns="18288" rIns="45720" bIns="18288" anchor="ctr">
             <a:spAutoFit/>
           </a:bodyPr>
           <a:lstStyle/>
@@ -9590,6 +9822,7 @@
           <a:lstStyle/>
           <a:p>
             <a:pPr algn="ctr"/>
+            <a:endParaRPr/>
           </a:p>
         </p:txBody>
       </p:sp>
@@ -9664,7 +9897,7 @@
           <a:noFill/>
         </p:spPr>
         <p:txBody>
-          <a:bodyPr wrap="square" anchor="t" lIns="45720" rIns="45720" tIns="18288" bIns="18288">
+          <a:bodyPr wrap="square" lIns="45720" tIns="18288" rIns="45720" bIns="18288" anchor="t">
             <a:spAutoFit/>
           </a:bodyPr>
           <a:lstStyle/>
@@ -9706,7 +9939,7 @@
           <a:noFill/>
         </p:spPr>
         <p:txBody>
-          <a:bodyPr wrap="square" anchor="t" lIns="45720" rIns="45720" tIns="18288" bIns="18288">
+          <a:bodyPr wrap="square" lIns="45720" tIns="18288" rIns="45720" bIns="18288" anchor="t">
             <a:spAutoFit/>
           </a:bodyPr>
           <a:lstStyle/>
@@ -9748,7 +9981,7 @@
           <a:noFill/>
         </p:spPr>
         <p:txBody>
-          <a:bodyPr wrap="square" anchor="t" lIns="45720" rIns="45720" tIns="18288" bIns="18288">
+          <a:bodyPr wrap="square" lIns="45720" tIns="18288" rIns="45720" bIns="18288" anchor="t">
             <a:spAutoFit/>
           </a:bodyPr>
           <a:lstStyle/>
@@ -9849,7 +10082,7 @@
           </a:fontRef>
         </p:style>
         <p:txBody>
-          <a:bodyPr rtlCol="0" anchor="ctr" wrap="square" lIns="54864" rIns="54864" tIns="27432" bIns="27432"/>
+          <a:bodyPr wrap="square" lIns="54864" tIns="27432" rIns="54864" bIns="27432" rtlCol="0" anchor="ctr"/>
           <a:lstStyle/>
           <a:p>
             <a:pPr algn="ctr"/>
@@ -9903,7 +10136,7 @@
           </a:fontRef>
         </p:style>
         <p:txBody>
-          <a:bodyPr rtlCol="0" anchor="ctr" wrap="square" lIns="54864" rIns="54864" tIns="27432" bIns="27432"/>
+          <a:bodyPr wrap="square" lIns="54864" tIns="27432" rIns="54864" bIns="27432" rtlCol="0" anchor="ctr"/>
           <a:lstStyle/>
           <a:p>
             <a:pPr algn="ctr"/>
@@ -9928,7 +10161,7 @@
 </file>
 
 <file path=ppt/slides/slide22.xml><?xml version="1.0" encoding="utf-8"?>
-<p:sld xmlns:a="http://schemas.openxmlformats.org/drawingml/2006/main" xmlns:p="http://schemas.openxmlformats.org/presentationml/2006/main" xmlns:r="http://schemas.openxmlformats.org/officeDocument/2006/relationships">
+<p:sld xmlns:a="http://schemas.openxmlformats.org/drawingml/2006/main" xmlns:r="http://schemas.openxmlformats.org/officeDocument/2006/relationships" xmlns:p="http://schemas.openxmlformats.org/presentationml/2006/main">
   <p:cSld>
     <p:spTree>
       <p:nvGrpSpPr>
@@ -9936,7 +10169,14 @@
         <p:cNvGrpSpPr/>
         <p:nvPr/>
       </p:nvGrpSpPr>
-      <p:grpSpPr/>
+      <p:grpSpPr>
+        <a:xfrm>
+          <a:off x="0" y="0"/>
+          <a:ext cx="0" cy="0"/>
+          <a:chOff x="0" y="0"/>
+          <a:chExt cx="0" cy="0"/>
+        </a:xfrm>
+      </p:grpSpPr>
       <p:sp>
         <p:nvSpPr>
           <p:cNvPr id="2" name="Rectangle 1"/>
@@ -9977,6 +10217,7 @@
           <a:lstStyle/>
           <a:p>
             <a:pPr algn="ctr"/>
+            <a:endParaRPr/>
           </a:p>
         </p:txBody>
       </p:sp>
@@ -10020,6 +10261,7 @@
           <a:lstStyle/>
           <a:p>
             <a:pPr algn="ctr"/>
+            <a:endParaRPr/>
           </a:p>
         </p:txBody>
       </p:sp>
@@ -10040,7 +10282,7 @@
           <a:noFill/>
         </p:spPr>
         <p:txBody>
-          <a:bodyPr wrap="square" anchor="t" lIns="45720" rIns="45720" tIns="18288" bIns="18288">
+          <a:bodyPr wrap="square" lIns="45720" tIns="18288" rIns="45720" bIns="18288" anchor="t">
             <a:spAutoFit/>
           </a:bodyPr>
           <a:lstStyle/>
@@ -10082,7 +10324,7 @@
           <a:noFill/>
         </p:spPr>
         <p:txBody>
-          <a:bodyPr wrap="square" anchor="t" lIns="45720" rIns="45720" tIns="18288" bIns="18288">
+          <a:bodyPr wrap="square" lIns="45720" tIns="18288" rIns="45720" bIns="18288" anchor="t">
             <a:spAutoFit/>
           </a:bodyPr>
           <a:lstStyle/>
@@ -10124,7 +10366,7 @@
           <a:noFill/>
         </p:spPr>
         <p:txBody>
-          <a:bodyPr wrap="square" anchor="t" lIns="45720" rIns="45720" tIns="18288" bIns="18288">
+          <a:bodyPr wrap="square" lIns="45720" tIns="18288" rIns="45720" bIns="18288" anchor="t">
             <a:spAutoFit/>
           </a:bodyPr>
           <a:lstStyle/>
@@ -10196,7 +10438,7 @@
 </file>
 
 <file path=ppt/slides/slide3.xml><?xml version="1.0" encoding="utf-8"?>
-<p:sld xmlns:a="http://schemas.openxmlformats.org/drawingml/2006/main" xmlns:p="http://schemas.openxmlformats.org/presentationml/2006/main" xmlns:r="http://schemas.openxmlformats.org/officeDocument/2006/relationships">
+<p:sld xmlns:a="http://schemas.openxmlformats.org/drawingml/2006/main" xmlns:r="http://schemas.openxmlformats.org/officeDocument/2006/relationships" xmlns:p="http://schemas.openxmlformats.org/presentationml/2006/main">
   <p:cSld>
     <p:spTree>
       <p:nvGrpSpPr>
@@ -10204,7 +10446,14 @@
         <p:cNvGrpSpPr/>
         <p:nvPr/>
       </p:nvGrpSpPr>
-      <p:grpSpPr/>
+      <p:grpSpPr>
+        <a:xfrm>
+          <a:off x="0" y="0"/>
+          <a:ext cx="0" cy="0"/>
+          <a:chOff x="0" y="0"/>
+          <a:chExt cx="0" cy="0"/>
+        </a:xfrm>
+      </p:grpSpPr>
       <p:sp>
         <p:nvSpPr>
           <p:cNvPr id="2" name="Rectangle 1"/>
@@ -10245,6 +10494,7 @@
           <a:lstStyle/>
           <a:p>
             <a:pPr algn="ctr"/>
+            <a:endParaRPr/>
           </a:p>
         </p:txBody>
       </p:sp>
@@ -10288,6 +10538,7 @@
           <a:lstStyle/>
           <a:p>
             <a:pPr algn="ctr"/>
+            <a:endParaRPr/>
           </a:p>
         </p:txBody>
       </p:sp>
@@ -10308,7 +10559,7 @@
           <a:noFill/>
         </p:spPr>
         <p:txBody>
-          <a:bodyPr wrap="square" anchor="ctr" lIns="45720" rIns="45720" tIns="18288" bIns="18288">
+          <a:bodyPr wrap="square" lIns="45720" tIns="18288" rIns="45720" bIns="18288" anchor="ctr">
             <a:spAutoFit/>
           </a:bodyPr>
           <a:lstStyle/>
@@ -10373,6 +10624,7 @@
           <a:lstStyle/>
           <a:p>
             <a:pPr algn="ctr"/>
+            <a:endParaRPr/>
           </a:p>
         </p:txBody>
       </p:sp>
@@ -10447,7 +10699,7 @@
           <a:noFill/>
         </p:spPr>
         <p:txBody>
-          <a:bodyPr wrap="square" anchor="t" lIns="45720" rIns="45720" tIns="18288" bIns="18288">
+          <a:bodyPr wrap="square" lIns="45720" tIns="18288" rIns="45720" bIns="18288" anchor="t">
             <a:spAutoFit/>
           </a:bodyPr>
           <a:lstStyle/>
@@ -10489,7 +10741,7 @@
           <a:noFill/>
         </p:spPr>
         <p:txBody>
-          <a:bodyPr wrap="square" anchor="t" lIns="45720" rIns="45720" tIns="18288" bIns="18288">
+          <a:bodyPr wrap="square" lIns="45720" tIns="18288" rIns="45720" bIns="18288" anchor="t">
             <a:spAutoFit/>
           </a:bodyPr>
           <a:lstStyle/>
@@ -10531,7 +10783,7 @@
           <a:noFill/>
         </p:spPr>
         <p:txBody>
-          <a:bodyPr wrap="square" anchor="t" lIns="45720" rIns="45720" tIns="18288" bIns="18288">
+          <a:bodyPr wrap="square" lIns="45720" tIns="18288" rIns="45720" bIns="18288" anchor="t">
             <a:spAutoFit/>
           </a:bodyPr>
           <a:lstStyle/>
@@ -10641,7 +10893,7 @@
 </file>
 
 <file path=ppt/slides/slide4.xml><?xml version="1.0" encoding="utf-8"?>
-<p:sld xmlns:a="http://schemas.openxmlformats.org/drawingml/2006/main" xmlns:p="http://schemas.openxmlformats.org/presentationml/2006/main" xmlns:r="http://schemas.openxmlformats.org/officeDocument/2006/relationships">
+<p:sld xmlns:a="http://schemas.openxmlformats.org/drawingml/2006/main" xmlns:r="http://schemas.openxmlformats.org/officeDocument/2006/relationships" xmlns:p="http://schemas.openxmlformats.org/presentationml/2006/main">
   <p:cSld>
     <p:spTree>
       <p:nvGrpSpPr>
@@ -10649,7 +10901,14 @@
         <p:cNvGrpSpPr/>
         <p:nvPr/>
       </p:nvGrpSpPr>
-      <p:grpSpPr/>
+      <p:grpSpPr>
+        <a:xfrm>
+          <a:off x="0" y="0"/>
+          <a:ext cx="0" cy="0"/>
+          <a:chOff x="0" y="0"/>
+          <a:chExt cx="0" cy="0"/>
+        </a:xfrm>
+      </p:grpSpPr>
       <p:sp>
         <p:nvSpPr>
           <p:cNvPr id="2" name="Rectangle 1"/>
@@ -10690,6 +10949,7 @@
           <a:lstStyle/>
           <a:p>
             <a:pPr algn="ctr"/>
+            <a:endParaRPr/>
           </a:p>
         </p:txBody>
       </p:sp>
@@ -10733,6 +10993,7 @@
           <a:lstStyle/>
           <a:p>
             <a:pPr algn="ctr"/>
+            <a:endParaRPr/>
           </a:p>
         </p:txBody>
       </p:sp>
@@ -10753,7 +11014,7 @@
           <a:noFill/>
         </p:spPr>
         <p:txBody>
-          <a:bodyPr wrap="square" anchor="ctr" lIns="45720" rIns="45720" tIns="18288" bIns="18288">
+          <a:bodyPr wrap="square" lIns="45720" tIns="18288" rIns="45720" bIns="18288" anchor="ctr">
             <a:spAutoFit/>
           </a:bodyPr>
           <a:lstStyle/>
@@ -10818,6 +11079,7 @@
           <a:lstStyle/>
           <a:p>
             <a:pPr algn="ctr"/>
+            <a:endParaRPr/>
           </a:p>
         </p:txBody>
       </p:sp>
@@ -10892,7 +11154,7 @@
           <a:noFill/>
         </p:spPr>
         <p:txBody>
-          <a:bodyPr wrap="square" anchor="t" lIns="45720" rIns="45720" tIns="18288" bIns="18288">
+          <a:bodyPr wrap="square" lIns="45720" tIns="18288" rIns="45720" bIns="18288" anchor="t">
             <a:spAutoFit/>
           </a:bodyPr>
           <a:lstStyle/>
@@ -10934,7 +11196,7 @@
           <a:noFill/>
         </p:spPr>
         <p:txBody>
-          <a:bodyPr wrap="square" anchor="t" lIns="45720" rIns="45720" tIns="18288" bIns="18288">
+          <a:bodyPr wrap="square" lIns="45720" tIns="18288" rIns="45720" bIns="18288" anchor="t">
             <a:spAutoFit/>
           </a:bodyPr>
           <a:lstStyle/>
@@ -10997,10 +11259,11 @@
           </a:fontRef>
         </p:style>
         <p:txBody>
-          <a:bodyPr rtlCol="0" anchor="ctr" wrap="square" lIns="54864" rIns="54864" tIns="27432" bIns="27432"/>
+          <a:bodyPr wrap="square" lIns="54864" tIns="27432" rIns="54864" bIns="27432" rtlCol="0" anchor="ctr"/>
           <a:lstStyle/>
           <a:p>
             <a:pPr algn="ctr"/>
+            <a:endParaRPr/>
           </a:p>
         </p:txBody>
       </p:sp>
@@ -11021,7 +11284,7 @@
           <a:noFill/>
         </p:spPr>
         <p:txBody>
-          <a:bodyPr wrap="square" anchor="t" lIns="45720" rIns="45720" tIns="18288" bIns="18288">
+          <a:bodyPr wrap="square" lIns="45720" tIns="18288" rIns="45720" bIns="18288" anchor="t">
             <a:spAutoFit/>
           </a:bodyPr>
           <a:lstStyle/>
@@ -11103,10 +11366,11 @@
           </a:fontRef>
         </p:style>
         <p:txBody>
-          <a:bodyPr rtlCol="0" anchor="ctr" wrap="square" lIns="54864" rIns="54864" tIns="27432" bIns="27432"/>
+          <a:bodyPr wrap="square" lIns="54864" tIns="27432" rIns="54864" bIns="27432" rtlCol="0" anchor="ctr"/>
           <a:lstStyle/>
           <a:p>
             <a:pPr algn="ctr"/>
+            <a:endParaRPr/>
           </a:p>
         </p:txBody>
       </p:sp>
@@ -11127,7 +11391,7 @@
           <a:noFill/>
         </p:spPr>
         <p:txBody>
-          <a:bodyPr wrap="square" anchor="t" lIns="45720" rIns="45720" tIns="18288" bIns="18288">
+          <a:bodyPr wrap="square" lIns="45720" tIns="18288" rIns="45720" bIns="18288" anchor="t">
             <a:spAutoFit/>
           </a:bodyPr>
           <a:lstStyle/>
@@ -11209,10 +11473,11 @@
           </a:fontRef>
         </p:style>
         <p:txBody>
-          <a:bodyPr rtlCol="0" anchor="ctr" wrap="square" lIns="54864" rIns="54864" tIns="27432" bIns="27432"/>
+          <a:bodyPr wrap="square" lIns="54864" tIns="27432" rIns="54864" bIns="27432" rtlCol="0" anchor="ctr"/>
           <a:lstStyle/>
           <a:p>
             <a:pPr algn="ctr"/>
+            <a:endParaRPr/>
           </a:p>
         </p:txBody>
       </p:sp>
@@ -11233,7 +11498,7 @@
           <a:noFill/>
         </p:spPr>
         <p:txBody>
-          <a:bodyPr wrap="square" anchor="t" lIns="45720" rIns="45720" tIns="18288" bIns="18288">
+          <a:bodyPr wrap="square" lIns="45720" tIns="18288" rIns="45720" bIns="18288" anchor="t">
             <a:spAutoFit/>
           </a:bodyPr>
           <a:lstStyle/>
@@ -11305,7 +11570,7 @@
 </file>
 
 <file path=ppt/slides/slide5.xml><?xml version="1.0" encoding="utf-8"?>
-<p:sld xmlns:a="http://schemas.openxmlformats.org/drawingml/2006/main" xmlns:p="http://schemas.openxmlformats.org/presentationml/2006/main" xmlns:r="http://schemas.openxmlformats.org/officeDocument/2006/relationships">
+<p:sld xmlns:a="http://schemas.openxmlformats.org/drawingml/2006/main" xmlns:r="http://schemas.openxmlformats.org/officeDocument/2006/relationships" xmlns:p="http://schemas.openxmlformats.org/presentationml/2006/main">
   <p:cSld>
     <p:spTree>
       <p:nvGrpSpPr>
@@ -11313,7 +11578,14 @@
         <p:cNvGrpSpPr/>
         <p:nvPr/>
       </p:nvGrpSpPr>
-      <p:grpSpPr/>
+      <p:grpSpPr>
+        <a:xfrm>
+          <a:off x="0" y="0"/>
+          <a:ext cx="0" cy="0"/>
+          <a:chOff x="0" y="0"/>
+          <a:chExt cx="0" cy="0"/>
+        </a:xfrm>
+      </p:grpSpPr>
       <p:sp>
         <p:nvSpPr>
           <p:cNvPr id="2" name="Rectangle 1"/>
@@ -11354,6 +11626,7 @@
           <a:lstStyle/>
           <a:p>
             <a:pPr algn="ctr"/>
+            <a:endParaRPr/>
           </a:p>
         </p:txBody>
       </p:sp>
@@ -11397,6 +11670,7 @@
           <a:lstStyle/>
           <a:p>
             <a:pPr algn="ctr"/>
+            <a:endParaRPr/>
           </a:p>
         </p:txBody>
       </p:sp>
@@ -11417,7 +11691,7 @@
           <a:noFill/>
         </p:spPr>
         <p:txBody>
-          <a:bodyPr wrap="square" anchor="ctr" lIns="45720" rIns="45720" tIns="18288" bIns="18288">
+          <a:bodyPr wrap="square" lIns="45720" tIns="18288" rIns="45720" bIns="18288" anchor="ctr">
             <a:spAutoFit/>
           </a:bodyPr>
           <a:lstStyle/>
@@ -11482,6 +11756,7 @@
           <a:lstStyle/>
           <a:p>
             <a:pPr algn="ctr"/>
+            <a:endParaRPr/>
           </a:p>
         </p:txBody>
       </p:sp>
@@ -11556,7 +11831,7 @@
           <a:noFill/>
         </p:spPr>
         <p:txBody>
-          <a:bodyPr wrap="square" anchor="t" lIns="45720" rIns="45720" tIns="18288" bIns="18288">
+          <a:bodyPr wrap="square" lIns="45720" tIns="18288" rIns="45720" bIns="18288" anchor="t">
             <a:spAutoFit/>
           </a:bodyPr>
           <a:lstStyle/>
@@ -11598,7 +11873,7 @@
           <a:noFill/>
         </p:spPr>
         <p:txBody>
-          <a:bodyPr wrap="square" anchor="t" lIns="45720" rIns="45720" tIns="18288" bIns="18288">
+          <a:bodyPr wrap="square" lIns="45720" tIns="18288" rIns="45720" bIns="18288" anchor="t">
             <a:spAutoFit/>
           </a:bodyPr>
           <a:lstStyle/>
@@ -11640,7 +11915,7 @@
           <a:noFill/>
         </p:spPr>
         <p:txBody>
-          <a:bodyPr wrap="square" anchor="t" lIns="45720" rIns="45720" tIns="18288" bIns="18288">
+          <a:bodyPr wrap="square" lIns="45720" tIns="18288" rIns="45720" bIns="18288" anchor="t">
             <a:spAutoFit/>
           </a:bodyPr>
           <a:lstStyle/>
@@ -11731,7 +12006,7 @@
 </file>
 
 <file path=ppt/slides/slide6.xml><?xml version="1.0" encoding="utf-8"?>
-<p:sld xmlns:a="http://schemas.openxmlformats.org/drawingml/2006/main" xmlns:p="http://schemas.openxmlformats.org/presentationml/2006/main" xmlns:r="http://schemas.openxmlformats.org/officeDocument/2006/relationships">
+<p:sld xmlns:a="http://schemas.openxmlformats.org/drawingml/2006/main" xmlns:r="http://schemas.openxmlformats.org/officeDocument/2006/relationships" xmlns:p="http://schemas.openxmlformats.org/presentationml/2006/main">
   <p:cSld>
     <p:spTree>
       <p:nvGrpSpPr>
@@ -11739,7 +12014,14 @@
         <p:cNvGrpSpPr/>
         <p:nvPr/>
       </p:nvGrpSpPr>
-      <p:grpSpPr/>
+      <p:grpSpPr>
+        <a:xfrm>
+          <a:off x="0" y="0"/>
+          <a:ext cx="0" cy="0"/>
+          <a:chOff x="0" y="0"/>
+          <a:chExt cx="0" cy="0"/>
+        </a:xfrm>
+      </p:grpSpPr>
       <p:sp>
         <p:nvSpPr>
           <p:cNvPr id="2" name="Rectangle 1"/>
@@ -11780,6 +12062,7 @@
           <a:lstStyle/>
           <a:p>
             <a:pPr algn="ctr"/>
+            <a:endParaRPr/>
           </a:p>
         </p:txBody>
       </p:sp>
@@ -11823,6 +12106,7 @@
           <a:lstStyle/>
           <a:p>
             <a:pPr algn="ctr"/>
+            <a:endParaRPr/>
           </a:p>
         </p:txBody>
       </p:sp>
@@ -11843,7 +12127,7 @@
           <a:noFill/>
         </p:spPr>
         <p:txBody>
-          <a:bodyPr wrap="square" anchor="ctr" lIns="45720" rIns="45720" tIns="18288" bIns="18288">
+          <a:bodyPr wrap="square" lIns="45720" tIns="18288" rIns="45720" bIns="18288" anchor="ctr">
             <a:spAutoFit/>
           </a:bodyPr>
           <a:lstStyle/>
@@ -11908,6 +12192,7 @@
           <a:lstStyle/>
           <a:p>
             <a:pPr algn="ctr"/>
+            <a:endParaRPr/>
           </a:p>
         </p:txBody>
       </p:sp>
@@ -11982,7 +12267,7 @@
           <a:noFill/>
         </p:spPr>
         <p:txBody>
-          <a:bodyPr wrap="square" anchor="t" lIns="45720" rIns="45720" tIns="18288" bIns="18288">
+          <a:bodyPr wrap="square" lIns="45720" tIns="18288" rIns="45720" bIns="18288" anchor="t">
             <a:spAutoFit/>
           </a:bodyPr>
           <a:lstStyle/>
@@ -12024,7 +12309,7 @@
           <a:noFill/>
         </p:spPr>
         <p:txBody>
-          <a:bodyPr wrap="square" anchor="t" lIns="45720" rIns="45720" tIns="18288" bIns="18288">
+          <a:bodyPr wrap="square" lIns="45720" tIns="18288" rIns="45720" bIns="18288" anchor="t">
             <a:spAutoFit/>
           </a:bodyPr>
           <a:lstStyle/>
@@ -12057,7 +12342,7 @@
         </p:nvSpPr>
         <p:spPr>
           <a:xfrm>
-            <a:off x="4846320" y="1508760"/>
+            <a:off x="4846320" y="2217675"/>
             <a:ext cx="2468880" cy="658368"/>
           </a:xfrm>
           <a:prstGeom prst="roundRect">
@@ -12087,7 +12372,7 @@
           </a:fontRef>
         </p:style>
         <p:txBody>
-          <a:bodyPr rtlCol="0" anchor="ctr" wrap="square" lIns="54864" rIns="54864" tIns="27432" bIns="27432"/>
+          <a:bodyPr wrap="square" lIns="54864" tIns="27432" rIns="54864" bIns="27432" rtlCol="0" anchor="ctr"/>
           <a:lstStyle/>
           <a:p>
             <a:pPr algn="ctr"/>
@@ -12111,7 +12396,7 @@
         </p:nvSpPr>
         <p:spPr>
           <a:xfrm>
-            <a:off x="4846320" y="4160520"/>
+            <a:off x="4846320" y="4869435"/>
             <a:ext cx="2468880" cy="658368"/>
           </a:xfrm>
           <a:prstGeom prst="roundRect">
@@ -12141,12 +12426,12 @@
           </a:fontRef>
         </p:style>
         <p:txBody>
-          <a:bodyPr rtlCol="0" anchor="ctr" wrap="square" lIns="54864" rIns="54864" tIns="27432" bIns="27432"/>
+          <a:bodyPr wrap="square" lIns="54864" tIns="27432" rIns="54864" bIns="27432" rtlCol="0" anchor="ctr"/>
           <a:lstStyle/>
           <a:p>
             <a:pPr algn="ctr"/>
             <a:r>
-              <a:rPr sz="1500" b="1">
+              <a:rPr sz="1500" b="1" dirty="0">
                 <a:solidFill>
                   <a:srgbClr val="F8FAFC"/>
                 </a:solidFill>
@@ -12165,7 +12450,7 @@
         </p:nvSpPr>
         <p:spPr>
           <a:xfrm>
-            <a:off x="640080" y="1737360"/>
+            <a:off x="640080" y="2446275"/>
             <a:ext cx="2468880" cy="502920"/>
           </a:xfrm>
           <a:prstGeom prst="roundRect">
@@ -12195,7 +12480,7 @@
           </a:fontRef>
         </p:style>
         <p:txBody>
-          <a:bodyPr rtlCol="0" anchor="ctr" wrap="square" lIns="54864" rIns="54864" tIns="27432" bIns="27432"/>
+          <a:bodyPr wrap="square" lIns="54864" tIns="27432" rIns="54864" bIns="27432" rtlCol="0" anchor="ctr"/>
           <a:lstStyle/>
           <a:p>
             <a:pPr algn="ctr"/>
@@ -12219,7 +12504,7 @@
         </p:nvCxnSpPr>
         <p:spPr>
           <a:xfrm flipV="1">
-            <a:off x="3108960" y="1828800"/>
+            <a:off x="3108960" y="2537715"/>
             <a:ext cx="1737360" cy="155448"/>
           </a:xfrm>
           <a:prstGeom prst="line">
@@ -12255,7 +12540,7 @@
         </p:nvSpPr>
         <p:spPr>
           <a:xfrm>
-            <a:off x="640080" y="1005840"/>
+            <a:off x="640080" y="1714755"/>
             <a:ext cx="2468880" cy="502920"/>
           </a:xfrm>
           <a:prstGeom prst="roundRect">
@@ -12285,7 +12570,7 @@
           </a:fontRef>
         </p:style>
         <p:txBody>
-          <a:bodyPr rtlCol="0" anchor="ctr" wrap="square" lIns="54864" rIns="54864" tIns="27432" bIns="27432"/>
+          <a:bodyPr wrap="square" lIns="54864" tIns="27432" rIns="54864" bIns="27432" rtlCol="0" anchor="ctr"/>
           <a:lstStyle/>
           <a:p>
             <a:pPr algn="ctr"/>
@@ -12309,7 +12594,7 @@
         </p:nvCxnSpPr>
         <p:spPr>
           <a:xfrm>
-            <a:off x="3108960" y="1252728"/>
+            <a:off x="3108960" y="1961643"/>
             <a:ext cx="1737360" cy="576072"/>
           </a:xfrm>
           <a:prstGeom prst="line">
@@ -12345,7 +12630,7 @@
         </p:nvSpPr>
         <p:spPr>
           <a:xfrm>
-            <a:off x="640080" y="2834640"/>
+            <a:off x="640080" y="3543555"/>
             <a:ext cx="2468880" cy="502920"/>
           </a:xfrm>
           <a:prstGeom prst="roundRect">
@@ -12375,7 +12660,7 @@
           </a:fontRef>
         </p:style>
         <p:txBody>
-          <a:bodyPr rtlCol="0" anchor="ctr" wrap="square" lIns="54864" rIns="54864" tIns="27432" bIns="27432"/>
+          <a:bodyPr wrap="square" lIns="54864" tIns="27432" rIns="54864" bIns="27432" rtlCol="0" anchor="ctr"/>
           <a:lstStyle/>
           <a:p>
             <a:pPr algn="ctr"/>
@@ -12399,7 +12684,7 @@
         </p:nvCxnSpPr>
         <p:spPr>
           <a:xfrm flipV="1">
-            <a:off x="3108960" y="1828800"/>
+            <a:off x="3108960" y="2537715"/>
             <a:ext cx="1737360" cy="1252728"/>
           </a:xfrm>
           <a:prstGeom prst="line">
@@ -12435,7 +12720,7 @@
         </p:nvSpPr>
         <p:spPr>
           <a:xfrm>
-            <a:off x="9052560" y="1554480"/>
+            <a:off x="9052560" y="2263395"/>
             <a:ext cx="2468880" cy="457200"/>
           </a:xfrm>
           <a:prstGeom prst="roundRect">
@@ -12465,7 +12750,7 @@
           </a:fontRef>
         </p:style>
         <p:txBody>
-          <a:bodyPr rtlCol="0" anchor="ctr" wrap="square" lIns="54864" rIns="54864" tIns="27432" bIns="27432"/>
+          <a:bodyPr wrap="square" lIns="54864" tIns="27432" rIns="54864" bIns="27432" rtlCol="0" anchor="ctr"/>
           <a:lstStyle/>
           <a:p>
             <a:pPr algn="ctr"/>
@@ -12489,7 +12774,7 @@
         </p:nvCxnSpPr>
         <p:spPr>
           <a:xfrm flipH="1">
-            <a:off x="7315200" y="1783080"/>
+            <a:off x="7315200" y="2491995"/>
             <a:ext cx="1737360" cy="2697480"/>
           </a:xfrm>
           <a:prstGeom prst="line">
@@ -12525,7 +12810,7 @@
         </p:nvSpPr>
         <p:spPr>
           <a:xfrm>
-            <a:off x="9052560" y="2286000"/>
+            <a:off x="9052560" y="2994915"/>
             <a:ext cx="2468880" cy="457200"/>
           </a:xfrm>
           <a:prstGeom prst="roundRect">
@@ -12555,7 +12840,7 @@
           </a:fontRef>
         </p:style>
         <p:txBody>
-          <a:bodyPr rtlCol="0" anchor="ctr" wrap="square" lIns="54864" rIns="54864" tIns="27432" bIns="27432"/>
+          <a:bodyPr wrap="square" lIns="54864" tIns="27432" rIns="54864" bIns="27432" rtlCol="0" anchor="ctr"/>
           <a:lstStyle/>
           <a:p>
             <a:pPr algn="ctr"/>
@@ -12579,7 +12864,7 @@
         </p:nvCxnSpPr>
         <p:spPr>
           <a:xfrm flipH="1">
-            <a:off x="7315200" y="2514600"/>
+            <a:off x="7315200" y="3223515"/>
             <a:ext cx="1737360" cy="1965960"/>
           </a:xfrm>
           <a:prstGeom prst="line">
@@ -12615,7 +12900,7 @@
         </p:nvSpPr>
         <p:spPr>
           <a:xfrm>
-            <a:off x="9052560" y="3017520"/>
+            <a:off x="9052560" y="3726435"/>
             <a:ext cx="2468880" cy="457200"/>
           </a:xfrm>
           <a:prstGeom prst="roundRect">
@@ -12645,7 +12930,7 @@
           </a:fontRef>
         </p:style>
         <p:txBody>
-          <a:bodyPr rtlCol="0" anchor="ctr" wrap="square" lIns="54864" rIns="54864" tIns="27432" bIns="27432"/>
+          <a:bodyPr wrap="square" lIns="54864" tIns="27432" rIns="54864" bIns="27432" rtlCol="0" anchor="ctr"/>
           <a:lstStyle/>
           <a:p>
             <a:pPr algn="ctr"/>
@@ -12669,7 +12954,7 @@
         </p:nvCxnSpPr>
         <p:spPr>
           <a:xfrm flipH="1">
-            <a:off x="7315200" y="3246120"/>
+            <a:off x="7315200" y="3955035"/>
             <a:ext cx="1737360" cy="1234440"/>
           </a:xfrm>
           <a:prstGeom prst="line">
@@ -12705,7 +12990,7 @@
         </p:nvSpPr>
         <p:spPr>
           <a:xfrm>
-            <a:off x="9052560" y="3749039"/>
+            <a:off x="9052560" y="4457954"/>
             <a:ext cx="2468880" cy="457200"/>
           </a:xfrm>
           <a:prstGeom prst="roundRect">
@@ -12735,7 +13020,7 @@
           </a:fontRef>
         </p:style>
         <p:txBody>
-          <a:bodyPr rtlCol="0" anchor="ctr" wrap="square" lIns="54864" rIns="54864" tIns="27432" bIns="27432"/>
+          <a:bodyPr wrap="square" lIns="54864" tIns="27432" rIns="54864" bIns="27432" rtlCol="0" anchor="ctr"/>
           <a:lstStyle/>
           <a:p>
             <a:pPr algn="ctr"/>
@@ -12759,7 +13044,7 @@
         </p:nvCxnSpPr>
         <p:spPr>
           <a:xfrm flipH="1">
-            <a:off x="7315200" y="3977639"/>
+            <a:off x="7315200" y="4686554"/>
             <a:ext cx="1737360" cy="502921"/>
           </a:xfrm>
           <a:prstGeom prst="line">
@@ -12795,7 +13080,7 @@
         </p:nvSpPr>
         <p:spPr>
           <a:xfrm>
-            <a:off x="9052560" y="4480560"/>
+            <a:off x="9052560" y="5189475"/>
             <a:ext cx="2468880" cy="457200"/>
           </a:xfrm>
           <a:prstGeom prst="roundRect">
@@ -12825,7 +13110,7 @@
           </a:fontRef>
         </p:style>
         <p:txBody>
-          <a:bodyPr rtlCol="0" anchor="ctr" wrap="square" lIns="54864" rIns="54864" tIns="27432" bIns="27432"/>
+          <a:bodyPr wrap="square" lIns="54864" tIns="27432" rIns="54864" bIns="27432" rtlCol="0" anchor="ctr"/>
           <a:lstStyle/>
           <a:p>
             <a:pPr algn="ctr"/>
@@ -12849,7 +13134,7 @@
         </p:nvCxnSpPr>
         <p:spPr>
           <a:xfrm flipH="1" flipV="1">
-            <a:off x="7315200" y="4480560"/>
+            <a:off x="7315200" y="5189475"/>
             <a:ext cx="1737360" cy="228600"/>
           </a:xfrm>
           <a:prstGeom prst="line">
@@ -12885,7 +13170,7 @@
         </p:nvCxnSpPr>
         <p:spPr>
           <a:xfrm>
-            <a:off x="6080760" y="2167128"/>
+            <a:off x="6080760" y="2876043"/>
             <a:ext cx="0" cy="1993392"/>
           </a:xfrm>
           <a:prstGeom prst="line">
@@ -12921,7 +13206,7 @@
         </p:nvSpPr>
         <p:spPr>
           <a:xfrm>
-            <a:off x="6172200" y="2971800"/>
+            <a:off x="6172200" y="3680715"/>
             <a:ext cx="1828800" cy="274320"/>
           </a:xfrm>
           <a:prstGeom prst="rect">
@@ -12930,7 +13215,7 @@
           <a:noFill/>
         </p:spPr>
         <p:txBody>
-          <a:bodyPr wrap="square" anchor="t" lIns="45720" rIns="45720" tIns="18288" bIns="18288">
+          <a:bodyPr wrap="square" lIns="45720" tIns="18288" rIns="45720" bIns="18288" anchor="t">
             <a:spAutoFit/>
           </a:bodyPr>
           <a:lstStyle/>
@@ -12972,7 +13257,7 @@
           <a:noFill/>
         </p:spPr>
         <p:txBody>
-          <a:bodyPr wrap="square" anchor="t" lIns="45720" rIns="45720" tIns="18288" bIns="18288">
+          <a:bodyPr wrap="square" lIns="45720" tIns="18288" rIns="45720" bIns="18288" anchor="t">
             <a:spAutoFit/>
           </a:bodyPr>
           <a:lstStyle/>
@@ -13006,7 +13291,7 @@
 </file>
 
 <file path=ppt/slides/slide7.xml><?xml version="1.0" encoding="utf-8"?>
-<p:sld xmlns:a="http://schemas.openxmlformats.org/drawingml/2006/main" xmlns:p="http://schemas.openxmlformats.org/presentationml/2006/main" xmlns:r="http://schemas.openxmlformats.org/officeDocument/2006/relationships">
+<p:sld xmlns:a="http://schemas.openxmlformats.org/drawingml/2006/main" xmlns:r="http://schemas.openxmlformats.org/officeDocument/2006/relationships" xmlns:p="http://schemas.openxmlformats.org/presentationml/2006/main">
   <p:cSld>
     <p:spTree>
       <p:nvGrpSpPr>
@@ -13014,7 +13299,14 @@
         <p:cNvGrpSpPr/>
         <p:nvPr/>
       </p:nvGrpSpPr>
-      <p:grpSpPr/>
+      <p:grpSpPr>
+        <a:xfrm>
+          <a:off x="0" y="0"/>
+          <a:ext cx="0" cy="0"/>
+          <a:chOff x="0" y="0"/>
+          <a:chExt cx="0" cy="0"/>
+        </a:xfrm>
+      </p:grpSpPr>
       <p:sp>
         <p:nvSpPr>
           <p:cNvPr id="2" name="Rectangle 1"/>
@@ -13055,6 +13347,7 @@
           <a:lstStyle/>
           <a:p>
             <a:pPr algn="ctr"/>
+            <a:endParaRPr/>
           </a:p>
         </p:txBody>
       </p:sp>
@@ -13098,6 +13391,7 @@
           <a:lstStyle/>
           <a:p>
             <a:pPr algn="ctr"/>
+            <a:endParaRPr/>
           </a:p>
         </p:txBody>
       </p:sp>
@@ -13118,7 +13412,7 @@
           <a:noFill/>
         </p:spPr>
         <p:txBody>
-          <a:bodyPr wrap="square" anchor="ctr" lIns="45720" rIns="45720" tIns="18288" bIns="18288">
+          <a:bodyPr wrap="square" lIns="45720" tIns="18288" rIns="45720" bIns="18288" anchor="ctr">
             <a:spAutoFit/>
           </a:bodyPr>
           <a:lstStyle/>
@@ -13183,6 +13477,7 @@
           <a:lstStyle/>
           <a:p>
             <a:pPr algn="ctr"/>
+            <a:endParaRPr/>
           </a:p>
         </p:txBody>
       </p:sp>
@@ -13257,7 +13552,7 @@
           <a:noFill/>
         </p:spPr>
         <p:txBody>
-          <a:bodyPr wrap="square" anchor="t" lIns="45720" rIns="45720" tIns="18288" bIns="18288">
+          <a:bodyPr wrap="square" lIns="45720" tIns="18288" rIns="45720" bIns="18288" anchor="t">
             <a:spAutoFit/>
           </a:bodyPr>
           <a:lstStyle/>
@@ -13299,7 +13594,7 @@
           <a:noFill/>
         </p:spPr>
         <p:txBody>
-          <a:bodyPr wrap="square" anchor="t" lIns="45720" rIns="45720" tIns="18288" bIns="18288">
+          <a:bodyPr wrap="square" lIns="45720" tIns="18288" rIns="45720" bIns="18288" anchor="t">
             <a:spAutoFit/>
           </a:bodyPr>
           <a:lstStyle/>
@@ -13362,10 +13657,11 @@
           </a:fontRef>
         </p:style>
         <p:txBody>
-          <a:bodyPr rtlCol="0" anchor="ctr" wrap="square" lIns="54864" rIns="54864" tIns="27432" bIns="27432"/>
+          <a:bodyPr wrap="square" lIns="54864" tIns="27432" rIns="54864" bIns="27432" rtlCol="0" anchor="ctr"/>
           <a:lstStyle/>
           <a:p>
             <a:pPr algn="ctr"/>
+            <a:endParaRPr/>
           </a:p>
         </p:txBody>
       </p:sp>
@@ -13386,7 +13682,7 @@
           <a:noFill/>
         </p:spPr>
         <p:txBody>
-          <a:bodyPr wrap="square" anchor="t" lIns="45720" rIns="45720" tIns="18288" bIns="18288">
+          <a:bodyPr wrap="square" lIns="45720" tIns="18288" rIns="45720" bIns="18288" anchor="t">
             <a:spAutoFit/>
           </a:bodyPr>
           <a:lstStyle/>
@@ -13449,7 +13745,7 @@
           </a:fontRef>
         </p:style>
         <p:txBody>
-          <a:bodyPr rtlCol="0" anchor="ctr" wrap="square" lIns="54864" rIns="54864" tIns="27432" bIns="27432"/>
+          <a:bodyPr wrap="square" lIns="54864" tIns="27432" rIns="54864" bIns="27432" rtlCol="0" anchor="ctr"/>
           <a:lstStyle/>
           <a:p>
             <a:pPr algn="ctr"/>
@@ -13503,7 +13799,7 @@
           </a:fontRef>
         </p:style>
         <p:txBody>
-          <a:bodyPr rtlCol="0" anchor="ctr" wrap="square" lIns="54864" rIns="54864" tIns="27432" bIns="27432"/>
+          <a:bodyPr wrap="square" lIns="54864" tIns="27432" rIns="54864" bIns="27432" rtlCol="0" anchor="ctr"/>
           <a:lstStyle/>
           <a:p>
             <a:pPr algn="ctr"/>
@@ -13557,7 +13853,7 @@
           </a:fontRef>
         </p:style>
         <p:txBody>
-          <a:bodyPr rtlCol="0" anchor="ctr" wrap="square" lIns="54864" rIns="54864" tIns="27432" bIns="27432"/>
+          <a:bodyPr wrap="square" lIns="54864" tIns="27432" rIns="54864" bIns="27432" rtlCol="0" anchor="ctr"/>
           <a:lstStyle/>
           <a:p>
             <a:pPr algn="ctr"/>
@@ -13611,10 +13907,11 @@
           </a:fontRef>
         </p:style>
         <p:txBody>
-          <a:bodyPr rtlCol="0" anchor="ctr" wrap="square" lIns="54864" rIns="54864" tIns="27432" bIns="27432"/>
+          <a:bodyPr wrap="square" lIns="54864" tIns="27432" rIns="54864" bIns="27432" rtlCol="0" anchor="ctr"/>
           <a:lstStyle/>
           <a:p>
             <a:pPr algn="ctr"/>
+            <a:endParaRPr/>
           </a:p>
         </p:txBody>
       </p:sp>
@@ -13635,7 +13932,7 @@
           <a:noFill/>
         </p:spPr>
         <p:txBody>
-          <a:bodyPr wrap="square" anchor="t" lIns="45720" rIns="45720" tIns="18288" bIns="18288">
+          <a:bodyPr wrap="square" lIns="45720" tIns="18288" rIns="45720" bIns="18288" anchor="t">
             <a:spAutoFit/>
           </a:bodyPr>
           <a:lstStyle/>
@@ -13698,7 +13995,7 @@
           </a:fontRef>
         </p:style>
         <p:txBody>
-          <a:bodyPr rtlCol="0" anchor="ctr" wrap="square" lIns="54864" rIns="54864" tIns="27432" bIns="27432"/>
+          <a:bodyPr wrap="square" lIns="54864" tIns="27432" rIns="54864" bIns="27432" rtlCol="0" anchor="ctr"/>
           <a:lstStyle/>
           <a:p>
             <a:pPr algn="ctr"/>
@@ -13764,7 +14061,7 @@
           </a:fontRef>
         </p:style>
         <p:txBody>
-          <a:bodyPr rtlCol="0" anchor="ctr" wrap="square" lIns="54864" rIns="54864" tIns="27432" bIns="27432"/>
+          <a:bodyPr wrap="square" lIns="54864" tIns="27432" rIns="54864" bIns="27432" rtlCol="0" anchor="ctr"/>
           <a:lstStyle/>
           <a:p>
             <a:pPr algn="ctr"/>
@@ -13818,7 +14115,7 @@
           </a:fontRef>
         </p:style>
         <p:txBody>
-          <a:bodyPr rtlCol="0" anchor="ctr" wrap="square" lIns="54864" rIns="54864" tIns="27432" bIns="27432"/>
+          <a:bodyPr wrap="square" lIns="54864" tIns="27432" rIns="54864" bIns="27432" rtlCol="0" anchor="ctr"/>
           <a:lstStyle/>
           <a:p>
             <a:pPr algn="ctr"/>
@@ -13872,7 +14169,7 @@
           </a:fontRef>
         </p:style>
         <p:txBody>
-          <a:bodyPr rtlCol="0" anchor="ctr" wrap="square" lIns="54864" rIns="54864" tIns="27432" bIns="27432"/>
+          <a:bodyPr wrap="square" lIns="54864" tIns="27432" rIns="54864" bIns="27432" rtlCol="0" anchor="ctr"/>
           <a:lstStyle/>
           <a:p>
             <a:pPr algn="ctr"/>
@@ -13926,10 +14223,11 @@
           </a:fontRef>
         </p:style>
         <p:txBody>
-          <a:bodyPr rtlCol="0" anchor="ctr" wrap="square" lIns="54864" rIns="54864" tIns="27432" bIns="27432"/>
+          <a:bodyPr wrap="square" lIns="54864" tIns="27432" rIns="54864" bIns="27432" rtlCol="0" anchor="ctr"/>
           <a:lstStyle/>
           <a:p>
             <a:pPr algn="ctr"/>
+            <a:endParaRPr/>
           </a:p>
         </p:txBody>
       </p:sp>
@@ -13950,7 +14248,7 @@
           <a:noFill/>
         </p:spPr>
         <p:txBody>
-          <a:bodyPr wrap="square" anchor="t" lIns="45720" rIns="45720" tIns="18288" bIns="18288">
+          <a:bodyPr wrap="square" lIns="45720" tIns="18288" rIns="45720" bIns="18288" anchor="t">
             <a:spAutoFit/>
           </a:bodyPr>
           <a:lstStyle/>
@@ -14013,7 +14311,7 @@
           </a:fontRef>
         </p:style>
         <p:txBody>
-          <a:bodyPr rtlCol="0" anchor="ctr" wrap="square" lIns="54864" rIns="54864" tIns="27432" bIns="27432"/>
+          <a:bodyPr wrap="square" lIns="54864" tIns="27432" rIns="54864" bIns="27432" rtlCol="0" anchor="ctr"/>
           <a:lstStyle/>
           <a:p>
             <a:pPr algn="ctr"/>
@@ -14067,7 +14365,7 @@
           </a:fontRef>
         </p:style>
         <p:txBody>
-          <a:bodyPr rtlCol="0" anchor="ctr" wrap="square" lIns="54864" rIns="54864" tIns="27432" bIns="27432"/>
+          <a:bodyPr wrap="square" lIns="54864" tIns="27432" rIns="54864" bIns="27432" rtlCol="0" anchor="ctr"/>
           <a:lstStyle/>
           <a:p>
             <a:pPr algn="ctr"/>
@@ -14121,7 +14419,7 @@
           </a:fontRef>
         </p:style>
         <p:txBody>
-          <a:bodyPr rtlCol="0" anchor="ctr" wrap="square" lIns="54864" rIns="54864" tIns="27432" bIns="27432"/>
+          <a:bodyPr wrap="square" lIns="54864" tIns="27432" rIns="54864" bIns="27432" rtlCol="0" anchor="ctr"/>
           <a:lstStyle/>
           <a:p>
             <a:pPr algn="ctr"/>
@@ -14175,7 +14473,7 @@
           </a:fontRef>
         </p:style>
         <p:txBody>
-          <a:bodyPr rtlCol="0" anchor="ctr" wrap="square" lIns="54864" rIns="54864" tIns="27432" bIns="27432"/>
+          <a:bodyPr wrap="square" lIns="54864" tIns="27432" rIns="54864" bIns="27432" rtlCol="0" anchor="ctr"/>
           <a:lstStyle/>
           <a:p>
             <a:pPr algn="ctr"/>
@@ -14280,7 +14578,7 @@
           <a:noFill/>
         </p:spPr>
         <p:txBody>
-          <a:bodyPr wrap="square" anchor="t" lIns="45720" rIns="45720" tIns="18288" bIns="18288">
+          <a:bodyPr wrap="square" lIns="45720" tIns="18288" rIns="45720" bIns="18288" anchor="t">
             <a:spAutoFit/>
           </a:bodyPr>
           <a:lstStyle/>
@@ -14314,7 +14612,7 @@
 </file>
 
 <file path=ppt/slides/slide8.xml><?xml version="1.0" encoding="utf-8"?>
-<p:sld xmlns:a="http://schemas.openxmlformats.org/drawingml/2006/main" xmlns:p="http://schemas.openxmlformats.org/presentationml/2006/main" xmlns:r="http://schemas.openxmlformats.org/officeDocument/2006/relationships">
+<p:sld xmlns:a="http://schemas.openxmlformats.org/drawingml/2006/main" xmlns:r="http://schemas.openxmlformats.org/officeDocument/2006/relationships" xmlns:p="http://schemas.openxmlformats.org/presentationml/2006/main">
   <p:cSld>
     <p:spTree>
       <p:nvGrpSpPr>
@@ -14322,7 +14620,14 @@
         <p:cNvGrpSpPr/>
         <p:nvPr/>
       </p:nvGrpSpPr>
-      <p:grpSpPr/>
+      <p:grpSpPr>
+        <a:xfrm>
+          <a:off x="0" y="0"/>
+          <a:ext cx="0" cy="0"/>
+          <a:chOff x="0" y="0"/>
+          <a:chExt cx="0" cy="0"/>
+        </a:xfrm>
+      </p:grpSpPr>
       <p:sp>
         <p:nvSpPr>
           <p:cNvPr id="2" name="Rectangle 1"/>
@@ -14363,6 +14668,7 @@
           <a:lstStyle/>
           <a:p>
             <a:pPr algn="ctr"/>
+            <a:endParaRPr/>
           </a:p>
         </p:txBody>
       </p:sp>
@@ -14406,6 +14712,7 @@
           <a:lstStyle/>
           <a:p>
             <a:pPr algn="ctr"/>
+            <a:endParaRPr/>
           </a:p>
         </p:txBody>
       </p:sp>
@@ -14426,7 +14733,7 @@
           <a:noFill/>
         </p:spPr>
         <p:txBody>
-          <a:bodyPr wrap="square" anchor="ctr" lIns="45720" rIns="45720" tIns="18288" bIns="18288">
+          <a:bodyPr wrap="square" lIns="45720" tIns="18288" rIns="45720" bIns="18288" anchor="ctr">
             <a:spAutoFit/>
           </a:bodyPr>
           <a:lstStyle/>
@@ -14491,6 +14798,7 @@
           <a:lstStyle/>
           <a:p>
             <a:pPr algn="ctr"/>
+            <a:endParaRPr/>
           </a:p>
         </p:txBody>
       </p:sp>
@@ -14565,7 +14873,7 @@
           <a:noFill/>
         </p:spPr>
         <p:txBody>
-          <a:bodyPr wrap="square" anchor="t" lIns="45720" rIns="45720" tIns="18288" bIns="18288">
+          <a:bodyPr wrap="square" lIns="45720" tIns="18288" rIns="45720" bIns="18288" anchor="t">
             <a:spAutoFit/>
           </a:bodyPr>
           <a:lstStyle/>
@@ -14607,7 +14915,7 @@
           <a:noFill/>
         </p:spPr>
         <p:txBody>
-          <a:bodyPr wrap="square" anchor="t" lIns="45720" rIns="45720" tIns="18288" bIns="18288">
+          <a:bodyPr wrap="square" lIns="45720" tIns="18288" rIns="45720" bIns="18288" anchor="t">
             <a:spAutoFit/>
           </a:bodyPr>
           <a:lstStyle/>
@@ -14649,7 +14957,7 @@
           <a:noFill/>
         </p:spPr>
         <p:txBody>
-          <a:bodyPr wrap="square" anchor="t" lIns="45720" rIns="45720" tIns="18288" bIns="18288">
+          <a:bodyPr wrap="square" lIns="45720" tIns="18288" rIns="45720" bIns="18288" anchor="t">
             <a:spAutoFit/>
           </a:bodyPr>
           <a:lstStyle/>
@@ -14692,7 +15000,7 @@
             </a:r>
           </a:p>
           <a:p>
-            <a:pPr algn="l" lvl="1">
+            <a:pPr lvl="1" algn="l">
               <a:lnSpc>
                 <a:spcPct val="114000"/>
               </a:lnSpc>
@@ -14711,7 +15019,7 @@
             </a:r>
           </a:p>
           <a:p>
-            <a:pPr algn="l" lvl="1">
+            <a:pPr lvl="1" algn="l">
               <a:lnSpc>
                 <a:spcPct val="114000"/>
               </a:lnSpc>
@@ -14759,7 +15067,7 @@
 </file>
 
 <file path=ppt/slides/slide9.xml><?xml version="1.0" encoding="utf-8"?>
-<p:sld xmlns:a="http://schemas.openxmlformats.org/drawingml/2006/main" xmlns:p="http://schemas.openxmlformats.org/presentationml/2006/main" xmlns:r="http://schemas.openxmlformats.org/officeDocument/2006/relationships">
+<p:sld xmlns:a="http://schemas.openxmlformats.org/drawingml/2006/main" xmlns:r="http://schemas.openxmlformats.org/officeDocument/2006/relationships" xmlns:p="http://schemas.openxmlformats.org/presentationml/2006/main">
   <p:cSld>
     <p:spTree>
       <p:nvGrpSpPr>
@@ -14767,7 +15075,14 @@
         <p:cNvGrpSpPr/>
         <p:nvPr/>
       </p:nvGrpSpPr>
-      <p:grpSpPr/>
+      <p:grpSpPr>
+        <a:xfrm>
+          <a:off x="0" y="0"/>
+          <a:ext cx="0" cy="0"/>
+          <a:chOff x="0" y="0"/>
+          <a:chExt cx="0" cy="0"/>
+        </a:xfrm>
+      </p:grpSpPr>
       <p:sp>
         <p:nvSpPr>
           <p:cNvPr id="2" name="Rectangle 1"/>
@@ -14808,6 +15123,7 @@
           <a:lstStyle/>
           <a:p>
             <a:pPr algn="ctr"/>
+            <a:endParaRPr/>
           </a:p>
         </p:txBody>
       </p:sp>
@@ -14851,6 +15167,7 @@
           <a:lstStyle/>
           <a:p>
             <a:pPr algn="ctr"/>
+            <a:endParaRPr/>
           </a:p>
         </p:txBody>
       </p:sp>
@@ -14871,7 +15188,7 @@
           <a:noFill/>
         </p:spPr>
         <p:txBody>
-          <a:bodyPr wrap="square" anchor="ctr" lIns="45720" rIns="45720" tIns="18288" bIns="18288">
+          <a:bodyPr wrap="square" lIns="45720" tIns="18288" rIns="45720" bIns="18288" anchor="ctr">
             <a:spAutoFit/>
           </a:bodyPr>
           <a:lstStyle/>
@@ -14936,6 +15253,7 @@
           <a:lstStyle/>
           <a:p>
             <a:pPr algn="ctr"/>
+            <a:endParaRPr/>
           </a:p>
         </p:txBody>
       </p:sp>
@@ -15010,7 +15328,7 @@
           <a:noFill/>
         </p:spPr>
         <p:txBody>
-          <a:bodyPr wrap="square" anchor="t" lIns="45720" rIns="45720" tIns="18288" bIns="18288">
+          <a:bodyPr wrap="square" lIns="45720" tIns="18288" rIns="45720" bIns="18288" anchor="t">
             <a:spAutoFit/>
           </a:bodyPr>
           <a:lstStyle/>
@@ -15052,7 +15370,7 @@
           <a:noFill/>
         </p:spPr>
         <p:txBody>
-          <a:bodyPr wrap="square" anchor="t" lIns="45720" rIns="45720" tIns="18288" bIns="18288">
+          <a:bodyPr wrap="square" lIns="45720" tIns="18288" rIns="45720" bIns="18288" anchor="t">
             <a:spAutoFit/>
           </a:bodyPr>
           <a:lstStyle/>
@@ -15094,7 +15412,7 @@
           <a:noFill/>
         </p:spPr>
         <p:txBody>
-          <a:bodyPr wrap="square" anchor="t" lIns="45720" rIns="45720" tIns="18288" bIns="18288">
+          <a:bodyPr wrap="square" lIns="45720" tIns="18288" rIns="45720" bIns="18288" anchor="t">
             <a:spAutoFit/>
           </a:bodyPr>
           <a:lstStyle/>

--- a/presentation/OptiCart_Main.pptx
+++ b/presentation/OptiCart_Main.pptx
@@ -323,7 +323,7 @@
           <a:p>
             <a:fld id="{5BCAD085-E8A6-8845-BD4E-CB4CCA059FC4}" type="datetimeFigureOut">
               <a:rPr lang="en-US" smtClean="0"/>
-              <a:t>7/11/2026</a:t>
+              <a:t>7/13/2026</a:t>
             </a:fld>
             <a:endParaRPr lang="en-US"/>
           </a:p>
@@ -491,7 +491,7 @@
           <a:p>
             <a:fld id="{5BCAD085-E8A6-8845-BD4E-CB4CCA059FC4}" type="datetimeFigureOut">
               <a:rPr lang="en-US" smtClean="0"/>
-              <a:t>7/11/2026</a:t>
+              <a:t>7/13/2026</a:t>
             </a:fld>
             <a:endParaRPr lang="en-US"/>
           </a:p>
@@ -669,7 +669,7 @@
           <a:p>
             <a:fld id="{5BCAD085-E8A6-8845-BD4E-CB4CCA059FC4}" type="datetimeFigureOut">
               <a:rPr lang="en-US" smtClean="0"/>
-              <a:t>7/11/2026</a:t>
+              <a:t>7/13/2026</a:t>
             </a:fld>
             <a:endParaRPr lang="en-US"/>
           </a:p>
@@ -837,7 +837,7 @@
           <a:p>
             <a:fld id="{5BCAD085-E8A6-8845-BD4E-CB4CCA059FC4}" type="datetimeFigureOut">
               <a:rPr lang="en-US" smtClean="0"/>
-              <a:t>7/11/2026</a:t>
+              <a:t>7/13/2026</a:t>
             </a:fld>
             <a:endParaRPr lang="en-US"/>
           </a:p>
@@ -1082,7 +1082,7 @@
           <a:p>
             <a:fld id="{5BCAD085-E8A6-8845-BD4E-CB4CCA059FC4}" type="datetimeFigureOut">
               <a:rPr lang="en-US" smtClean="0"/>
-              <a:t>7/11/2026</a:t>
+              <a:t>7/13/2026</a:t>
             </a:fld>
             <a:endParaRPr lang="en-US"/>
           </a:p>
@@ -1367,7 +1367,7 @@
           <a:p>
             <a:fld id="{5BCAD085-E8A6-8845-BD4E-CB4CCA059FC4}" type="datetimeFigureOut">
               <a:rPr lang="en-US" smtClean="0"/>
-              <a:t>7/11/2026</a:t>
+              <a:t>7/13/2026</a:t>
             </a:fld>
             <a:endParaRPr lang="en-US"/>
           </a:p>
@@ -1786,7 +1786,7 @@
           <a:p>
             <a:fld id="{5BCAD085-E8A6-8845-BD4E-CB4CCA059FC4}" type="datetimeFigureOut">
               <a:rPr lang="en-US" smtClean="0"/>
-              <a:t>7/11/2026</a:t>
+              <a:t>7/13/2026</a:t>
             </a:fld>
             <a:endParaRPr lang="en-US"/>
           </a:p>
@@ -1903,7 +1903,7 @@
           <a:p>
             <a:fld id="{5BCAD085-E8A6-8845-BD4E-CB4CCA059FC4}" type="datetimeFigureOut">
               <a:rPr lang="en-US" smtClean="0"/>
-              <a:t>7/11/2026</a:t>
+              <a:t>7/13/2026</a:t>
             </a:fld>
             <a:endParaRPr lang="en-US"/>
           </a:p>
@@ -1998,7 +1998,7 @@
           <a:p>
             <a:fld id="{5BCAD085-E8A6-8845-BD4E-CB4CCA059FC4}" type="datetimeFigureOut">
               <a:rPr lang="en-US" smtClean="0"/>
-              <a:t>7/11/2026</a:t>
+              <a:t>7/13/2026</a:t>
             </a:fld>
             <a:endParaRPr lang="en-US"/>
           </a:p>
@@ -2273,7 +2273,7 @@
           <a:p>
             <a:fld id="{5BCAD085-E8A6-8845-BD4E-CB4CCA059FC4}" type="datetimeFigureOut">
               <a:rPr lang="en-US" smtClean="0"/>
-              <a:t>7/11/2026</a:t>
+              <a:t>7/13/2026</a:t>
             </a:fld>
             <a:endParaRPr lang="en-US"/>
           </a:p>
@@ -2525,7 +2525,7 @@
           <a:p>
             <a:fld id="{5BCAD085-E8A6-8845-BD4E-CB4CCA059FC4}" type="datetimeFigureOut">
               <a:rPr lang="en-US" smtClean="0"/>
-              <a:t>7/11/2026</a:t>
+              <a:t>7/13/2026</a:t>
             </a:fld>
             <a:endParaRPr lang="en-US"/>
           </a:p>
@@ -2736,7 +2736,7 @@
           <a:p>
             <a:fld id="{5BCAD085-E8A6-8845-BD4E-CB4CCA059FC4}" type="datetimeFigureOut">
               <a:rPr lang="en-US" smtClean="0"/>
-              <a:t>7/11/2026</a:t>
+              <a:t>7/13/2026</a:t>
             </a:fld>
             <a:endParaRPr lang="en-US"/>
           </a:p>
@@ -6435,7 +6435,7 @@
               </a:spcAft>
             </a:pPr>
             <a:r>
-              <a:rPr sz="1400" b="1">
+              <a:rPr sz="1400" b="1" dirty="0">
                 <a:solidFill>
                   <a:srgbClr val="F8FAFC"/>
                 </a:solidFill>
@@ -6454,7 +6454,7 @@
               </a:spcAft>
             </a:pPr>
             <a:r>
-              <a:rPr sz="1250" b="0">
+              <a:rPr sz="1250" b="0" dirty="0">
                 <a:solidFill>
                   <a:srgbClr val="94A3B8"/>
                 </a:solidFill>
@@ -14949,7 +14949,7 @@
         <p:spPr>
           <a:xfrm>
             <a:off x="640080" y="1554480"/>
-            <a:ext cx="7680960" cy="4572000"/>
+            <a:ext cx="7680960" cy="2404504"/>
           </a:xfrm>
           <a:prstGeom prst="rect">
             <a:avLst/>
@@ -14971,13 +14971,31 @@
               </a:spcAft>
             </a:pPr>
             <a:r>
-              <a:rPr sz="1700" b="0">
+              <a:rPr sz="1700" b="0" dirty="0">
                 <a:solidFill>
                   <a:srgbClr val="E2E8F0"/>
                 </a:solidFill>
                 <a:latin typeface="Segoe UI"/>
               </a:rPr>
-              <a:t>•  Planned as 11 epics → 40 sub-tasks → 311 story points, split evenly by strength (Jira board).</a:t>
+              <a:t>•  Planned as 11 </a:t>
+            </a:r>
+            <a:r>
+              <a:rPr lang="en-US" sz="1700" b="0" dirty="0">
+                <a:solidFill>
+                  <a:srgbClr val="E2E8F0"/>
+                </a:solidFill>
+                <a:latin typeface="Segoe UI"/>
+              </a:rPr>
+              <a:t>stories</a:t>
+            </a:r>
+            <a:r>
+              <a:rPr sz="1700" b="0" dirty="0">
+                <a:solidFill>
+                  <a:srgbClr val="E2E8F0"/>
+                </a:solidFill>
+                <a:latin typeface="Segoe UI"/>
+              </a:rPr>
+              <a:t> → 40 sub-tasks → 311 story points, split evenly by strength (Jira board).</a:t>
             </a:r>
           </a:p>
           <a:p>
@@ -14990,7 +15008,7 @@
               </a:spcAft>
             </a:pPr>
             <a:r>
-              <a:rPr sz="1700" b="0">
+              <a:rPr sz="1700" b="0" dirty="0">
                 <a:solidFill>
                   <a:srgbClr val="E2E8F0"/>
                 </a:solidFill>
@@ -15009,7 +15027,7 @@
               </a:spcAft>
             </a:pPr>
             <a:r>
-              <a:rPr sz="1500" b="0">
+              <a:rPr sz="1500" b="0" dirty="0">
                 <a:solidFill>
                   <a:srgbClr val="94A3B8"/>
                 </a:solidFill>
@@ -15028,7 +15046,7 @@
               </a:spcAft>
             </a:pPr>
             <a:r>
-              <a:rPr sz="1500" b="0">
+              <a:rPr sz="1500" b="0" dirty="0">
                 <a:solidFill>
                   <a:srgbClr val="94A3B8"/>
                 </a:solidFill>
@@ -15047,7 +15065,7 @@
               </a:spcAft>
             </a:pPr>
             <a:r>
-              <a:rPr sz="1700" b="0">
+              <a:rPr sz="1700" b="0" dirty="0">
                 <a:solidFill>
                   <a:srgbClr val="E2E8F0"/>
                 </a:solidFill>

--- a/presentation/OptiCart_Main.pptx
+++ b/presentation/OptiCart_Main.pptx
@@ -5,30 +5,30 @@
     <p:sldMasterId id="2147483648" r:id="rId1"/>
   </p:sldMasterIdLst>
   <p:sldIdLst>
-    <p:sldId id="256" r:id="rId2"/>
-    <p:sldId id="257" r:id="rId3"/>
-    <p:sldId id="258" r:id="rId4"/>
-    <p:sldId id="259" r:id="rId5"/>
-    <p:sldId id="260" r:id="rId6"/>
-    <p:sldId id="261" r:id="rId7"/>
-    <p:sldId id="262" r:id="rId8"/>
-    <p:sldId id="263" r:id="rId9"/>
-    <p:sldId id="264" r:id="rId10"/>
-    <p:sldId id="265" r:id="rId11"/>
-    <p:sldId id="266" r:id="rId12"/>
-    <p:sldId id="267" r:id="rId13"/>
-    <p:sldId id="268" r:id="rId14"/>
-    <p:sldId id="269" r:id="rId15"/>
-    <p:sldId id="270" r:id="rId16"/>
-    <p:sldId id="271" r:id="rId17"/>
-    <p:sldId id="272" r:id="rId18"/>
-    <p:sldId id="273" r:id="rId19"/>
-    <p:sldId id="274" r:id="rId20"/>
-    <p:sldId id="275" r:id="rId21"/>
-    <p:sldId id="276" r:id="rId22"/>
-    <p:sldId id="277" r:id="rId23"/>
+    <p:sldId id="256" r:id="rId7"/>
+    <p:sldId id="257" r:id="rId8"/>
+    <p:sldId id="258" r:id="rId9"/>
+    <p:sldId id="259" r:id="rId10"/>
+    <p:sldId id="260" r:id="rId11"/>
+    <p:sldId id="261" r:id="rId12"/>
+    <p:sldId id="262" r:id="rId13"/>
+    <p:sldId id="263" r:id="rId14"/>
+    <p:sldId id="264" r:id="rId15"/>
+    <p:sldId id="265" r:id="rId16"/>
+    <p:sldId id="266" r:id="rId17"/>
+    <p:sldId id="267" r:id="rId18"/>
+    <p:sldId id="268" r:id="rId19"/>
+    <p:sldId id="269" r:id="rId20"/>
+    <p:sldId id="270" r:id="rId21"/>
+    <p:sldId id="271" r:id="rId22"/>
+    <p:sldId id="272" r:id="rId23"/>
+    <p:sldId id="273" r:id="rId24"/>
+    <p:sldId id="274" r:id="rId25"/>
+    <p:sldId id="275" r:id="rId26"/>
+    <p:sldId id="276" r:id="rId27"/>
+    <p:sldId id="277" r:id="rId28"/>
   </p:sldIdLst>
-  <p:sldSz cx="12192000" cy="6858000"/>
+  <p:sldSz cx="12191695" cy="6858000" type="screen4x3"/>
   <p:notesSz cx="6858000" cy="9144000"/>
   <p:defaultTextStyle>
     <a:defPPr>
@@ -125,22 +125,6 @@
       </a:defRPr>
     </a:lvl9pPr>
   </p:defaultTextStyle>
-  <p:extLst>
-    <p:ext uri="{EFAFB233-063F-42B5-8137-9DF3F51BA10A}">
-      <p15:sldGuideLst xmlns:p15="http://schemas.microsoft.com/office/powerpoint/2012/main">
-        <p15:guide id="1" orient="horz" pos="2160">
-          <p15:clr>
-            <a:srgbClr val="A4A3A4"/>
-          </p15:clr>
-        </p15:guide>
-        <p15:guide id="2" pos="2880">
-          <p15:clr>
-            <a:srgbClr val="A4A3A4"/>
-          </p15:clr>
-        </p15:guide>
-      </p15:sldGuideLst>
-    </p:ext>
-  </p:extLst>
 </p:presentation>
 </file>
 
@@ -182,9 +166,10 @@
           <a:lstStyle/>
           <a:p>
             <a:r>
-              <a:rPr lang="en-US"/>
+              <a:rPr lang="en-US" smtClean="0"/>
               <a:t>Click to edit Master title style</a:t>
             </a:r>
+            <a:endParaRPr lang="en-US"/>
           </a:p>
         </p:txBody>
       </p:sp>
@@ -300,9 +285,10 @@
           </a:lstStyle>
           <a:p>
             <a:r>
-              <a:rPr lang="en-US"/>
+              <a:rPr lang="en-US" smtClean="0"/>
               <a:t>Click to edit Master subtitle style</a:t>
             </a:r>
+            <a:endParaRPr lang="en-US"/>
           </a:p>
         </p:txBody>
       </p:sp>
@@ -323,7 +309,7 @@
           <a:p>
             <a:fld id="{5BCAD085-E8A6-8845-BD4E-CB4CCA059FC4}" type="datetimeFigureOut">
               <a:rPr lang="en-US" smtClean="0"/>
-              <a:t>7/13/2026</a:t>
+              <a:t>1/27/13</a:t>
             </a:fld>
             <a:endParaRPr lang="en-US"/>
           </a:p>
@@ -417,9 +403,10 @@
           <a:lstStyle/>
           <a:p>
             <a:r>
-              <a:rPr lang="en-US"/>
+              <a:rPr lang="en-US" smtClean="0"/>
               <a:t>Click to edit Master title style</a:t>
             </a:r>
+            <a:endParaRPr lang="en-US"/>
           </a:p>
         </p:txBody>
       </p:sp>
@@ -440,37 +427,38 @@
           <a:p>
             <a:pPr lvl="0"/>
             <a:r>
-              <a:rPr lang="en-US"/>
+              <a:rPr lang="en-US" smtClean="0"/>
               <a:t>Click to edit Master text styles</a:t>
             </a:r>
           </a:p>
           <a:p>
             <a:pPr lvl="1"/>
             <a:r>
-              <a:rPr lang="en-US"/>
+              <a:rPr lang="en-US" smtClean="0"/>
               <a:t>Second level</a:t>
             </a:r>
           </a:p>
           <a:p>
             <a:pPr lvl="2"/>
             <a:r>
-              <a:rPr lang="en-US"/>
+              <a:rPr lang="en-US" smtClean="0"/>
               <a:t>Third level</a:t>
             </a:r>
           </a:p>
           <a:p>
             <a:pPr lvl="3"/>
             <a:r>
-              <a:rPr lang="en-US"/>
+              <a:rPr lang="en-US" smtClean="0"/>
               <a:t>Fourth level</a:t>
             </a:r>
           </a:p>
           <a:p>
             <a:pPr lvl="4"/>
             <a:r>
-              <a:rPr lang="en-US"/>
+              <a:rPr lang="en-US" smtClean="0"/>
               <a:t>Fifth level</a:t>
             </a:r>
+            <a:endParaRPr lang="en-US"/>
           </a:p>
         </p:txBody>
       </p:sp>
@@ -491,7 +479,7 @@
           <a:p>
             <a:fld id="{5BCAD085-E8A6-8845-BD4E-CB4CCA059FC4}" type="datetimeFigureOut">
               <a:rPr lang="en-US" smtClean="0"/>
-              <a:t>7/13/2026</a:t>
+              <a:t>1/27/13</a:t>
             </a:fld>
             <a:endParaRPr lang="en-US"/>
           </a:p>
@@ -590,9 +578,10 @@
           <a:lstStyle/>
           <a:p>
             <a:r>
-              <a:rPr lang="en-US"/>
+              <a:rPr lang="en-US" smtClean="0"/>
               <a:t>Click to edit Master title style</a:t>
             </a:r>
+            <a:endParaRPr lang="en-US"/>
           </a:p>
         </p:txBody>
       </p:sp>
@@ -618,37 +607,38 @@
           <a:p>
             <a:pPr lvl="0"/>
             <a:r>
-              <a:rPr lang="en-US"/>
+              <a:rPr lang="en-US" smtClean="0"/>
               <a:t>Click to edit Master text styles</a:t>
             </a:r>
           </a:p>
           <a:p>
             <a:pPr lvl="1"/>
             <a:r>
-              <a:rPr lang="en-US"/>
+              <a:rPr lang="en-US" smtClean="0"/>
               <a:t>Second level</a:t>
             </a:r>
           </a:p>
           <a:p>
             <a:pPr lvl="2"/>
             <a:r>
-              <a:rPr lang="en-US"/>
+              <a:rPr lang="en-US" smtClean="0"/>
               <a:t>Third level</a:t>
             </a:r>
           </a:p>
           <a:p>
             <a:pPr lvl="3"/>
             <a:r>
-              <a:rPr lang="en-US"/>
+              <a:rPr lang="en-US" smtClean="0"/>
               <a:t>Fourth level</a:t>
             </a:r>
           </a:p>
           <a:p>
             <a:pPr lvl="4"/>
             <a:r>
-              <a:rPr lang="en-US"/>
+              <a:rPr lang="en-US" smtClean="0"/>
               <a:t>Fifth level</a:t>
             </a:r>
+            <a:endParaRPr lang="en-US"/>
           </a:p>
         </p:txBody>
       </p:sp>
@@ -669,7 +659,7 @@
           <a:p>
             <a:fld id="{5BCAD085-E8A6-8845-BD4E-CB4CCA059FC4}" type="datetimeFigureOut">
               <a:rPr lang="en-US" smtClean="0"/>
-              <a:t>7/13/2026</a:t>
+              <a:t>1/27/13</a:t>
             </a:fld>
             <a:endParaRPr lang="en-US"/>
           </a:p>
@@ -763,9 +753,10 @@
           <a:lstStyle/>
           <a:p>
             <a:r>
-              <a:rPr lang="en-US"/>
+              <a:rPr lang="en-US" smtClean="0"/>
               <a:t>Click to edit Master title style</a:t>
             </a:r>
+            <a:endParaRPr lang="en-US"/>
           </a:p>
         </p:txBody>
       </p:sp>
@@ -786,37 +777,38 @@
           <a:p>
             <a:pPr lvl="0"/>
             <a:r>
-              <a:rPr lang="en-US"/>
+              <a:rPr lang="en-US" smtClean="0"/>
               <a:t>Click to edit Master text styles</a:t>
             </a:r>
           </a:p>
           <a:p>
             <a:pPr lvl="1"/>
             <a:r>
-              <a:rPr lang="en-US"/>
+              <a:rPr lang="en-US" smtClean="0"/>
               <a:t>Second level</a:t>
             </a:r>
           </a:p>
           <a:p>
             <a:pPr lvl="2"/>
             <a:r>
-              <a:rPr lang="en-US"/>
+              <a:rPr lang="en-US" smtClean="0"/>
               <a:t>Third level</a:t>
             </a:r>
           </a:p>
           <a:p>
             <a:pPr lvl="3"/>
             <a:r>
-              <a:rPr lang="en-US"/>
+              <a:rPr lang="en-US" smtClean="0"/>
               <a:t>Fourth level</a:t>
             </a:r>
           </a:p>
           <a:p>
             <a:pPr lvl="4"/>
             <a:r>
-              <a:rPr lang="en-US"/>
+              <a:rPr lang="en-US" smtClean="0"/>
               <a:t>Fifth level</a:t>
             </a:r>
+            <a:endParaRPr lang="en-US"/>
           </a:p>
         </p:txBody>
       </p:sp>
@@ -837,7 +829,7 @@
           <a:p>
             <a:fld id="{5BCAD085-E8A6-8845-BD4E-CB4CCA059FC4}" type="datetimeFigureOut">
               <a:rPr lang="en-US" smtClean="0"/>
-              <a:t>7/13/2026</a:t>
+              <a:t>1/27/13</a:t>
             </a:fld>
             <a:endParaRPr lang="en-US"/>
           </a:p>
@@ -940,9 +932,10 @@
           </a:lstStyle>
           <a:p>
             <a:r>
-              <a:rPr lang="en-US"/>
+              <a:rPr lang="en-US" smtClean="0"/>
               <a:t>Click to edit Master title style</a:t>
             </a:r>
+            <a:endParaRPr lang="en-US"/>
           </a:p>
         </p:txBody>
       </p:sp>
@@ -1059,7 +1052,7 @@
           <a:p>
             <a:pPr lvl="0"/>
             <a:r>
-              <a:rPr lang="en-US"/>
+              <a:rPr lang="en-US" smtClean="0"/>
               <a:t>Click to edit Master text styles</a:t>
             </a:r>
           </a:p>
@@ -1082,7 +1075,7 @@
           <a:p>
             <a:fld id="{5BCAD085-E8A6-8845-BD4E-CB4CCA059FC4}" type="datetimeFigureOut">
               <a:rPr lang="en-US" smtClean="0"/>
-              <a:t>7/13/2026</a:t>
+              <a:t>1/27/13</a:t>
             </a:fld>
             <a:endParaRPr lang="en-US"/>
           </a:p>
@@ -1176,9 +1169,10 @@
           <a:lstStyle/>
           <a:p>
             <a:r>
-              <a:rPr lang="en-US"/>
+              <a:rPr lang="en-US" smtClean="0"/>
               <a:t>Click to edit Master title style</a:t>
             </a:r>
+            <a:endParaRPr lang="en-US"/>
           </a:p>
         </p:txBody>
       </p:sp>
@@ -1232,37 +1226,38 @@
           <a:p>
             <a:pPr lvl="0"/>
             <a:r>
-              <a:rPr lang="en-US"/>
+              <a:rPr lang="en-US" smtClean="0"/>
               <a:t>Click to edit Master text styles</a:t>
             </a:r>
           </a:p>
           <a:p>
             <a:pPr lvl="1"/>
             <a:r>
-              <a:rPr lang="en-US"/>
+              <a:rPr lang="en-US" smtClean="0"/>
               <a:t>Second level</a:t>
             </a:r>
           </a:p>
           <a:p>
             <a:pPr lvl="2"/>
             <a:r>
-              <a:rPr lang="en-US"/>
+              <a:rPr lang="en-US" smtClean="0"/>
               <a:t>Third level</a:t>
             </a:r>
           </a:p>
           <a:p>
             <a:pPr lvl="3"/>
             <a:r>
-              <a:rPr lang="en-US"/>
+              <a:rPr lang="en-US" smtClean="0"/>
               <a:t>Fourth level</a:t>
             </a:r>
           </a:p>
           <a:p>
             <a:pPr lvl="4"/>
             <a:r>
-              <a:rPr lang="en-US"/>
+              <a:rPr lang="en-US" smtClean="0"/>
               <a:t>Fifth level</a:t>
             </a:r>
+            <a:endParaRPr lang="en-US"/>
           </a:p>
         </p:txBody>
       </p:sp>
@@ -1316,37 +1311,38 @@
           <a:p>
             <a:pPr lvl="0"/>
             <a:r>
-              <a:rPr lang="en-US"/>
+              <a:rPr lang="en-US" smtClean="0"/>
               <a:t>Click to edit Master text styles</a:t>
             </a:r>
           </a:p>
           <a:p>
             <a:pPr lvl="1"/>
             <a:r>
-              <a:rPr lang="en-US"/>
+              <a:rPr lang="en-US" smtClean="0"/>
               <a:t>Second level</a:t>
             </a:r>
           </a:p>
           <a:p>
             <a:pPr lvl="2"/>
             <a:r>
-              <a:rPr lang="en-US"/>
+              <a:rPr lang="en-US" smtClean="0"/>
               <a:t>Third level</a:t>
             </a:r>
           </a:p>
           <a:p>
             <a:pPr lvl="3"/>
             <a:r>
-              <a:rPr lang="en-US"/>
+              <a:rPr lang="en-US" smtClean="0"/>
               <a:t>Fourth level</a:t>
             </a:r>
           </a:p>
           <a:p>
             <a:pPr lvl="4"/>
             <a:r>
-              <a:rPr lang="en-US"/>
+              <a:rPr lang="en-US" smtClean="0"/>
               <a:t>Fifth level</a:t>
             </a:r>
+            <a:endParaRPr lang="en-US"/>
           </a:p>
         </p:txBody>
       </p:sp>
@@ -1367,7 +1363,7 @@
           <a:p>
             <a:fld id="{5BCAD085-E8A6-8845-BD4E-CB4CCA059FC4}" type="datetimeFigureOut">
               <a:rPr lang="en-US" smtClean="0"/>
-              <a:t>7/13/2026</a:t>
+              <a:t>1/27/13</a:t>
             </a:fld>
             <a:endParaRPr lang="en-US"/>
           </a:p>
@@ -1465,9 +1461,10 @@
           </a:lstStyle>
           <a:p>
             <a:r>
-              <a:rPr lang="en-US"/>
+              <a:rPr lang="en-US" smtClean="0"/>
               <a:t>Click to edit Master title style</a:t>
             </a:r>
+            <a:endParaRPr lang="en-US"/>
           </a:p>
         </p:txBody>
       </p:sp>
@@ -1530,7 +1527,7 @@
           <a:p>
             <a:pPr lvl="0"/>
             <a:r>
-              <a:rPr lang="en-US"/>
+              <a:rPr lang="en-US" smtClean="0"/>
               <a:t>Click to edit Master text styles</a:t>
             </a:r>
           </a:p>
@@ -1586,37 +1583,38 @@
           <a:p>
             <a:pPr lvl="0"/>
             <a:r>
-              <a:rPr lang="en-US"/>
+              <a:rPr lang="en-US" smtClean="0"/>
               <a:t>Click to edit Master text styles</a:t>
             </a:r>
           </a:p>
           <a:p>
             <a:pPr lvl="1"/>
             <a:r>
-              <a:rPr lang="en-US"/>
+              <a:rPr lang="en-US" smtClean="0"/>
               <a:t>Second level</a:t>
             </a:r>
           </a:p>
           <a:p>
             <a:pPr lvl="2"/>
             <a:r>
-              <a:rPr lang="en-US"/>
+              <a:rPr lang="en-US" smtClean="0"/>
               <a:t>Third level</a:t>
             </a:r>
           </a:p>
           <a:p>
             <a:pPr lvl="3"/>
             <a:r>
-              <a:rPr lang="en-US"/>
+              <a:rPr lang="en-US" smtClean="0"/>
               <a:t>Fourth level</a:t>
             </a:r>
           </a:p>
           <a:p>
             <a:pPr lvl="4"/>
             <a:r>
-              <a:rPr lang="en-US"/>
+              <a:rPr lang="en-US" smtClean="0"/>
               <a:t>Fifth level</a:t>
             </a:r>
+            <a:endParaRPr lang="en-US"/>
           </a:p>
         </p:txBody>
       </p:sp>
@@ -1679,7 +1677,7 @@
           <a:p>
             <a:pPr lvl="0"/>
             <a:r>
-              <a:rPr lang="en-US"/>
+              <a:rPr lang="en-US" smtClean="0"/>
               <a:t>Click to edit Master text styles</a:t>
             </a:r>
           </a:p>
@@ -1735,37 +1733,38 @@
           <a:p>
             <a:pPr lvl="0"/>
             <a:r>
-              <a:rPr lang="en-US"/>
+              <a:rPr lang="en-US" smtClean="0"/>
               <a:t>Click to edit Master text styles</a:t>
             </a:r>
           </a:p>
           <a:p>
             <a:pPr lvl="1"/>
             <a:r>
-              <a:rPr lang="en-US"/>
+              <a:rPr lang="en-US" smtClean="0"/>
               <a:t>Second level</a:t>
             </a:r>
           </a:p>
           <a:p>
             <a:pPr lvl="2"/>
             <a:r>
-              <a:rPr lang="en-US"/>
+              <a:rPr lang="en-US" smtClean="0"/>
               <a:t>Third level</a:t>
             </a:r>
           </a:p>
           <a:p>
             <a:pPr lvl="3"/>
             <a:r>
-              <a:rPr lang="en-US"/>
+              <a:rPr lang="en-US" smtClean="0"/>
               <a:t>Fourth level</a:t>
             </a:r>
           </a:p>
           <a:p>
             <a:pPr lvl="4"/>
             <a:r>
-              <a:rPr lang="en-US"/>
+              <a:rPr lang="en-US" smtClean="0"/>
               <a:t>Fifth level</a:t>
             </a:r>
+            <a:endParaRPr lang="en-US"/>
           </a:p>
         </p:txBody>
       </p:sp>
@@ -1786,7 +1785,7 @@
           <a:p>
             <a:fld id="{5BCAD085-E8A6-8845-BD4E-CB4CCA059FC4}" type="datetimeFigureOut">
               <a:rPr lang="en-US" smtClean="0"/>
-              <a:t>7/13/2026</a:t>
+              <a:t>1/27/13</a:t>
             </a:fld>
             <a:endParaRPr lang="en-US"/>
           </a:p>
@@ -1880,9 +1879,10 @@
           <a:lstStyle/>
           <a:p>
             <a:r>
-              <a:rPr lang="en-US"/>
+              <a:rPr lang="en-US" smtClean="0"/>
               <a:t>Click to edit Master title style</a:t>
             </a:r>
+            <a:endParaRPr lang="en-US"/>
           </a:p>
         </p:txBody>
       </p:sp>
@@ -1903,7 +1903,7 @@
           <a:p>
             <a:fld id="{5BCAD085-E8A6-8845-BD4E-CB4CCA059FC4}" type="datetimeFigureOut">
               <a:rPr lang="en-US" smtClean="0"/>
-              <a:t>7/13/2026</a:t>
+              <a:t>1/27/13</a:t>
             </a:fld>
             <a:endParaRPr lang="en-US"/>
           </a:p>
@@ -1998,7 +1998,7 @@
           <a:p>
             <a:fld id="{5BCAD085-E8A6-8845-BD4E-CB4CCA059FC4}" type="datetimeFigureOut">
               <a:rPr lang="en-US" smtClean="0"/>
-              <a:t>7/13/2026</a:t>
+              <a:t>1/27/13</a:t>
             </a:fld>
             <a:endParaRPr lang="en-US"/>
           </a:p>
@@ -2101,9 +2101,10 @@
           </a:lstStyle>
           <a:p>
             <a:r>
-              <a:rPr lang="en-US"/>
+              <a:rPr lang="en-US" smtClean="0"/>
               <a:t>Click to edit Master title style</a:t>
             </a:r>
+            <a:endParaRPr lang="en-US"/>
           </a:p>
         </p:txBody>
       </p:sp>
@@ -2157,37 +2158,38 @@
           <a:p>
             <a:pPr lvl="0"/>
             <a:r>
-              <a:rPr lang="en-US"/>
+              <a:rPr lang="en-US" smtClean="0"/>
               <a:t>Click to edit Master text styles</a:t>
             </a:r>
           </a:p>
           <a:p>
             <a:pPr lvl="1"/>
             <a:r>
-              <a:rPr lang="en-US"/>
+              <a:rPr lang="en-US" smtClean="0"/>
               <a:t>Second level</a:t>
             </a:r>
           </a:p>
           <a:p>
             <a:pPr lvl="2"/>
             <a:r>
-              <a:rPr lang="en-US"/>
+              <a:rPr lang="en-US" smtClean="0"/>
               <a:t>Third level</a:t>
             </a:r>
           </a:p>
           <a:p>
             <a:pPr lvl="3"/>
             <a:r>
-              <a:rPr lang="en-US"/>
+              <a:rPr lang="en-US" smtClean="0"/>
               <a:t>Fourth level</a:t>
             </a:r>
           </a:p>
           <a:p>
             <a:pPr lvl="4"/>
             <a:r>
-              <a:rPr lang="en-US"/>
+              <a:rPr lang="en-US" smtClean="0"/>
               <a:t>Fifth level</a:t>
             </a:r>
+            <a:endParaRPr lang="en-US"/>
           </a:p>
         </p:txBody>
       </p:sp>
@@ -2250,7 +2252,7 @@
           <a:p>
             <a:pPr lvl="0"/>
             <a:r>
-              <a:rPr lang="en-US"/>
+              <a:rPr lang="en-US" smtClean="0"/>
               <a:t>Click to edit Master text styles</a:t>
             </a:r>
           </a:p>
@@ -2273,7 +2275,7 @@
           <a:p>
             <a:fld id="{5BCAD085-E8A6-8845-BD4E-CB4CCA059FC4}" type="datetimeFigureOut">
               <a:rPr lang="en-US" smtClean="0"/>
-              <a:t>7/13/2026</a:t>
+              <a:t>1/27/13</a:t>
             </a:fld>
             <a:endParaRPr lang="en-US"/>
           </a:p>
@@ -2376,9 +2378,10 @@
           </a:lstStyle>
           <a:p>
             <a:r>
-              <a:rPr lang="en-US"/>
+              <a:rPr lang="en-US" smtClean="0"/>
               <a:t>Click to edit Master title style</a:t>
             </a:r>
+            <a:endParaRPr lang="en-US"/>
           </a:p>
         </p:txBody>
       </p:sp>
@@ -2502,7 +2505,7 @@
           <a:p>
             <a:pPr lvl="0"/>
             <a:r>
-              <a:rPr lang="en-US"/>
+              <a:rPr lang="en-US" smtClean="0"/>
               <a:t>Click to edit Master text styles</a:t>
             </a:r>
           </a:p>
@@ -2525,7 +2528,7 @@
           <a:p>
             <a:fld id="{5BCAD085-E8A6-8845-BD4E-CB4CCA059FC4}" type="datetimeFigureOut">
               <a:rPr lang="en-US" smtClean="0"/>
-              <a:t>7/13/2026</a:t>
+              <a:t>1/27/13</a:t>
             </a:fld>
             <a:endParaRPr lang="en-US"/>
           </a:p>
@@ -2634,9 +2637,10 @@
           <a:lstStyle/>
           <a:p>
             <a:r>
-              <a:rPr lang="en-US"/>
+              <a:rPr lang="en-US" smtClean="0"/>
               <a:t>Click to edit Master title style</a:t>
             </a:r>
+            <a:endParaRPr lang="en-US"/>
           </a:p>
         </p:txBody>
       </p:sp>
@@ -2667,37 +2671,38 @@
           <a:p>
             <a:pPr lvl="0"/>
             <a:r>
-              <a:rPr lang="en-US"/>
+              <a:rPr lang="en-US" smtClean="0"/>
               <a:t>Click to edit Master text styles</a:t>
             </a:r>
           </a:p>
           <a:p>
             <a:pPr lvl="1"/>
             <a:r>
-              <a:rPr lang="en-US"/>
+              <a:rPr lang="en-US" smtClean="0"/>
               <a:t>Second level</a:t>
             </a:r>
           </a:p>
           <a:p>
             <a:pPr lvl="2"/>
             <a:r>
-              <a:rPr lang="en-US"/>
+              <a:rPr lang="en-US" smtClean="0"/>
               <a:t>Third level</a:t>
             </a:r>
           </a:p>
           <a:p>
             <a:pPr lvl="3"/>
             <a:r>
-              <a:rPr lang="en-US"/>
+              <a:rPr lang="en-US" smtClean="0"/>
               <a:t>Fourth level</a:t>
             </a:r>
           </a:p>
           <a:p>
             <a:pPr lvl="4"/>
             <a:r>
-              <a:rPr lang="en-US"/>
+              <a:rPr lang="en-US" smtClean="0"/>
               <a:t>Fifth level</a:t>
             </a:r>
+            <a:endParaRPr lang="en-US"/>
           </a:p>
         </p:txBody>
       </p:sp>
@@ -2736,7 +2741,7 @@
           <a:p>
             <a:fld id="{5BCAD085-E8A6-8845-BD4E-CB4CCA059FC4}" type="datetimeFigureOut">
               <a:rPr lang="en-US" smtClean="0"/>
-              <a:t>7/13/2026</a:t>
+              <a:t>1/27/13</a:t>
             </a:fld>
             <a:endParaRPr lang="en-US"/>
           </a:p>
@@ -3095,7 +3100,7 @@
 </file>
 
 <file path=ppt/slides/slide1.xml><?xml version="1.0" encoding="utf-8"?>
-<p:sld xmlns:a="http://schemas.openxmlformats.org/drawingml/2006/main" xmlns:r="http://schemas.openxmlformats.org/officeDocument/2006/relationships" xmlns:p="http://schemas.openxmlformats.org/presentationml/2006/main">
+<p:sld xmlns:a="http://schemas.openxmlformats.org/drawingml/2006/main" xmlns:p="http://schemas.openxmlformats.org/presentationml/2006/main" xmlns:r="http://schemas.openxmlformats.org/officeDocument/2006/relationships">
   <p:cSld>
     <p:spTree>
       <p:nvGrpSpPr>
@@ -3103,14 +3108,7 @@
         <p:cNvGrpSpPr/>
         <p:nvPr/>
       </p:nvGrpSpPr>
-      <p:grpSpPr>
-        <a:xfrm>
-          <a:off x="0" y="0"/>
-          <a:ext cx="0" cy="0"/>
-          <a:chOff x="0" y="0"/>
-          <a:chExt cx="0" cy="0"/>
-        </a:xfrm>
-      </p:grpSpPr>
+      <p:grpSpPr/>
       <p:sp>
         <p:nvSpPr>
           <p:cNvPr id="2" name="Rectangle 1"/>
@@ -3151,7 +3149,6 @@
           <a:lstStyle/>
           <a:p>
             <a:pPr algn="ctr"/>
-            <a:endParaRPr/>
           </a:p>
         </p:txBody>
       </p:sp>
@@ -3195,7 +3192,6 @@
           <a:lstStyle/>
           <a:p>
             <a:pPr algn="ctr"/>
-            <a:endParaRPr/>
           </a:p>
         </p:txBody>
       </p:sp>
@@ -3216,7 +3212,7 @@
           <a:noFill/>
         </p:spPr>
         <p:txBody>
-          <a:bodyPr wrap="square" lIns="45720" tIns="18288" rIns="45720" bIns="18288" anchor="t">
+          <a:bodyPr wrap="square" anchor="t" lIns="45720" rIns="45720" tIns="18288" bIns="18288">
             <a:spAutoFit/>
           </a:bodyPr>
           <a:lstStyle/>
@@ -3258,7 +3254,7 @@
           <a:noFill/>
         </p:spPr>
         <p:txBody>
-          <a:bodyPr wrap="square" lIns="45720" tIns="18288" rIns="45720" bIns="18288" anchor="t">
+          <a:bodyPr wrap="square" anchor="t" lIns="45720" rIns="45720" tIns="18288" bIns="18288">
             <a:spAutoFit/>
           </a:bodyPr>
           <a:lstStyle/>
@@ -3300,7 +3296,7 @@
           <a:noFill/>
         </p:spPr>
         <p:txBody>
-          <a:bodyPr wrap="square" lIns="45720" tIns="18288" rIns="45720" bIns="18288" anchor="t">
+          <a:bodyPr wrap="square" anchor="t" lIns="45720" rIns="45720" tIns="18288" bIns="18288">
             <a:spAutoFit/>
           </a:bodyPr>
           <a:lstStyle/>
@@ -3380,7 +3376,7 @@
           <a:noFill/>
         </p:spPr>
         <p:txBody>
-          <a:bodyPr wrap="square" lIns="45720" tIns="18288" rIns="45720" bIns="18288" anchor="t">
+          <a:bodyPr wrap="square" anchor="t" lIns="45720" rIns="45720" tIns="18288" bIns="18288">
             <a:spAutoFit/>
           </a:bodyPr>
           <a:lstStyle/>
@@ -3414,7 +3410,7 @@
 </file>
 
 <file path=ppt/slides/slide10.xml><?xml version="1.0" encoding="utf-8"?>
-<p:sld xmlns:a="http://schemas.openxmlformats.org/drawingml/2006/main" xmlns:r="http://schemas.openxmlformats.org/officeDocument/2006/relationships" xmlns:p="http://schemas.openxmlformats.org/presentationml/2006/main">
+<p:sld xmlns:a="http://schemas.openxmlformats.org/drawingml/2006/main" xmlns:p="http://schemas.openxmlformats.org/presentationml/2006/main" xmlns:r="http://schemas.openxmlformats.org/officeDocument/2006/relationships">
   <p:cSld>
     <p:spTree>
       <p:nvGrpSpPr>
@@ -3422,14 +3418,7 @@
         <p:cNvGrpSpPr/>
         <p:nvPr/>
       </p:nvGrpSpPr>
-      <p:grpSpPr>
-        <a:xfrm>
-          <a:off x="0" y="0"/>
-          <a:ext cx="0" cy="0"/>
-          <a:chOff x="0" y="0"/>
-          <a:chExt cx="0" cy="0"/>
-        </a:xfrm>
-      </p:grpSpPr>
+      <p:grpSpPr/>
       <p:sp>
         <p:nvSpPr>
           <p:cNvPr id="2" name="Rectangle 1"/>
@@ -3470,7 +3459,6 @@
           <a:lstStyle/>
           <a:p>
             <a:pPr algn="ctr"/>
-            <a:endParaRPr/>
           </a:p>
         </p:txBody>
       </p:sp>
@@ -3514,7 +3502,6 @@
           <a:lstStyle/>
           <a:p>
             <a:pPr algn="ctr"/>
-            <a:endParaRPr/>
           </a:p>
         </p:txBody>
       </p:sp>
@@ -3535,7 +3522,7 @@
           <a:noFill/>
         </p:spPr>
         <p:txBody>
-          <a:bodyPr wrap="square" lIns="45720" tIns="18288" rIns="45720" bIns="18288" anchor="ctr">
+          <a:bodyPr wrap="square" anchor="ctr" lIns="45720" rIns="45720" tIns="18288" bIns="18288">
             <a:spAutoFit/>
           </a:bodyPr>
           <a:lstStyle/>
@@ -3549,13 +3536,13 @@
               </a:spcAft>
             </a:pPr>
             <a:r>
-              <a:rPr sz="3000" b="1">
+              <a:rPr sz="2400" b="1">
                 <a:solidFill>
                   <a:srgbClr val="F8FAFC"/>
                 </a:solidFill>
                 <a:latin typeface="Segoe UI"/>
               </a:rPr>
-              <a:t>Demo — Frontend</a:t>
+              <a:t>Demo — Storefront, Image ↔ Variant Sync &amp; Views</a:t>
             </a:r>
           </a:p>
         </p:txBody>
@@ -3600,7 +3587,6 @@
           <a:lstStyle/>
           <a:p>
             <a:pPr algn="ctr"/>
-            <a:endParaRPr/>
           </a:p>
         </p:txBody>
       </p:sp>
@@ -3675,7 +3661,7 @@
           <a:noFill/>
         </p:spPr>
         <p:txBody>
-          <a:bodyPr wrap="square" lIns="45720" tIns="18288" rIns="45720" bIns="18288" anchor="t">
+          <a:bodyPr wrap="square" anchor="t" lIns="45720" rIns="45720" tIns="18288" bIns="18288">
             <a:spAutoFit/>
           </a:bodyPr>
           <a:lstStyle/>
@@ -3717,7 +3703,7 @@
           <a:noFill/>
         </p:spPr>
         <p:txBody>
-          <a:bodyPr wrap="square" lIns="45720" tIns="18288" rIns="45720" bIns="18288" anchor="t">
+          <a:bodyPr wrap="square" anchor="t" lIns="45720" rIns="45720" tIns="18288" bIns="18288">
             <a:spAutoFit/>
           </a:bodyPr>
           <a:lstStyle/>
@@ -3759,7 +3745,7 @@
           <a:noFill/>
         </p:spPr>
         <p:txBody>
-          <a:bodyPr wrap="square" lIns="45720" tIns="18288" rIns="45720" bIns="18288" anchor="t">
+          <a:bodyPr wrap="square" anchor="t" lIns="45720" rIns="45720" tIns="18288" bIns="18288">
             <a:spAutoFit/>
           </a:bodyPr>
           <a:lstStyle/>
@@ -3779,7 +3765,7 @@
                 </a:solidFill>
                 <a:latin typeface="Segoe UI"/>
               </a:rPr>
-              <a:t>•  Guest browsing — live category nav (by slug), URL-driven search (shareable, back-safe).</a:t>
+              <a:t>•  Guest browsing — live category nav (by slug), URL-driven search (shareable, back-safe), filters.</a:t>
             </a:r>
           </a:p>
           <a:p>
@@ -3798,7 +3784,7 @@
                 </a:solidFill>
                 <a:latin typeface="Segoe UI"/>
               </a:rPr>
-              <a:t>•  Filters update list + URL together; skeletons on every load.</a:t>
+              <a:t>•  Views under each product: every product-page visit records a view; the card shows the total (social proof).</a:t>
             </a:r>
           </a:p>
           <a:p>
@@ -3817,7 +3803,7 @@
                 </a:solidFill>
                 <a:latin typeface="Segoe UI"/>
               </a:rPr>
-              <a:t>•  Product detail — variant picker updates price, gallery, stock; add-to-cart targets the SKU.</a:t>
+              <a:t>•  Image ↔ variant ↔ price are linked: pick a size → price, gallery, and stock all update at once.</a:t>
             </a:r>
           </a:p>
           <a:p>
@@ -3836,7 +3822,7 @@
                 </a:solidFill>
                 <a:latin typeface="Segoe UI"/>
               </a:rPr>
-              <a:t>•  Wishlist + cart (with toast) as a guest — cart lives in localStorage.</a:t>
+              <a:t>•  It works both ways: scroll the gallery into another size's photos → that variant auto-selects.</a:t>
             </a:r>
           </a:p>
           <a:p>
@@ -3855,7 +3841,7 @@
                 </a:solidFill>
                 <a:latin typeface="Segoe UI"/>
               </a:rPr>
-              <a:t>•  Start checkout → the moment I sign in, the guest cart merges. Handoff to Malik.</a:t>
+              <a:t>•  Wishlist + cart (with toast) as a guest; on sign-in the cart merges. Handoff to Malik.</a:t>
             </a:r>
           </a:p>
         </p:txBody>
@@ -3869,7 +3855,7 @@
 </file>
 
 <file path=ppt/slides/slide11.xml><?xml version="1.0" encoding="utf-8"?>
-<p:sld xmlns:a="http://schemas.openxmlformats.org/drawingml/2006/main" xmlns:r="http://schemas.openxmlformats.org/officeDocument/2006/relationships" xmlns:p="http://schemas.openxmlformats.org/presentationml/2006/main">
+<p:sld xmlns:a="http://schemas.openxmlformats.org/drawingml/2006/main" xmlns:p="http://schemas.openxmlformats.org/presentationml/2006/main" xmlns:r="http://schemas.openxmlformats.org/officeDocument/2006/relationships">
   <p:cSld>
     <p:spTree>
       <p:nvGrpSpPr>
@@ -3877,14 +3863,7 @@
         <p:cNvGrpSpPr/>
         <p:nvPr/>
       </p:nvGrpSpPr>
-      <p:grpSpPr>
-        <a:xfrm>
-          <a:off x="0" y="0"/>
-          <a:ext cx="0" cy="0"/>
-          <a:chOff x="0" y="0"/>
-          <a:chExt cx="0" cy="0"/>
-        </a:xfrm>
-      </p:grpSpPr>
+      <p:grpSpPr/>
       <p:sp>
         <p:nvSpPr>
           <p:cNvPr id="2" name="Rectangle 1"/>
@@ -3925,7 +3904,6 @@
           <a:lstStyle/>
           <a:p>
             <a:pPr algn="ctr"/>
-            <a:endParaRPr/>
           </a:p>
         </p:txBody>
       </p:sp>
@@ -3969,7 +3947,6 @@
           <a:lstStyle/>
           <a:p>
             <a:pPr algn="ctr"/>
-            <a:endParaRPr/>
           </a:p>
         </p:txBody>
       </p:sp>
@@ -3990,7 +3967,7 @@
           <a:noFill/>
         </p:spPr>
         <p:txBody>
-          <a:bodyPr wrap="square" lIns="45720" tIns="18288" rIns="45720" bIns="18288" anchor="ctr">
+          <a:bodyPr wrap="square" anchor="ctr" lIns="45720" rIns="45720" tIns="18288" bIns="18288">
             <a:spAutoFit/>
           </a:bodyPr>
           <a:lstStyle/>
@@ -4004,13 +3981,13 @@
               </a:spcAft>
             </a:pPr>
             <a:r>
-              <a:rPr sz="3000" b="1">
+              <a:rPr sz="2400" b="1">
                 <a:solidFill>
                   <a:srgbClr val="F8FAFC"/>
                 </a:solidFill>
                 <a:latin typeface="Segoe UI"/>
               </a:rPr>
-              <a:t>Demo — Auth &amp; Security</a:t>
+              <a:t>Demo — Auth, Axios &amp; the Global Search Bar</a:t>
             </a:r>
           </a:p>
         </p:txBody>
@@ -4055,7 +4032,6 @@
           <a:lstStyle/>
           <a:p>
             <a:pPr algn="ctr"/>
-            <a:endParaRPr/>
           </a:p>
         </p:txBody>
       </p:sp>
@@ -4130,7 +4106,7 @@
           <a:noFill/>
         </p:spPr>
         <p:txBody>
-          <a:bodyPr wrap="square" lIns="45720" tIns="18288" rIns="45720" bIns="18288" anchor="t">
+          <a:bodyPr wrap="square" anchor="t" lIns="45720" rIns="45720" tIns="18288" bIns="18288">
             <a:spAutoFit/>
           </a:bodyPr>
           <a:lstStyle/>
@@ -4172,7 +4148,7 @@
           <a:noFill/>
         </p:spPr>
         <p:txBody>
-          <a:bodyPr wrap="square" lIns="45720" tIns="18288" rIns="45720" bIns="18288" anchor="t">
+          <a:bodyPr wrap="square" anchor="t" lIns="45720" rIns="45720" tIns="18288" bIns="18288">
             <a:spAutoFit/>
           </a:bodyPr>
           <a:lstStyle/>
@@ -4214,7 +4190,7 @@
           <a:noFill/>
         </p:spPr>
         <p:txBody>
-          <a:bodyPr wrap="square" lIns="45720" tIns="18288" rIns="45720" bIns="18288" anchor="t">
+          <a:bodyPr wrap="square" anchor="t" lIns="45720" rIns="45720" tIns="18288" bIns="18288">
             <a:spAutoFit/>
           </a:bodyPr>
           <a:lstStyle/>
@@ -4253,7 +4229,7 @@
                 </a:solidFill>
                 <a:latin typeface="Segoe UI"/>
               </a:rPr>
-              <a:t>•  Network tab: access token in the Authorization header — memory only, never localStorage.</a:t>
+              <a:t>•  Axios adds the login token to every request in one place — token kept in memory, never localStorage.</a:t>
             </a:r>
           </a:p>
           <a:p>
@@ -4272,7 +4248,7 @@
                 </a:solidFill>
                 <a:latin typeface="Segoe UI"/>
               </a:rPr>
-              <a:t>•  On 401 the client silently refreshes (http-only cookie) and retries — rotated, with theft detection.</a:t>
+              <a:t>•  On 401, Axios silently gets a new token (http-only cookie) and retries — one interceptor, not per-call.</a:t>
             </a:r>
           </a:p>
           <a:p>
@@ -4291,7 +4267,26 @@
                 </a:solidFill>
                 <a:latin typeface="Segoe UI"/>
               </a:rPr>
-              <a:t>•  Hit an admin endpoint as a customer → 403. RBAC enforced on the server, not hidden in the UI.</a:t>
+              <a:t>•  Why Axios over fetch: write the token + auto-refresh once, not on every call (a missed spot = a hole).</a:t>
+            </a:r>
+          </a:p>
+          <a:p>
+            <a:pPr algn="l">
+              <a:lnSpc>
+                <a:spcPct val="114000"/>
+              </a:lnSpc>
+              <a:spcAft>
+                <a:spcPts val="800"/>
+              </a:spcAft>
+            </a:pPr>
+            <a:r>
+              <a:rPr sz="1700" b="0">
+                <a:solidFill>
+                  <a:srgbClr val="E2E8F0"/>
+                </a:solidFill>
+                <a:latin typeface="Segoe UI"/>
+              </a:rPr>
+              <a:t>•  Admin endpoint as a customer → 403 (RBAC on the server). Plus one reusable search box on every admin page.</a:t>
             </a:r>
           </a:p>
         </p:txBody>
@@ -4305,7 +4300,7 @@
 </file>
 
 <file path=ppt/slides/slide12.xml><?xml version="1.0" encoding="utf-8"?>
-<p:sld xmlns:a="http://schemas.openxmlformats.org/drawingml/2006/main" xmlns:r="http://schemas.openxmlformats.org/officeDocument/2006/relationships" xmlns:p="http://schemas.openxmlformats.org/presentationml/2006/main">
+<p:sld xmlns:a="http://schemas.openxmlformats.org/drawingml/2006/main" xmlns:p="http://schemas.openxmlformats.org/presentationml/2006/main" xmlns:r="http://schemas.openxmlformats.org/officeDocument/2006/relationships">
   <p:cSld>
     <p:spTree>
       <p:nvGrpSpPr>
@@ -4313,14 +4308,7 @@
         <p:cNvGrpSpPr/>
         <p:nvPr/>
       </p:nvGrpSpPr>
-      <p:grpSpPr>
-        <a:xfrm>
-          <a:off x="0" y="0"/>
-          <a:ext cx="0" cy="0"/>
-          <a:chOff x="0" y="0"/>
-          <a:chExt cx="0" cy="0"/>
-        </a:xfrm>
-      </p:grpSpPr>
+      <p:grpSpPr/>
       <p:sp>
         <p:nvSpPr>
           <p:cNvPr id="2" name="Rectangle 1"/>
@@ -4361,7 +4349,6 @@
           <a:lstStyle/>
           <a:p>
             <a:pPr algn="ctr"/>
-            <a:endParaRPr/>
           </a:p>
         </p:txBody>
       </p:sp>
@@ -4405,7 +4392,6 @@
           <a:lstStyle/>
           <a:p>
             <a:pPr algn="ctr"/>
-            <a:endParaRPr/>
           </a:p>
         </p:txBody>
       </p:sp>
@@ -4426,7 +4412,7 @@
           <a:noFill/>
         </p:spPr>
         <p:txBody>
-          <a:bodyPr wrap="square" lIns="45720" tIns="18288" rIns="45720" bIns="18288" anchor="ctr">
+          <a:bodyPr wrap="square" anchor="ctr" lIns="45720" rIns="45720" tIns="18288" bIns="18288">
             <a:spAutoFit/>
           </a:bodyPr>
           <a:lstStyle/>
@@ -4446,7 +4432,7 @@
                 </a:solidFill>
                 <a:latin typeface="Segoe UI"/>
               </a:rPr>
-              <a:t>Demo — Checkout &amp; Order Lifecycle</a:t>
+              <a:t>Demo — Checkout, Lifecycle &amp; Verified Reviews</a:t>
             </a:r>
           </a:p>
         </p:txBody>
@@ -4491,7 +4477,6 @@
           <a:lstStyle/>
           <a:p>
             <a:pPr algn="ctr"/>
-            <a:endParaRPr/>
           </a:p>
         </p:txBody>
       </p:sp>
@@ -4566,7 +4551,7 @@
           <a:noFill/>
         </p:spPr>
         <p:txBody>
-          <a:bodyPr wrap="square" lIns="45720" tIns="18288" rIns="45720" bIns="18288" anchor="t">
+          <a:bodyPr wrap="square" anchor="t" lIns="45720" rIns="45720" tIns="18288" bIns="18288">
             <a:spAutoFit/>
           </a:bodyPr>
           <a:lstStyle/>
@@ -4608,7 +4593,7 @@
           <a:noFill/>
         </p:spPr>
         <p:txBody>
-          <a:bodyPr wrap="square" lIns="45720" tIns="18288" rIns="45720" bIns="18288" anchor="t">
+          <a:bodyPr wrap="square" anchor="t" lIns="45720" rIns="45720" tIns="18288" bIns="18288">
             <a:spAutoFit/>
           </a:bodyPr>
           <a:lstStyle/>
@@ -4650,7 +4635,7 @@
           <a:noFill/>
         </p:spPr>
         <p:txBody>
-          <a:bodyPr wrap="square" lIns="45720" tIns="18288" rIns="45720" bIns="18288" anchor="t">
+          <a:bodyPr wrap="square" anchor="t" lIns="45720" rIns="45720" tIns="18288" bIns="18288">
             <a:spAutoFit/>
           </a:bodyPr>
           <a:lstStyle/>
@@ -4670,7 +4655,7 @@
                 </a:solidFill>
                 <a:latin typeface="Segoe UI"/>
               </a:rPr>
-              <a:t>•  Apply a coupon, pay: the server re-prices the cart and re-validates the coupon from scratch.</a:t>
+              <a:t>•  Apply a coupon, pay: the server re-prices the cart and re-checks the coupon from scratch (never trusts the browser).</a:t>
             </a:r>
           </a:p>
           <a:p>
@@ -4689,7 +4674,7 @@
                 </a:solidFill>
                 <a:latin typeface="Segoe UI"/>
               </a:rPr>
-              <a:t>•  Stock decrements only on payment success — an atomic guarded op; two buyers can't both win.</a:t>
+              <a:t>•  Stock drops only on payment success — one safe DB step; two buyers of the last unit can't both win.</a:t>
             </a:r>
           </a:p>
           <a:p>
@@ -4708,7 +4693,7 @@
                 </a:solidFill>
                 <a:latin typeface="Segoe UI"/>
               </a:rPr>
-              <a:t>•  Admin queue: confirm → ship → deliver, each transition validated (no skipping).</a:t>
+              <a:t>•  Admin queue: confirm → ship → deliver, each move validated (no skipping); the customer is notified each time.</a:t>
             </a:r>
           </a:p>
           <a:p>
@@ -4727,7 +4712,7 @@
                 </a:solidFill>
                 <a:latin typeface="Segoe UI"/>
               </a:rPr>
-              <a:t>•  Each step fires the customer's bell + email. Payment is machine; fulfilment stays human.</a:t>
+              <a:t>•  Delivered unlocks a verified review — only a real buyer of that product can review it.</a:t>
             </a:r>
           </a:p>
         </p:txBody>
@@ -4741,7 +4726,7 @@
 </file>
 
 <file path=ppt/slides/slide13.xml><?xml version="1.0" encoding="utf-8"?>
-<p:sld xmlns:a="http://schemas.openxmlformats.org/drawingml/2006/main" xmlns:r="http://schemas.openxmlformats.org/officeDocument/2006/relationships" xmlns:p="http://schemas.openxmlformats.org/presentationml/2006/main">
+<p:sld xmlns:a="http://schemas.openxmlformats.org/drawingml/2006/main" xmlns:p="http://schemas.openxmlformats.org/presentationml/2006/main" xmlns:r="http://schemas.openxmlformats.org/officeDocument/2006/relationships">
   <p:cSld>
     <p:spTree>
       <p:nvGrpSpPr>
@@ -4749,14 +4734,7 @@
         <p:cNvGrpSpPr/>
         <p:nvPr/>
       </p:nvGrpSpPr>
-      <p:grpSpPr>
-        <a:xfrm>
-          <a:off x="0" y="0"/>
-          <a:ext cx="0" cy="0"/>
-          <a:chOff x="0" y="0"/>
-          <a:chExt cx="0" cy="0"/>
-        </a:xfrm>
-      </p:grpSpPr>
+      <p:grpSpPr/>
       <p:sp>
         <p:nvSpPr>
           <p:cNvPr id="2" name="Rectangle 1"/>
@@ -4797,7 +4775,6 @@
           <a:lstStyle/>
           <a:p>
             <a:pPr algn="ctr"/>
-            <a:endParaRPr/>
           </a:p>
         </p:txBody>
       </p:sp>
@@ -4841,7 +4818,6 @@
           <a:lstStyle/>
           <a:p>
             <a:pPr algn="ctr"/>
-            <a:endParaRPr/>
           </a:p>
         </p:txBody>
       </p:sp>
@@ -4862,7 +4838,7 @@
           <a:noFill/>
         </p:spPr>
         <p:txBody>
-          <a:bodyPr wrap="square" lIns="45720" tIns="18288" rIns="45720" bIns="18288" anchor="ctr">
+          <a:bodyPr wrap="square" anchor="ctr" lIns="45720" rIns="45720" tIns="18288" bIns="18288">
             <a:spAutoFit/>
           </a:bodyPr>
           <a:lstStyle/>
@@ -4876,13 +4852,13 @@
               </a:spcAft>
             </a:pPr>
             <a:r>
-              <a:rPr sz="3000" b="1">
+              <a:rPr sz="2400" b="1">
                 <a:solidFill>
                   <a:srgbClr val="F8FAFC"/>
                 </a:solidFill>
                 <a:latin typeface="Segoe UI"/>
               </a:rPr>
-              <a:t>Demo — Data Integrity in Action</a:t>
+              <a:t>Demo — Integrity, Audit Export &amp; Notifications</a:t>
             </a:r>
           </a:p>
         </p:txBody>
@@ -4927,7 +4903,6 @@
           <a:lstStyle/>
           <a:p>
             <a:pPr algn="ctr"/>
-            <a:endParaRPr/>
           </a:p>
         </p:txBody>
       </p:sp>
@@ -5002,7 +4977,7 @@
           <a:noFill/>
         </p:spPr>
         <p:txBody>
-          <a:bodyPr wrap="square" lIns="45720" tIns="18288" rIns="45720" bIns="18288" anchor="t">
+          <a:bodyPr wrap="square" anchor="t" lIns="45720" rIns="45720" tIns="18288" bIns="18288">
             <a:spAutoFit/>
           </a:bodyPr>
           <a:lstStyle/>
@@ -5044,7 +5019,7 @@
           <a:noFill/>
         </p:spPr>
         <p:txBody>
-          <a:bodyPr wrap="square" lIns="45720" tIns="18288" rIns="45720" bIns="18288" anchor="t">
+          <a:bodyPr wrap="square" anchor="t" lIns="45720" rIns="45720" tIns="18288" bIns="18288">
             <a:spAutoFit/>
           </a:bodyPr>
           <a:lstStyle/>
@@ -5086,7 +5061,7 @@
           <a:noFill/>
         </p:spPr>
         <p:txBody>
-          <a:bodyPr wrap="square" lIns="45720" tIns="18288" rIns="45720" bIns="18288" anchor="t">
+          <a:bodyPr wrap="square" anchor="t" lIns="45720" rIns="45720" tIns="18288" bIns="18288">
             <a:spAutoFit/>
           </a:bodyPr>
           <a:lstStyle/>
@@ -5106,7 +5081,7 @@
                 </a:solidFill>
                 <a:latin typeface="Segoe UI"/>
               </a:rPr>
-              <a:t>•  Delivered order unlocks a verified review — unique index (one per customer/product) + transaction recompute.</a:t>
+              <a:t>•  Snapshots: an order freezes the product name + price — rename it later, the old order is unchanged.</a:t>
             </a:r>
           </a:p>
           <a:p>
@@ -5125,7 +5100,7 @@
                 </a:solidFill>
                 <a:latin typeface="Segoe UI"/>
               </a:rPr>
-              <a:t>•  Order snapshots: rename the product, the past order is unchanged.</a:t>
+              <a:t>•  Audit log is append-only — every privileged action recorded (who, what, before/after); edits are rejected.</a:t>
             </a:r>
           </a:p>
           <a:p>
@@ -5144,7 +5119,7 @@
                 </a:solidFill>
                 <a:latin typeface="Segoe UI"/>
               </a:rPr>
-              <a:t>•  Audit log is append-only — editing an entry is rejected by the model hook.</a:t>
+              <a:t>•  Export the audit log — search filters the table, Export gives a CSV of EXACTLY those rows (JSON option too).</a:t>
             </a:r>
           </a:p>
           <a:p>
@@ -5163,7 +5138,7 @@
                 </a:solidFill>
                 <a:latin typeface="Segoe UI"/>
               </a:rPr>
-              <a:t>•  Information you can quietly change isn't a record — so we made it impossible to change.</a:t>
+              <a:t>•  Order notifications: each status change sends the customer a clear message (bell + email).</a:t>
             </a:r>
           </a:p>
         </p:txBody>
@@ -5177,7 +5152,7 @@
 </file>
 
 <file path=ppt/slides/slide14.xml><?xml version="1.0" encoding="utf-8"?>
-<p:sld xmlns:a="http://schemas.openxmlformats.org/drawingml/2006/main" xmlns:r="http://schemas.openxmlformats.org/officeDocument/2006/relationships" xmlns:p="http://schemas.openxmlformats.org/presentationml/2006/main">
+<p:sld xmlns:a="http://schemas.openxmlformats.org/drawingml/2006/main" xmlns:p="http://schemas.openxmlformats.org/presentationml/2006/main" xmlns:r="http://schemas.openxmlformats.org/officeDocument/2006/relationships">
   <p:cSld>
     <p:spTree>
       <p:nvGrpSpPr>
@@ -5185,14 +5160,7 @@
         <p:cNvGrpSpPr/>
         <p:nvPr/>
       </p:nvGrpSpPr>
-      <p:grpSpPr>
-        <a:xfrm>
-          <a:off x="0" y="0"/>
-          <a:ext cx="0" cy="0"/>
-          <a:chOff x="0" y="0"/>
-          <a:chExt cx="0" cy="0"/>
-        </a:xfrm>
-      </p:grpSpPr>
+      <p:grpSpPr/>
       <p:sp>
         <p:nvSpPr>
           <p:cNvPr id="2" name="Rectangle 1"/>
@@ -5233,7 +5201,6 @@
           <a:lstStyle/>
           <a:p>
             <a:pPr algn="ctr"/>
-            <a:endParaRPr/>
           </a:p>
         </p:txBody>
       </p:sp>
@@ -5277,7 +5244,6 @@
           <a:lstStyle/>
           <a:p>
             <a:pPr algn="ctr"/>
-            <a:endParaRPr/>
           </a:p>
         </p:txBody>
       </p:sp>
@@ -5298,7 +5264,7 @@
           <a:noFill/>
         </p:spPr>
         <p:txBody>
-          <a:bodyPr wrap="square" lIns="45720" tIns="18288" rIns="45720" bIns="18288" anchor="ctr">
+          <a:bodyPr wrap="square" anchor="ctr" lIns="45720" rIns="45720" tIns="18288" bIns="18288">
             <a:spAutoFit/>
           </a:bodyPr>
           <a:lstStyle/>
@@ -5363,7 +5329,6 @@
           <a:lstStyle/>
           <a:p>
             <a:pPr algn="ctr"/>
-            <a:endParaRPr/>
           </a:p>
         </p:txBody>
       </p:sp>
@@ -5438,7 +5403,7 @@
           <a:noFill/>
         </p:spPr>
         <p:txBody>
-          <a:bodyPr wrap="square" lIns="45720" tIns="18288" rIns="45720" bIns="18288" anchor="t">
+          <a:bodyPr wrap="square" anchor="t" lIns="45720" rIns="45720" tIns="18288" bIns="18288">
             <a:spAutoFit/>
           </a:bodyPr>
           <a:lstStyle/>
@@ -5480,7 +5445,7 @@
           <a:noFill/>
         </p:spPr>
         <p:txBody>
-          <a:bodyPr wrap="square" lIns="45720" tIns="18288" rIns="45720" bIns="18288" anchor="t">
+          <a:bodyPr wrap="square" anchor="t" lIns="45720" rIns="45720" tIns="18288" bIns="18288">
             <a:spAutoFit/>
           </a:bodyPr>
           <a:lstStyle/>
@@ -5522,7 +5487,7 @@
           <a:noFill/>
         </p:spPr>
         <p:txBody>
-          <a:bodyPr wrap="square" lIns="45720" tIns="18288" rIns="45720" bIns="18288" anchor="t">
+          <a:bodyPr wrap="square" anchor="t" lIns="45720" rIns="45720" tIns="18288" bIns="18288">
             <a:spAutoFit/>
           </a:bodyPr>
           <a:lstStyle/>
@@ -5613,7 +5578,7 @@
 </file>
 
 <file path=ppt/slides/slide15.xml><?xml version="1.0" encoding="utf-8"?>
-<p:sld xmlns:a="http://schemas.openxmlformats.org/drawingml/2006/main" xmlns:r="http://schemas.openxmlformats.org/officeDocument/2006/relationships" xmlns:p="http://schemas.openxmlformats.org/presentationml/2006/main">
+<p:sld xmlns:a="http://schemas.openxmlformats.org/drawingml/2006/main" xmlns:p="http://schemas.openxmlformats.org/presentationml/2006/main" xmlns:r="http://schemas.openxmlformats.org/officeDocument/2006/relationships">
   <p:cSld>
     <p:spTree>
       <p:nvGrpSpPr>
@@ -5621,14 +5586,7 @@
         <p:cNvGrpSpPr/>
         <p:nvPr/>
       </p:nvGrpSpPr>
-      <p:grpSpPr>
-        <a:xfrm>
-          <a:off x="0" y="0"/>
-          <a:ext cx="0" cy="0"/>
-          <a:chOff x="0" y="0"/>
-          <a:chExt cx="0" cy="0"/>
-        </a:xfrm>
-      </p:grpSpPr>
+      <p:grpSpPr/>
       <p:sp>
         <p:nvSpPr>
           <p:cNvPr id="2" name="Rectangle 1"/>
@@ -5669,7 +5627,6 @@
           <a:lstStyle/>
           <a:p>
             <a:pPr algn="ctr"/>
-            <a:endParaRPr/>
           </a:p>
         </p:txBody>
       </p:sp>
@@ -5713,7 +5670,6 @@
           <a:lstStyle/>
           <a:p>
             <a:pPr algn="ctr"/>
-            <a:endParaRPr/>
           </a:p>
         </p:txBody>
       </p:sp>
@@ -5734,7 +5690,7 @@
           <a:noFill/>
         </p:spPr>
         <p:txBody>
-          <a:bodyPr wrap="square" lIns="45720" tIns="18288" rIns="45720" bIns="18288" anchor="ctr">
+          <a:bodyPr wrap="square" anchor="ctr" lIns="45720" rIns="45720" tIns="18288" bIns="18288">
             <a:spAutoFit/>
           </a:bodyPr>
           <a:lstStyle/>
@@ -5748,13 +5704,13 @@
               </a:spcAft>
             </a:pPr>
             <a:r>
-              <a:rPr sz="3000" b="1">
+              <a:rPr sz="2400" b="1">
                 <a:solidFill>
                   <a:srgbClr val="F8FAFC"/>
                 </a:solidFill>
                 <a:latin typeface="Segoe UI"/>
               </a:rPr>
-              <a:t>Analytics &amp; Audit Trail</a:t>
+              <a:t>Smart Discovery — Views, Trending &amp; Recommendations</a:t>
             </a:r>
           </a:p>
         </p:txBody>
@@ -5799,7 +5755,6 @@
           <a:lstStyle/>
           <a:p>
             <a:pPr algn="ctr"/>
-            <a:endParaRPr/>
           </a:p>
         </p:txBody>
       </p:sp>
@@ -5822,7 +5777,7 @@
           </a:solidFill>
           <a:ln w="15875">
             <a:solidFill>
-              <a:srgbClr val="EA580C"/>
+              <a:srgbClr val="273449"/>
             </a:solidFill>
           </a:ln>
         </p:spPr>
@@ -5848,11 +5803,11 @@
             <a:r>
               <a:rPr sz="1300" b="1">
                 <a:solidFill>
-                  <a:srgbClr val="FB923C"/>
-                </a:solidFill>
-                <a:latin typeface="Segoe UI"/>
-              </a:rPr>
-              <a:t>Malik</a:t>
+                  <a:srgbClr val="94A3B8"/>
+                </a:solidFill>
+                <a:latin typeface="Segoe UI"/>
+              </a:rPr>
+              <a:t>All</a:t>
             </a:r>
           </a:p>
         </p:txBody>
@@ -5874,7 +5829,7 @@
           <a:noFill/>
         </p:spPr>
         <p:txBody>
-          <a:bodyPr wrap="square" lIns="45720" tIns="18288" rIns="45720" bIns="18288" anchor="t">
+          <a:bodyPr wrap="square" anchor="t" lIns="45720" rIns="45720" tIns="18288" bIns="18288">
             <a:spAutoFit/>
           </a:bodyPr>
           <a:lstStyle/>
@@ -5916,7 +5871,7 @@
           <a:noFill/>
         </p:spPr>
         <p:txBody>
-          <a:bodyPr wrap="square" lIns="45720" tIns="18288" rIns="45720" bIns="18288" anchor="t">
+          <a:bodyPr wrap="square" anchor="t" lIns="45720" rIns="45720" tIns="18288" bIns="18288">
             <a:spAutoFit/>
           </a:bodyPr>
           <a:lstStyle/>
@@ -5958,7 +5913,7 @@
           <a:noFill/>
         </p:spPr>
         <p:txBody>
-          <a:bodyPr wrap="square" lIns="45720" tIns="18288" rIns="45720" bIns="18288" anchor="t">
+          <a:bodyPr wrap="square" anchor="t" lIns="45720" rIns="45720" tIns="18288" bIns="18288">
             <a:spAutoFit/>
           </a:bodyPr>
           <a:lstStyle/>
@@ -5978,7 +5933,7 @@
                 </a:solidFill>
                 <a:latin typeface="Segoe UI"/>
               </a:rPr>
-              <a:t>•  Super admin sees revenue, order volume, top products, customer growth — and now purchase spend.</a:t>
+              <a:t>•  Views (Haya): every product-page open records a view; sent in small batches; own collection; auto-deletes after 180 days.</a:t>
             </a:r>
           </a:p>
           <a:p>
@@ -5997,7 +5952,7 @@
                 </a:solidFill>
                 <a:latin typeface="Segoe UI"/>
               </a:rPr>
-              <a:t>•  Revenue vs cost in one place — real MongoDB aggregation pipelines, not client-side math.</a:t>
+              <a:t>•  Trending (Mahmod): a nightly job flags the products with the most VIEWS in the last 7 days.</a:t>
             </a:r>
           </a:p>
           <a:p>
@@ -6016,7 +5971,45 @@
                 </a:solidFill>
                 <a:latin typeface="Segoe UI"/>
               </a:rPr>
-              <a:t>•  Under everything: an immutable audit log — who, what, before &amp; after — deliberately indexed.</a:t>
+              <a:t>•  Most-selling (Mahmod): flags the products with the most UNITS SOLD in the last 7 days — a different signal.</a:t>
+            </a:r>
+          </a:p>
+          <a:p>
+            <a:pPr algn="l">
+              <a:lnSpc>
+                <a:spcPct val="114000"/>
+              </a:lnSpc>
+              <a:spcAft>
+                <a:spcPts val="800"/>
+              </a:spcAft>
+            </a:pPr>
+            <a:r>
+              <a:rPr sz="1700" b="0">
+                <a:solidFill>
+                  <a:srgbClr val="E2E8F0"/>
+                </a:solidFill>
+                <a:latin typeface="Segoe UI"/>
+              </a:rPr>
+              <a:t>•  Recommendations (Malik): a co-occurrence engine — products bought by the same customer score together (recency-weighted).</a:t>
+            </a:r>
+          </a:p>
+          <a:p>
+            <a:pPr algn="l">
+              <a:lnSpc>
+                <a:spcPct val="114000"/>
+              </a:lnSpc>
+              <a:spcAft>
+                <a:spcPts val="800"/>
+              </a:spcAft>
+            </a:pPr>
+            <a:r>
+              <a:rPr sz="1700" b="0">
+                <a:solidFill>
+                  <a:srgbClr val="E2E8F0"/>
+                </a:solidFill>
+                <a:latin typeface="Segoe UI"/>
+              </a:rPr>
+              <a:t>•  All computed nightly and read from a cache, so pages stay fast; the analytics charts use live aggregation.</a:t>
             </a:r>
           </a:p>
         </p:txBody>
@@ -6030,7 +6023,7 @@
 </file>
 
 <file path=ppt/slides/slide16.xml><?xml version="1.0" encoding="utf-8"?>
-<p:sld xmlns:a="http://schemas.openxmlformats.org/drawingml/2006/main" xmlns:r="http://schemas.openxmlformats.org/officeDocument/2006/relationships" xmlns:p="http://schemas.openxmlformats.org/presentationml/2006/main">
+<p:sld xmlns:a="http://schemas.openxmlformats.org/drawingml/2006/main" xmlns:p="http://schemas.openxmlformats.org/presentationml/2006/main" xmlns:r="http://schemas.openxmlformats.org/officeDocument/2006/relationships">
   <p:cSld>
     <p:spTree>
       <p:nvGrpSpPr>
@@ -6038,14 +6031,7 @@
         <p:cNvGrpSpPr/>
         <p:nvPr/>
       </p:nvGrpSpPr>
-      <p:grpSpPr>
-        <a:xfrm>
-          <a:off x="0" y="0"/>
-          <a:ext cx="0" cy="0"/>
-          <a:chOff x="0" y="0"/>
-          <a:chExt cx="0" cy="0"/>
-        </a:xfrm>
-      </p:grpSpPr>
+      <p:grpSpPr/>
       <p:sp>
         <p:nvSpPr>
           <p:cNvPr id="2" name="Rectangle 1"/>
@@ -6086,7 +6072,6 @@
           <a:lstStyle/>
           <a:p>
             <a:pPr algn="ctr"/>
-            <a:endParaRPr/>
           </a:p>
         </p:txBody>
       </p:sp>
@@ -6130,7 +6115,6 @@
           <a:lstStyle/>
           <a:p>
             <a:pPr algn="ctr"/>
-            <a:endParaRPr/>
           </a:p>
         </p:txBody>
       </p:sp>
@@ -6151,7 +6135,7 @@
           <a:noFill/>
         </p:spPr>
         <p:txBody>
-          <a:bodyPr wrap="square" lIns="45720" tIns="18288" rIns="45720" bIns="18288" anchor="ctr">
+          <a:bodyPr wrap="square" anchor="ctr" lIns="45720" rIns="45720" tIns="18288" bIns="18288">
             <a:spAutoFit/>
           </a:bodyPr>
           <a:lstStyle/>
@@ -6216,7 +6200,6 @@
           <a:lstStyle/>
           <a:p>
             <a:pPr algn="ctr"/>
-            <a:endParaRPr/>
           </a:p>
         </p:txBody>
       </p:sp>
@@ -6291,7 +6274,7 @@
           <a:noFill/>
         </p:spPr>
         <p:txBody>
-          <a:bodyPr wrap="square" lIns="45720" tIns="18288" rIns="45720" bIns="18288" anchor="t">
+          <a:bodyPr wrap="square" anchor="t" lIns="45720" rIns="45720" tIns="18288" bIns="18288">
             <a:spAutoFit/>
           </a:bodyPr>
           <a:lstStyle/>
@@ -6333,7 +6316,7 @@
           <a:noFill/>
         </p:spPr>
         <p:txBody>
-          <a:bodyPr wrap="square" lIns="45720" tIns="18288" rIns="45720" bIns="18288" anchor="t">
+          <a:bodyPr wrap="square" anchor="t" lIns="45720" rIns="45720" tIns="18288" bIns="18288">
             <a:spAutoFit/>
           </a:bodyPr>
           <a:lstStyle/>
@@ -6396,11 +6379,10 @@
           </a:fontRef>
         </p:style>
         <p:txBody>
-          <a:bodyPr wrap="square" lIns="54864" tIns="27432" rIns="54864" bIns="27432" rtlCol="0" anchor="ctr"/>
+          <a:bodyPr rtlCol="0" anchor="ctr" wrap="square" lIns="54864" rIns="54864" tIns="27432" bIns="27432"/>
           <a:lstStyle/>
           <a:p>
             <a:pPr algn="ctr"/>
-            <a:endParaRPr/>
           </a:p>
         </p:txBody>
       </p:sp>
@@ -6421,7 +6403,7 @@
           <a:noFill/>
         </p:spPr>
         <p:txBody>
-          <a:bodyPr wrap="square" lIns="45720" tIns="18288" rIns="45720" bIns="18288" anchor="t">
+          <a:bodyPr wrap="square" anchor="t" lIns="45720" rIns="45720" tIns="18288" bIns="18288">
             <a:spAutoFit/>
           </a:bodyPr>
           <a:lstStyle/>
@@ -6435,7 +6417,7 @@
               </a:spcAft>
             </a:pPr>
             <a:r>
-              <a:rPr sz="1400" b="1" dirty="0">
+              <a:rPr sz="1400" b="1">
                 <a:solidFill>
                   <a:srgbClr val="F8FAFC"/>
                 </a:solidFill>
@@ -6454,7 +6436,7 @@
               </a:spcAft>
             </a:pPr>
             <a:r>
-              <a:rPr sz="1250" b="0" dirty="0">
+              <a:rPr sz="1250" b="0">
                 <a:solidFill>
                   <a:srgbClr val="94A3B8"/>
                 </a:solidFill>
@@ -6503,11 +6485,10 @@
           </a:fontRef>
         </p:style>
         <p:txBody>
-          <a:bodyPr wrap="square" lIns="54864" tIns="27432" rIns="54864" bIns="27432" rtlCol="0" anchor="ctr"/>
+          <a:bodyPr rtlCol="0" anchor="ctr" wrap="square" lIns="54864" rIns="54864" tIns="27432" bIns="27432"/>
           <a:lstStyle/>
           <a:p>
             <a:pPr algn="ctr"/>
-            <a:endParaRPr/>
           </a:p>
         </p:txBody>
       </p:sp>
@@ -6528,7 +6509,7 @@
           <a:noFill/>
         </p:spPr>
         <p:txBody>
-          <a:bodyPr wrap="square" lIns="45720" tIns="18288" rIns="45720" bIns="18288" anchor="t">
+          <a:bodyPr wrap="square" anchor="t" lIns="45720" rIns="45720" tIns="18288" bIns="18288">
             <a:spAutoFit/>
           </a:bodyPr>
           <a:lstStyle/>
@@ -6610,11 +6591,10 @@
           </a:fontRef>
         </p:style>
         <p:txBody>
-          <a:bodyPr wrap="square" lIns="54864" tIns="27432" rIns="54864" bIns="27432" rtlCol="0" anchor="ctr"/>
+          <a:bodyPr rtlCol="0" anchor="ctr" wrap="square" lIns="54864" rIns="54864" tIns="27432" bIns="27432"/>
           <a:lstStyle/>
           <a:p>
             <a:pPr algn="ctr"/>
-            <a:endParaRPr/>
           </a:p>
         </p:txBody>
       </p:sp>
@@ -6635,7 +6615,7 @@
           <a:noFill/>
         </p:spPr>
         <p:txBody>
-          <a:bodyPr wrap="square" lIns="45720" tIns="18288" rIns="45720" bIns="18288" anchor="t">
+          <a:bodyPr wrap="square" anchor="t" lIns="45720" rIns="45720" tIns="18288" bIns="18288">
             <a:spAutoFit/>
           </a:bodyPr>
           <a:lstStyle/>
@@ -6688,7 +6668,7 @@
 </file>
 
 <file path=ppt/slides/slide17.xml><?xml version="1.0" encoding="utf-8"?>
-<p:sld xmlns:a="http://schemas.openxmlformats.org/drawingml/2006/main" xmlns:r="http://schemas.openxmlformats.org/officeDocument/2006/relationships" xmlns:p="http://schemas.openxmlformats.org/presentationml/2006/main">
+<p:sld xmlns:a="http://schemas.openxmlformats.org/drawingml/2006/main" xmlns:p="http://schemas.openxmlformats.org/presentationml/2006/main" xmlns:r="http://schemas.openxmlformats.org/officeDocument/2006/relationships">
   <p:cSld>
     <p:spTree>
       <p:nvGrpSpPr>
@@ -6696,14 +6676,7 @@
         <p:cNvGrpSpPr/>
         <p:nvPr/>
       </p:nvGrpSpPr>
-      <p:grpSpPr>
-        <a:xfrm>
-          <a:off x="0" y="0"/>
-          <a:ext cx="0" cy="0"/>
-          <a:chOff x="0" y="0"/>
-          <a:chExt cx="0" cy="0"/>
-        </a:xfrm>
-      </p:grpSpPr>
+      <p:grpSpPr/>
       <p:sp>
         <p:nvSpPr>
           <p:cNvPr id="2" name="Rectangle 1"/>
@@ -6744,7 +6717,6 @@
           <a:lstStyle/>
           <a:p>
             <a:pPr algn="ctr"/>
-            <a:endParaRPr/>
           </a:p>
         </p:txBody>
       </p:sp>
@@ -6788,7 +6760,6 @@
           <a:lstStyle/>
           <a:p>
             <a:pPr algn="ctr"/>
-            <a:endParaRPr/>
           </a:p>
         </p:txBody>
       </p:sp>
@@ -6809,7 +6780,7 @@
           <a:noFill/>
         </p:spPr>
         <p:txBody>
-          <a:bodyPr wrap="square" lIns="45720" tIns="18288" rIns="45720" bIns="18288" anchor="ctr">
+          <a:bodyPr wrap="square" anchor="ctr" lIns="45720" rIns="45720" tIns="18288" bIns="18288">
             <a:spAutoFit/>
           </a:bodyPr>
           <a:lstStyle/>
@@ -6874,7 +6845,6 @@
           <a:lstStyle/>
           <a:p>
             <a:pPr algn="ctr"/>
-            <a:endParaRPr/>
           </a:p>
         </p:txBody>
       </p:sp>
@@ -6949,7 +6919,7 @@
           <a:noFill/>
         </p:spPr>
         <p:txBody>
-          <a:bodyPr wrap="square" lIns="45720" tIns="18288" rIns="45720" bIns="18288" anchor="t">
+          <a:bodyPr wrap="square" anchor="t" lIns="45720" rIns="45720" tIns="18288" bIns="18288">
             <a:spAutoFit/>
           </a:bodyPr>
           <a:lstStyle/>
@@ -6991,7 +6961,7 @@
           <a:noFill/>
         </p:spPr>
         <p:txBody>
-          <a:bodyPr wrap="square" lIns="45720" tIns="18288" rIns="45720" bIns="18288" anchor="t">
+          <a:bodyPr wrap="square" anchor="t" lIns="45720" rIns="45720" tIns="18288" bIns="18288">
             <a:spAutoFit/>
           </a:bodyPr>
           <a:lstStyle/>
@@ -7033,7 +7003,7 @@
           <a:noFill/>
         </p:spPr>
         <p:txBody>
-          <a:bodyPr wrap="square" lIns="45720" tIns="18288" rIns="45720" bIns="18288" anchor="t">
+          <a:bodyPr wrap="square" anchor="t" lIns="45720" rIns="45720" tIns="18288" bIns="18288">
             <a:spAutoFit/>
           </a:bodyPr>
           <a:lstStyle/>
@@ -7124,7 +7094,7 @@
 </file>
 
 <file path=ppt/slides/slide18.xml><?xml version="1.0" encoding="utf-8"?>
-<p:sld xmlns:a="http://schemas.openxmlformats.org/drawingml/2006/main" xmlns:r="http://schemas.openxmlformats.org/officeDocument/2006/relationships" xmlns:p="http://schemas.openxmlformats.org/presentationml/2006/main">
+<p:sld xmlns:a="http://schemas.openxmlformats.org/drawingml/2006/main" xmlns:p="http://schemas.openxmlformats.org/presentationml/2006/main" xmlns:r="http://schemas.openxmlformats.org/officeDocument/2006/relationships">
   <p:cSld>
     <p:spTree>
       <p:nvGrpSpPr>
@@ -7132,14 +7102,7 @@
         <p:cNvGrpSpPr/>
         <p:nvPr/>
       </p:nvGrpSpPr>
-      <p:grpSpPr>
-        <a:xfrm>
-          <a:off x="0" y="0"/>
-          <a:ext cx="0" cy="0"/>
-          <a:chOff x="0" y="0"/>
-          <a:chExt cx="0" cy="0"/>
-        </a:xfrm>
-      </p:grpSpPr>
+      <p:grpSpPr/>
       <p:sp>
         <p:nvSpPr>
           <p:cNvPr id="2" name="Rectangle 1"/>
@@ -7180,7 +7143,6 @@
           <a:lstStyle/>
           <a:p>
             <a:pPr algn="ctr"/>
-            <a:endParaRPr/>
           </a:p>
         </p:txBody>
       </p:sp>
@@ -7224,7 +7186,6 @@
           <a:lstStyle/>
           <a:p>
             <a:pPr algn="ctr"/>
-            <a:endParaRPr/>
           </a:p>
         </p:txBody>
       </p:sp>
@@ -7245,7 +7206,7 @@
           <a:noFill/>
         </p:spPr>
         <p:txBody>
-          <a:bodyPr wrap="square" lIns="45720" tIns="18288" rIns="45720" bIns="18288" anchor="ctr">
+          <a:bodyPr wrap="square" anchor="ctr" lIns="45720" rIns="45720" tIns="18288" bIns="18288">
             <a:spAutoFit/>
           </a:bodyPr>
           <a:lstStyle/>
@@ -7310,7 +7271,6 @@
           <a:lstStyle/>
           <a:p>
             <a:pPr algn="ctr"/>
-            <a:endParaRPr/>
           </a:p>
         </p:txBody>
       </p:sp>
@@ -7385,7 +7345,7 @@
           <a:noFill/>
         </p:spPr>
         <p:txBody>
-          <a:bodyPr wrap="square" lIns="45720" tIns="18288" rIns="45720" bIns="18288" anchor="t">
+          <a:bodyPr wrap="square" anchor="t" lIns="45720" rIns="45720" tIns="18288" bIns="18288">
             <a:spAutoFit/>
           </a:bodyPr>
           <a:lstStyle/>
@@ -7427,7 +7387,7 @@
           <a:noFill/>
         </p:spPr>
         <p:txBody>
-          <a:bodyPr wrap="square" lIns="45720" tIns="18288" rIns="45720" bIns="18288" anchor="t">
+          <a:bodyPr wrap="square" anchor="t" lIns="45720" rIns="45720" tIns="18288" bIns="18288">
             <a:spAutoFit/>
           </a:bodyPr>
           <a:lstStyle/>
@@ -7471,32 +7431,14 @@
                 <a:tableStyleId>{5C22544A-7EE6-4342-B048-85BDC9FD1C3A}</a:tableStyleId>
               </a:tblPr>
               <a:tblGrid>
-                <a:gridCol w="3291840">
-                  <a:extLst>
-                    <a:ext uri="{9D8B030D-6E8A-4147-A177-3AD203B41FA5}">
-                      <a16:colId xmlns:a16="http://schemas.microsoft.com/office/drawing/2014/main" val="20000"/>
-                    </a:ext>
-                  </a:extLst>
-                </a:gridCol>
-                <a:gridCol w="5943600">
-                  <a:extLst>
-                    <a:ext uri="{9D8B030D-6E8A-4147-A177-3AD203B41FA5}">
-                      <a16:colId xmlns:a16="http://schemas.microsoft.com/office/drawing/2014/main" val="20001"/>
-                    </a:ext>
-                  </a:extLst>
-                </a:gridCol>
-                <a:gridCol w="1645920">
-                  <a:extLst>
-                    <a:ext uri="{9D8B030D-6E8A-4147-A177-3AD203B41FA5}">
-                      <a16:colId xmlns:a16="http://schemas.microsoft.com/office/drawing/2014/main" val="20002"/>
-                    </a:ext>
-                  </a:extLst>
-                </a:gridCol>
+                <a:gridCol w="3291840"/>
+                <a:gridCol w="5943600"/>
+                <a:gridCol w="1645920"/>
               </a:tblGrid>
               <a:tr h="566928">
                 <a:tc>
                   <a:txBody>
-                    <a:bodyPr/>
+                    <a:bodyPr wrap="square"/>
                     <a:lstStyle/>
                     <a:p>
                       <a:r>
@@ -7518,7 +7460,7 @@
                 </a:tc>
                 <a:tc>
                   <a:txBody>
-                    <a:bodyPr/>
+                    <a:bodyPr wrap="square"/>
                     <a:lstStyle/>
                     <a:p>
                       <a:r>
@@ -7540,7 +7482,7 @@
                 </a:tc>
                 <a:tc>
                   <a:txBody>
-                    <a:bodyPr/>
+                    <a:bodyPr wrap="square"/>
                     <a:lstStyle/>
                     <a:p>
                       <a:r>
@@ -7560,16 +7502,11 @@
                     </a:solidFill>
                   </a:tcPr>
                 </a:tc>
-                <a:extLst>
-                  <a:ext uri="{0D108BD9-81ED-4DB2-BD59-A6C34878D82A}">
-                    <a16:rowId xmlns:a16="http://schemas.microsoft.com/office/drawing/2014/main" val="10000"/>
-                  </a:ext>
-                </a:extLst>
               </a:tr>
               <a:tr h="566928">
                 <a:tc>
                   <a:txBody>
-                    <a:bodyPr/>
+                    <a:bodyPr wrap="square"/>
                     <a:lstStyle/>
                     <a:p>
                       <a:r>
@@ -7591,7 +7528,7 @@
                 </a:tc>
                 <a:tc>
                   <a:txBody>
-                    <a:bodyPr/>
+                    <a:bodyPr wrap="square"/>
                     <a:lstStyle/>
                     <a:p>
                       <a:r>
@@ -7613,7 +7550,7 @@
                 </a:tc>
                 <a:tc>
                   <a:txBody>
-                    <a:bodyPr/>
+                    <a:bodyPr wrap="square"/>
                     <a:lstStyle/>
                     <a:p>
                       <a:r>
@@ -7633,16 +7570,11 @@
                     </a:solidFill>
                   </a:tcPr>
                 </a:tc>
-                <a:extLst>
-                  <a:ext uri="{0D108BD9-81ED-4DB2-BD59-A6C34878D82A}">
-                    <a16:rowId xmlns:a16="http://schemas.microsoft.com/office/drawing/2014/main" val="10001"/>
-                  </a:ext>
-                </a:extLst>
               </a:tr>
               <a:tr h="566928">
                 <a:tc>
                   <a:txBody>
-                    <a:bodyPr/>
+                    <a:bodyPr wrap="square"/>
                     <a:lstStyle/>
                     <a:p>
                       <a:r>
@@ -7664,7 +7596,7 @@
                 </a:tc>
                 <a:tc>
                   <a:txBody>
-                    <a:bodyPr/>
+                    <a:bodyPr wrap="square"/>
                     <a:lstStyle/>
                     <a:p>
                       <a:r>
@@ -7686,7 +7618,7 @@
                 </a:tc>
                 <a:tc>
                   <a:txBody>
-                    <a:bodyPr/>
+                    <a:bodyPr wrap="square"/>
                     <a:lstStyle/>
                     <a:p>
                       <a:r>
@@ -7706,16 +7638,11 @@
                     </a:solidFill>
                   </a:tcPr>
                 </a:tc>
-                <a:extLst>
-                  <a:ext uri="{0D108BD9-81ED-4DB2-BD59-A6C34878D82A}">
-                    <a16:rowId xmlns:a16="http://schemas.microsoft.com/office/drawing/2014/main" val="10002"/>
-                  </a:ext>
-                </a:extLst>
               </a:tr>
               <a:tr h="566928">
                 <a:tc>
                   <a:txBody>
-                    <a:bodyPr/>
+                    <a:bodyPr wrap="square"/>
                     <a:lstStyle/>
                     <a:p>
                       <a:r>
@@ -7737,7 +7664,7 @@
                 </a:tc>
                 <a:tc>
                   <a:txBody>
-                    <a:bodyPr/>
+                    <a:bodyPr wrap="square"/>
                     <a:lstStyle/>
                     <a:p>
                       <a:r>
@@ -7759,7 +7686,7 @@
                 </a:tc>
                 <a:tc>
                   <a:txBody>
-                    <a:bodyPr/>
+                    <a:bodyPr wrap="square"/>
                     <a:lstStyle/>
                     <a:p>
                       <a:r>
@@ -7779,16 +7706,11 @@
                     </a:solidFill>
                   </a:tcPr>
                 </a:tc>
-                <a:extLst>
-                  <a:ext uri="{0D108BD9-81ED-4DB2-BD59-A6C34878D82A}">
-                    <a16:rowId xmlns:a16="http://schemas.microsoft.com/office/drawing/2014/main" val="10003"/>
-                  </a:ext>
-                </a:extLst>
               </a:tr>
               <a:tr h="566928">
                 <a:tc>
                   <a:txBody>
-                    <a:bodyPr/>
+                    <a:bodyPr wrap="square"/>
                     <a:lstStyle/>
                     <a:p>
                       <a:r>
@@ -7810,7 +7732,7 @@
                 </a:tc>
                 <a:tc>
                   <a:txBody>
-                    <a:bodyPr/>
+                    <a:bodyPr wrap="square"/>
                     <a:lstStyle/>
                     <a:p>
                       <a:r>
@@ -7832,7 +7754,7 @@
                 </a:tc>
                 <a:tc>
                   <a:txBody>
-                    <a:bodyPr/>
+                    <a:bodyPr wrap="square"/>
                     <a:lstStyle/>
                     <a:p>
                       <a:r>
@@ -7852,16 +7774,11 @@
                     </a:solidFill>
                   </a:tcPr>
                 </a:tc>
-                <a:extLst>
-                  <a:ext uri="{0D108BD9-81ED-4DB2-BD59-A6C34878D82A}">
-                    <a16:rowId xmlns:a16="http://schemas.microsoft.com/office/drawing/2014/main" val="10004"/>
-                  </a:ext>
-                </a:extLst>
               </a:tr>
               <a:tr h="566928">
                 <a:tc>
                   <a:txBody>
-                    <a:bodyPr/>
+                    <a:bodyPr wrap="square"/>
                     <a:lstStyle/>
                     <a:p>
                       <a:r>
@@ -7883,7 +7800,7 @@
                 </a:tc>
                 <a:tc>
                   <a:txBody>
-                    <a:bodyPr/>
+                    <a:bodyPr wrap="square"/>
                     <a:lstStyle/>
                     <a:p>
                       <a:r>
@@ -7893,7 +7810,7 @@
                           </a:solidFill>
                           <a:latin typeface="Segoe UI"/>
                         </a:rPr>
-                        <a:t>26 verified features — merge, checkout, procurement, analytics</a:t>
+                        <a:t>25+ features — image↔variant sync, views, audit export, recommendations</a:t>
                       </a:r>
                     </a:p>
                   </a:txBody>
@@ -7905,7 +7822,7 @@
                 </a:tc>
                 <a:tc>
                   <a:txBody>
-                    <a:bodyPr/>
+                    <a:bodyPr wrap="square"/>
                     <a:lstStyle/>
                     <a:p>
                       <a:r>
@@ -7925,16 +7842,11 @@
                     </a:solidFill>
                   </a:tcPr>
                 </a:tc>
-                <a:extLst>
-                  <a:ext uri="{0D108BD9-81ED-4DB2-BD59-A6C34878D82A}">
-                    <a16:rowId xmlns:a16="http://schemas.microsoft.com/office/drawing/2014/main" val="10005"/>
-                  </a:ext>
-                </a:extLst>
               </a:tr>
               <a:tr h="566928">
                 <a:tc>
                   <a:txBody>
-                    <a:bodyPr/>
+                    <a:bodyPr wrap="square"/>
                     <a:lstStyle/>
                     <a:p>
                       <a:r>
@@ -7956,7 +7868,7 @@
                 </a:tc>
                 <a:tc>
                   <a:txBody>
-                    <a:bodyPr/>
+                    <a:bodyPr wrap="square"/>
                     <a:lstStyle/>
                     <a:p>
                       <a:r>
@@ -7978,7 +7890,7 @@
                 </a:tc>
                 <a:tc>
                   <a:txBody>
-                    <a:bodyPr/>
+                    <a:bodyPr wrap="square"/>
                     <a:lstStyle/>
                     <a:p>
                       <a:r>
@@ -7998,11 +7910,6 @@
                     </a:solidFill>
                   </a:tcPr>
                 </a:tc>
-                <a:extLst>
-                  <a:ext uri="{0D108BD9-81ED-4DB2-BD59-A6C34878D82A}">
-                    <a16:rowId xmlns:a16="http://schemas.microsoft.com/office/drawing/2014/main" val="10006"/>
-                  </a:ext>
-                </a:extLst>
               </a:tr>
             </a:tbl>
           </a:graphicData>
@@ -8017,7 +7924,7 @@
 </file>
 
 <file path=ppt/slides/slide19.xml><?xml version="1.0" encoding="utf-8"?>
-<p:sld xmlns:a="http://schemas.openxmlformats.org/drawingml/2006/main" xmlns:r="http://schemas.openxmlformats.org/officeDocument/2006/relationships" xmlns:p="http://schemas.openxmlformats.org/presentationml/2006/main">
+<p:sld xmlns:a="http://schemas.openxmlformats.org/drawingml/2006/main" xmlns:p="http://schemas.openxmlformats.org/presentationml/2006/main" xmlns:r="http://schemas.openxmlformats.org/officeDocument/2006/relationships">
   <p:cSld>
     <p:spTree>
       <p:nvGrpSpPr>
@@ -8025,14 +7932,7 @@
         <p:cNvGrpSpPr/>
         <p:nvPr/>
       </p:nvGrpSpPr>
-      <p:grpSpPr>
-        <a:xfrm>
-          <a:off x="0" y="0"/>
-          <a:ext cx="0" cy="0"/>
-          <a:chOff x="0" y="0"/>
-          <a:chExt cx="0" cy="0"/>
-        </a:xfrm>
-      </p:grpSpPr>
+      <p:grpSpPr/>
       <p:sp>
         <p:nvSpPr>
           <p:cNvPr id="2" name="Rectangle 1"/>
@@ -8073,7 +7973,6 @@
           <a:lstStyle/>
           <a:p>
             <a:pPr algn="ctr"/>
-            <a:endParaRPr/>
           </a:p>
         </p:txBody>
       </p:sp>
@@ -8117,7 +8016,6 @@
           <a:lstStyle/>
           <a:p>
             <a:pPr algn="ctr"/>
-            <a:endParaRPr/>
           </a:p>
         </p:txBody>
       </p:sp>
@@ -8138,7 +8036,7 @@
           <a:noFill/>
         </p:spPr>
         <p:txBody>
-          <a:bodyPr wrap="square" lIns="45720" tIns="18288" rIns="45720" bIns="18288" anchor="ctr">
+          <a:bodyPr wrap="square" anchor="ctr" lIns="45720" rIns="45720" tIns="18288" bIns="18288">
             <a:spAutoFit/>
           </a:bodyPr>
           <a:lstStyle/>
@@ -8203,7 +8101,6 @@
           <a:lstStyle/>
           <a:p>
             <a:pPr algn="ctr"/>
-            <a:endParaRPr/>
           </a:p>
         </p:txBody>
       </p:sp>
@@ -8278,7 +8175,7 @@
           <a:noFill/>
         </p:spPr>
         <p:txBody>
-          <a:bodyPr wrap="square" lIns="45720" tIns="18288" rIns="45720" bIns="18288" anchor="t">
+          <a:bodyPr wrap="square" anchor="t" lIns="45720" rIns="45720" tIns="18288" bIns="18288">
             <a:spAutoFit/>
           </a:bodyPr>
           <a:lstStyle/>
@@ -8320,7 +8217,7 @@
           <a:noFill/>
         </p:spPr>
         <p:txBody>
-          <a:bodyPr wrap="square" lIns="45720" tIns="18288" rIns="45720" bIns="18288" anchor="t">
+          <a:bodyPr wrap="square" anchor="t" lIns="45720" rIns="45720" tIns="18288" bIns="18288">
             <a:spAutoFit/>
           </a:bodyPr>
           <a:lstStyle/>
@@ -8364,32 +8261,14 @@
                 <a:tableStyleId>{5C22544A-7EE6-4342-B048-85BDC9FD1C3A}</a:tableStyleId>
               </a:tblPr>
               <a:tblGrid>
-                <a:gridCol w="4206240">
-                  <a:extLst>
-                    <a:ext uri="{9D8B030D-6E8A-4147-A177-3AD203B41FA5}">
-                      <a16:colId xmlns:a16="http://schemas.microsoft.com/office/drawing/2014/main" val="20000"/>
-                    </a:ext>
-                  </a:extLst>
-                </a:gridCol>
-                <a:gridCol w="4206240">
-                  <a:extLst>
-                    <a:ext uri="{9D8B030D-6E8A-4147-A177-3AD203B41FA5}">
-                      <a16:colId xmlns:a16="http://schemas.microsoft.com/office/drawing/2014/main" val="20001"/>
-                    </a:ext>
-                  </a:extLst>
-                </a:gridCol>
-                <a:gridCol w="2468880">
-                  <a:extLst>
-                    <a:ext uri="{9D8B030D-6E8A-4147-A177-3AD203B41FA5}">
-                      <a16:colId xmlns:a16="http://schemas.microsoft.com/office/drawing/2014/main" val="20002"/>
-                    </a:ext>
-                  </a:extLst>
-                </a:gridCol>
+                <a:gridCol w="4206240"/>
+                <a:gridCol w="4206240"/>
+                <a:gridCol w="2468880"/>
               </a:tblGrid>
               <a:tr h="566928">
                 <a:tc>
                   <a:txBody>
-                    <a:bodyPr/>
+                    <a:bodyPr wrap="square"/>
                     <a:lstStyle/>
                     <a:p>
                       <a:r>
@@ -8411,7 +8290,7 @@
                 </a:tc>
                 <a:tc>
                   <a:txBody>
-                    <a:bodyPr/>
+                    <a:bodyPr wrap="square"/>
                     <a:lstStyle/>
                     <a:p>
                       <a:r>
@@ -8433,7 +8312,7 @@
                 </a:tc>
                 <a:tc>
                   <a:txBody>
-                    <a:bodyPr/>
+                    <a:bodyPr wrap="square"/>
                     <a:lstStyle/>
                     <a:p>
                       <a:r>
@@ -8453,16 +8332,11 @@
                     </a:solidFill>
                   </a:tcPr>
                 </a:tc>
-                <a:extLst>
-                  <a:ext uri="{0D108BD9-81ED-4DB2-BD59-A6C34878D82A}">
-                    <a16:rowId xmlns:a16="http://schemas.microsoft.com/office/drawing/2014/main" val="10000"/>
-                  </a:ext>
-                </a:extLst>
               </a:tr>
               <a:tr h="566928">
                 <a:tc>
                   <a:txBody>
-                    <a:bodyPr/>
+                    <a:bodyPr wrap="square"/>
                     <a:lstStyle/>
                     <a:p>
                       <a:r>
@@ -8484,7 +8358,7 @@
                 </a:tc>
                 <a:tc>
                   <a:txBody>
-                    <a:bodyPr/>
+                    <a:bodyPr wrap="square"/>
                     <a:lstStyle/>
                     <a:p>
                       <a:r>
@@ -8506,7 +8380,7 @@
                 </a:tc>
                 <a:tc>
                   <a:txBody>
-                    <a:bodyPr/>
+                    <a:bodyPr wrap="square"/>
                     <a:lstStyle/>
                     <a:p>
                       <a:r>
@@ -8526,16 +8400,11 @@
                     </a:solidFill>
                   </a:tcPr>
                 </a:tc>
-                <a:extLst>
-                  <a:ext uri="{0D108BD9-81ED-4DB2-BD59-A6C34878D82A}">
-                    <a16:rowId xmlns:a16="http://schemas.microsoft.com/office/drawing/2014/main" val="10001"/>
-                  </a:ext>
-                </a:extLst>
               </a:tr>
               <a:tr h="566928">
                 <a:tc>
                   <a:txBody>
-                    <a:bodyPr/>
+                    <a:bodyPr wrap="square"/>
                     <a:lstStyle/>
                     <a:p>
                       <a:r>
@@ -8557,7 +8426,7 @@
                 </a:tc>
                 <a:tc>
                   <a:txBody>
-                    <a:bodyPr/>
+                    <a:bodyPr wrap="square"/>
                     <a:lstStyle/>
                     <a:p>
                       <a:r>
@@ -8579,7 +8448,7 @@
                 </a:tc>
                 <a:tc>
                   <a:txBody>
-                    <a:bodyPr/>
+                    <a:bodyPr wrap="square"/>
                     <a:lstStyle/>
                     <a:p>
                       <a:r>
@@ -8599,16 +8468,11 @@
                     </a:solidFill>
                   </a:tcPr>
                 </a:tc>
-                <a:extLst>
-                  <a:ext uri="{0D108BD9-81ED-4DB2-BD59-A6C34878D82A}">
-                    <a16:rowId xmlns:a16="http://schemas.microsoft.com/office/drawing/2014/main" val="10002"/>
-                  </a:ext>
-                </a:extLst>
               </a:tr>
               <a:tr h="566928">
                 <a:tc>
                   <a:txBody>
-                    <a:bodyPr/>
+                    <a:bodyPr wrap="square"/>
                     <a:lstStyle/>
                     <a:p>
                       <a:r>
@@ -8630,7 +8494,7 @@
                 </a:tc>
                 <a:tc>
                   <a:txBody>
-                    <a:bodyPr/>
+                    <a:bodyPr wrap="square"/>
                     <a:lstStyle/>
                     <a:p>
                       <a:r>
@@ -8652,7 +8516,7 @@
                 </a:tc>
                 <a:tc>
                   <a:txBody>
-                    <a:bodyPr/>
+                    <a:bodyPr wrap="square"/>
                     <a:lstStyle/>
                     <a:p>
                       <a:r>
@@ -8672,16 +8536,11 @@
                     </a:solidFill>
                   </a:tcPr>
                 </a:tc>
-                <a:extLst>
-                  <a:ext uri="{0D108BD9-81ED-4DB2-BD59-A6C34878D82A}">
-                    <a16:rowId xmlns:a16="http://schemas.microsoft.com/office/drawing/2014/main" val="10003"/>
-                  </a:ext>
-                </a:extLst>
               </a:tr>
               <a:tr h="566928">
                 <a:tc>
                   <a:txBody>
-                    <a:bodyPr/>
+                    <a:bodyPr wrap="square"/>
                     <a:lstStyle/>
                     <a:p>
                       <a:r>
@@ -8703,7 +8562,7 @@
                 </a:tc>
                 <a:tc>
                   <a:txBody>
-                    <a:bodyPr/>
+                    <a:bodyPr wrap="square"/>
                     <a:lstStyle/>
                     <a:p>
                       <a:r>
@@ -8725,7 +8584,7 @@
                 </a:tc>
                 <a:tc>
                   <a:txBody>
-                    <a:bodyPr/>
+                    <a:bodyPr wrap="square"/>
                     <a:lstStyle/>
                     <a:p>
                       <a:r>
@@ -8745,11 +8604,6 @@
                     </a:solidFill>
                   </a:tcPr>
                 </a:tc>
-                <a:extLst>
-                  <a:ext uri="{0D108BD9-81ED-4DB2-BD59-A6C34878D82A}">
-                    <a16:rowId xmlns:a16="http://schemas.microsoft.com/office/drawing/2014/main" val="10004"/>
-                  </a:ext>
-                </a:extLst>
               </a:tr>
             </a:tbl>
           </a:graphicData>
@@ -8764,7 +8618,7 @@
 </file>
 
 <file path=ppt/slides/slide2.xml><?xml version="1.0" encoding="utf-8"?>
-<p:sld xmlns:a="http://schemas.openxmlformats.org/drawingml/2006/main" xmlns:r="http://schemas.openxmlformats.org/officeDocument/2006/relationships" xmlns:p="http://schemas.openxmlformats.org/presentationml/2006/main">
+<p:sld xmlns:a="http://schemas.openxmlformats.org/drawingml/2006/main" xmlns:p="http://schemas.openxmlformats.org/presentationml/2006/main" xmlns:r="http://schemas.openxmlformats.org/officeDocument/2006/relationships">
   <p:cSld>
     <p:spTree>
       <p:nvGrpSpPr>
@@ -8772,14 +8626,7 @@
         <p:cNvGrpSpPr/>
         <p:nvPr/>
       </p:nvGrpSpPr>
-      <p:grpSpPr>
-        <a:xfrm>
-          <a:off x="0" y="0"/>
-          <a:ext cx="0" cy="0"/>
-          <a:chOff x="0" y="0"/>
-          <a:chExt cx="0" cy="0"/>
-        </a:xfrm>
-      </p:grpSpPr>
+      <p:grpSpPr/>
       <p:sp>
         <p:nvSpPr>
           <p:cNvPr id="2" name="Rectangle 1"/>
@@ -8820,7 +8667,6 @@
           <a:lstStyle/>
           <a:p>
             <a:pPr algn="ctr"/>
-            <a:endParaRPr/>
           </a:p>
         </p:txBody>
       </p:sp>
@@ -8864,7 +8710,6 @@
           <a:lstStyle/>
           <a:p>
             <a:pPr algn="ctr"/>
-            <a:endParaRPr/>
           </a:p>
         </p:txBody>
       </p:sp>
@@ -8885,7 +8730,7 @@
           <a:noFill/>
         </p:spPr>
         <p:txBody>
-          <a:bodyPr wrap="square" lIns="45720" tIns="18288" rIns="45720" bIns="18288" anchor="ctr">
+          <a:bodyPr wrap="square" anchor="ctr" lIns="45720" rIns="45720" tIns="18288" bIns="18288">
             <a:spAutoFit/>
           </a:bodyPr>
           <a:lstStyle/>
@@ -8950,7 +8795,6 @@
           <a:lstStyle/>
           <a:p>
             <a:pPr algn="ctr"/>
-            <a:endParaRPr/>
           </a:p>
         </p:txBody>
       </p:sp>
@@ -9025,7 +8869,7 @@
           <a:noFill/>
         </p:spPr>
         <p:txBody>
-          <a:bodyPr wrap="square" lIns="45720" tIns="18288" rIns="45720" bIns="18288" anchor="t">
+          <a:bodyPr wrap="square" anchor="t" lIns="45720" rIns="45720" tIns="18288" bIns="18288">
             <a:spAutoFit/>
           </a:bodyPr>
           <a:lstStyle/>
@@ -9067,7 +8911,7 @@
           <a:noFill/>
         </p:spPr>
         <p:txBody>
-          <a:bodyPr wrap="square" lIns="45720" tIns="18288" rIns="45720" bIns="18288" anchor="t">
+          <a:bodyPr wrap="square" anchor="t" lIns="45720" rIns="45720" tIns="18288" bIns="18288">
             <a:spAutoFit/>
           </a:bodyPr>
           <a:lstStyle/>
@@ -9109,7 +8953,7 @@
           <a:noFill/>
         </p:spPr>
         <p:txBody>
-          <a:bodyPr wrap="square" lIns="45720" tIns="18288" rIns="45720" bIns="18288" anchor="t">
+          <a:bodyPr wrap="square" anchor="t" lIns="45720" rIns="45720" tIns="18288" bIns="18288">
             <a:spAutoFit/>
           </a:bodyPr>
           <a:lstStyle/>
@@ -9200,7 +9044,7 @@
 </file>
 
 <file path=ppt/slides/slide20.xml><?xml version="1.0" encoding="utf-8"?>
-<p:sld xmlns:a="http://schemas.openxmlformats.org/drawingml/2006/main" xmlns:r="http://schemas.openxmlformats.org/officeDocument/2006/relationships" xmlns:p="http://schemas.openxmlformats.org/presentationml/2006/main">
+<p:sld xmlns:a="http://schemas.openxmlformats.org/drawingml/2006/main" xmlns:p="http://schemas.openxmlformats.org/presentationml/2006/main" xmlns:r="http://schemas.openxmlformats.org/officeDocument/2006/relationships">
   <p:cSld>
     <p:spTree>
       <p:nvGrpSpPr>
@@ -9208,14 +9052,7 @@
         <p:cNvGrpSpPr/>
         <p:nvPr/>
       </p:nvGrpSpPr>
-      <p:grpSpPr>
-        <a:xfrm>
-          <a:off x="0" y="0"/>
-          <a:ext cx="0" cy="0"/>
-          <a:chOff x="0" y="0"/>
-          <a:chExt cx="0" cy="0"/>
-        </a:xfrm>
-      </p:grpSpPr>
+      <p:grpSpPr/>
       <p:sp>
         <p:nvSpPr>
           <p:cNvPr id="2" name="Rectangle 1"/>
@@ -9256,7 +9093,6 @@
           <a:lstStyle/>
           <a:p>
             <a:pPr algn="ctr"/>
-            <a:endParaRPr/>
           </a:p>
         </p:txBody>
       </p:sp>
@@ -9300,7 +9136,6 @@
           <a:lstStyle/>
           <a:p>
             <a:pPr algn="ctr"/>
-            <a:endParaRPr/>
           </a:p>
         </p:txBody>
       </p:sp>
@@ -9321,7 +9156,7 @@
           <a:noFill/>
         </p:spPr>
         <p:txBody>
-          <a:bodyPr wrap="square" lIns="45720" tIns="18288" rIns="45720" bIns="18288" anchor="ctr">
+          <a:bodyPr wrap="square" anchor="ctr" lIns="45720" rIns="45720" tIns="18288" bIns="18288">
             <a:spAutoFit/>
           </a:bodyPr>
           <a:lstStyle/>
@@ -9386,7 +9221,6 @@
           <a:lstStyle/>
           <a:p>
             <a:pPr algn="ctr"/>
-            <a:endParaRPr/>
           </a:p>
         </p:txBody>
       </p:sp>
@@ -9461,7 +9295,7 @@
           <a:noFill/>
         </p:spPr>
         <p:txBody>
-          <a:bodyPr wrap="square" lIns="45720" tIns="18288" rIns="45720" bIns="18288" anchor="t">
+          <a:bodyPr wrap="square" anchor="t" lIns="45720" rIns="45720" tIns="18288" bIns="18288">
             <a:spAutoFit/>
           </a:bodyPr>
           <a:lstStyle/>
@@ -9503,7 +9337,7 @@
           <a:noFill/>
         </p:spPr>
         <p:txBody>
-          <a:bodyPr wrap="square" lIns="45720" tIns="18288" rIns="45720" bIns="18288" anchor="t">
+          <a:bodyPr wrap="square" anchor="t" lIns="45720" rIns="45720" tIns="18288" bIns="18288">
             <a:spAutoFit/>
           </a:bodyPr>
           <a:lstStyle/>
@@ -9545,7 +9379,7 @@
           <a:noFill/>
         </p:spPr>
         <p:txBody>
-          <a:bodyPr wrap="square" lIns="45720" tIns="18288" rIns="45720" bIns="18288" anchor="t">
+          <a:bodyPr wrap="square" anchor="t" lIns="45720" rIns="45720" tIns="18288" bIns="18288">
             <a:spAutoFit/>
           </a:bodyPr>
           <a:lstStyle/>
@@ -9636,7 +9470,7 @@
 </file>
 
 <file path=ppt/slides/slide21.xml><?xml version="1.0" encoding="utf-8"?>
-<p:sld xmlns:a="http://schemas.openxmlformats.org/drawingml/2006/main" xmlns:r="http://schemas.openxmlformats.org/officeDocument/2006/relationships" xmlns:p="http://schemas.openxmlformats.org/presentationml/2006/main">
+<p:sld xmlns:a="http://schemas.openxmlformats.org/drawingml/2006/main" xmlns:p="http://schemas.openxmlformats.org/presentationml/2006/main" xmlns:r="http://schemas.openxmlformats.org/officeDocument/2006/relationships">
   <p:cSld>
     <p:spTree>
       <p:nvGrpSpPr>
@@ -9644,14 +9478,7 @@
         <p:cNvGrpSpPr/>
         <p:nvPr/>
       </p:nvGrpSpPr>
-      <p:grpSpPr>
-        <a:xfrm>
-          <a:off x="0" y="0"/>
-          <a:ext cx="0" cy="0"/>
-          <a:chOff x="0" y="0"/>
-          <a:chExt cx="0" cy="0"/>
-        </a:xfrm>
-      </p:grpSpPr>
+      <p:grpSpPr/>
       <p:sp>
         <p:nvSpPr>
           <p:cNvPr id="2" name="Rectangle 1"/>
@@ -9692,7 +9519,6 @@
           <a:lstStyle/>
           <a:p>
             <a:pPr algn="ctr"/>
-            <a:endParaRPr/>
           </a:p>
         </p:txBody>
       </p:sp>
@@ -9736,7 +9562,6 @@
           <a:lstStyle/>
           <a:p>
             <a:pPr algn="ctr"/>
-            <a:endParaRPr/>
           </a:p>
         </p:txBody>
       </p:sp>
@@ -9757,7 +9582,7 @@
           <a:noFill/>
         </p:spPr>
         <p:txBody>
-          <a:bodyPr wrap="square" lIns="45720" tIns="18288" rIns="45720" bIns="18288" anchor="ctr">
+          <a:bodyPr wrap="square" anchor="ctr" lIns="45720" rIns="45720" tIns="18288" bIns="18288">
             <a:spAutoFit/>
           </a:bodyPr>
           <a:lstStyle/>
@@ -9822,7 +9647,6 @@
           <a:lstStyle/>
           <a:p>
             <a:pPr algn="ctr"/>
-            <a:endParaRPr/>
           </a:p>
         </p:txBody>
       </p:sp>
@@ -9897,7 +9721,7 @@
           <a:noFill/>
         </p:spPr>
         <p:txBody>
-          <a:bodyPr wrap="square" lIns="45720" tIns="18288" rIns="45720" bIns="18288" anchor="t">
+          <a:bodyPr wrap="square" anchor="t" lIns="45720" rIns="45720" tIns="18288" bIns="18288">
             <a:spAutoFit/>
           </a:bodyPr>
           <a:lstStyle/>
@@ -9939,7 +9763,7 @@
           <a:noFill/>
         </p:spPr>
         <p:txBody>
-          <a:bodyPr wrap="square" lIns="45720" tIns="18288" rIns="45720" bIns="18288" anchor="t">
+          <a:bodyPr wrap="square" anchor="t" lIns="45720" rIns="45720" tIns="18288" bIns="18288">
             <a:spAutoFit/>
           </a:bodyPr>
           <a:lstStyle/>
@@ -9981,7 +9805,7 @@
           <a:noFill/>
         </p:spPr>
         <p:txBody>
-          <a:bodyPr wrap="square" lIns="45720" tIns="18288" rIns="45720" bIns="18288" anchor="t">
+          <a:bodyPr wrap="square" anchor="t" lIns="45720" rIns="45720" tIns="18288" bIns="18288">
             <a:spAutoFit/>
           </a:bodyPr>
           <a:lstStyle/>
@@ -10082,7 +9906,7 @@
           </a:fontRef>
         </p:style>
         <p:txBody>
-          <a:bodyPr wrap="square" lIns="54864" tIns="27432" rIns="54864" bIns="27432" rtlCol="0" anchor="ctr"/>
+          <a:bodyPr rtlCol="0" anchor="ctr" wrap="square" lIns="54864" rIns="54864" tIns="27432" bIns="27432"/>
           <a:lstStyle/>
           <a:p>
             <a:pPr algn="ctr"/>
@@ -10136,7 +9960,7 @@
           </a:fontRef>
         </p:style>
         <p:txBody>
-          <a:bodyPr wrap="square" lIns="54864" tIns="27432" rIns="54864" bIns="27432" rtlCol="0" anchor="ctr"/>
+          <a:bodyPr rtlCol="0" anchor="ctr" wrap="square" lIns="54864" rIns="54864" tIns="27432" bIns="27432"/>
           <a:lstStyle/>
           <a:p>
             <a:pPr algn="ctr"/>
@@ -10161,7 +9985,7 @@
 </file>
 
 <file path=ppt/slides/slide22.xml><?xml version="1.0" encoding="utf-8"?>
-<p:sld xmlns:a="http://schemas.openxmlformats.org/drawingml/2006/main" xmlns:r="http://schemas.openxmlformats.org/officeDocument/2006/relationships" xmlns:p="http://schemas.openxmlformats.org/presentationml/2006/main">
+<p:sld xmlns:a="http://schemas.openxmlformats.org/drawingml/2006/main" xmlns:p="http://schemas.openxmlformats.org/presentationml/2006/main" xmlns:r="http://schemas.openxmlformats.org/officeDocument/2006/relationships">
   <p:cSld>
     <p:spTree>
       <p:nvGrpSpPr>
@@ -10169,14 +9993,7 @@
         <p:cNvGrpSpPr/>
         <p:nvPr/>
       </p:nvGrpSpPr>
-      <p:grpSpPr>
-        <a:xfrm>
-          <a:off x="0" y="0"/>
-          <a:ext cx="0" cy="0"/>
-          <a:chOff x="0" y="0"/>
-          <a:chExt cx="0" cy="0"/>
-        </a:xfrm>
-      </p:grpSpPr>
+      <p:grpSpPr/>
       <p:sp>
         <p:nvSpPr>
           <p:cNvPr id="2" name="Rectangle 1"/>
@@ -10217,7 +10034,6 @@
           <a:lstStyle/>
           <a:p>
             <a:pPr algn="ctr"/>
-            <a:endParaRPr/>
           </a:p>
         </p:txBody>
       </p:sp>
@@ -10261,7 +10077,6 @@
           <a:lstStyle/>
           <a:p>
             <a:pPr algn="ctr"/>
-            <a:endParaRPr/>
           </a:p>
         </p:txBody>
       </p:sp>
@@ -10282,7 +10097,7 @@
           <a:noFill/>
         </p:spPr>
         <p:txBody>
-          <a:bodyPr wrap="square" lIns="45720" tIns="18288" rIns="45720" bIns="18288" anchor="t">
+          <a:bodyPr wrap="square" anchor="t" lIns="45720" rIns="45720" tIns="18288" bIns="18288">
             <a:spAutoFit/>
           </a:bodyPr>
           <a:lstStyle/>
@@ -10324,7 +10139,7 @@
           <a:noFill/>
         </p:spPr>
         <p:txBody>
-          <a:bodyPr wrap="square" lIns="45720" tIns="18288" rIns="45720" bIns="18288" anchor="t">
+          <a:bodyPr wrap="square" anchor="t" lIns="45720" rIns="45720" tIns="18288" bIns="18288">
             <a:spAutoFit/>
           </a:bodyPr>
           <a:lstStyle/>
@@ -10366,7 +10181,7 @@
           <a:noFill/>
         </p:spPr>
         <p:txBody>
-          <a:bodyPr wrap="square" lIns="45720" tIns="18288" rIns="45720" bIns="18288" anchor="t">
+          <a:bodyPr wrap="square" anchor="t" lIns="45720" rIns="45720" tIns="18288" bIns="18288">
             <a:spAutoFit/>
           </a:bodyPr>
           <a:lstStyle/>
@@ -10438,7 +10253,7 @@
 </file>
 
 <file path=ppt/slides/slide3.xml><?xml version="1.0" encoding="utf-8"?>
-<p:sld xmlns:a="http://schemas.openxmlformats.org/drawingml/2006/main" xmlns:r="http://schemas.openxmlformats.org/officeDocument/2006/relationships" xmlns:p="http://schemas.openxmlformats.org/presentationml/2006/main">
+<p:sld xmlns:a="http://schemas.openxmlformats.org/drawingml/2006/main" xmlns:p="http://schemas.openxmlformats.org/presentationml/2006/main" xmlns:r="http://schemas.openxmlformats.org/officeDocument/2006/relationships">
   <p:cSld>
     <p:spTree>
       <p:nvGrpSpPr>
@@ -10446,14 +10261,7 @@
         <p:cNvGrpSpPr/>
         <p:nvPr/>
       </p:nvGrpSpPr>
-      <p:grpSpPr>
-        <a:xfrm>
-          <a:off x="0" y="0"/>
-          <a:ext cx="0" cy="0"/>
-          <a:chOff x="0" y="0"/>
-          <a:chExt cx="0" cy="0"/>
-        </a:xfrm>
-      </p:grpSpPr>
+      <p:grpSpPr/>
       <p:sp>
         <p:nvSpPr>
           <p:cNvPr id="2" name="Rectangle 1"/>
@@ -10494,7 +10302,6 @@
           <a:lstStyle/>
           <a:p>
             <a:pPr algn="ctr"/>
-            <a:endParaRPr/>
           </a:p>
         </p:txBody>
       </p:sp>
@@ -10538,7 +10345,6 @@
           <a:lstStyle/>
           <a:p>
             <a:pPr algn="ctr"/>
-            <a:endParaRPr/>
           </a:p>
         </p:txBody>
       </p:sp>
@@ -10559,7 +10365,7 @@
           <a:noFill/>
         </p:spPr>
         <p:txBody>
-          <a:bodyPr wrap="square" lIns="45720" tIns="18288" rIns="45720" bIns="18288" anchor="ctr">
+          <a:bodyPr wrap="square" anchor="ctr" lIns="45720" rIns="45720" tIns="18288" bIns="18288">
             <a:spAutoFit/>
           </a:bodyPr>
           <a:lstStyle/>
@@ -10573,13 +10379,13 @@
               </a:spcAft>
             </a:pPr>
             <a:r>
-              <a:rPr sz="3000" b="1">
+              <a:rPr sz="2400" b="1">
                 <a:solidFill>
                   <a:srgbClr val="F8FAFC"/>
                 </a:solidFill>
                 <a:latin typeface="Segoe UI"/>
               </a:rPr>
-              <a:t>Agenda</a:t>
+              <a:t>Agenda + What's Different About Us</a:t>
             </a:r>
           </a:p>
         </p:txBody>
@@ -10624,7 +10430,6 @@
           <a:lstStyle/>
           <a:p>
             <a:pPr algn="ctr"/>
-            <a:endParaRPr/>
           </a:p>
         </p:txBody>
       </p:sp>
@@ -10699,7 +10504,7 @@
           <a:noFill/>
         </p:spPr>
         <p:txBody>
-          <a:bodyPr wrap="square" lIns="45720" tIns="18288" rIns="45720" bIns="18288" anchor="t">
+          <a:bodyPr wrap="square" anchor="t" lIns="45720" rIns="45720" tIns="18288" bIns="18288">
             <a:spAutoFit/>
           </a:bodyPr>
           <a:lstStyle/>
@@ -10741,7 +10546,7 @@
           <a:noFill/>
         </p:spPr>
         <p:txBody>
-          <a:bodyPr wrap="square" lIns="45720" tIns="18288" rIns="45720" bIns="18288" anchor="t">
+          <a:bodyPr wrap="square" anchor="t" lIns="45720" rIns="45720" tIns="18288" bIns="18288">
             <a:spAutoFit/>
           </a:bodyPr>
           <a:lstStyle/>
@@ -10783,7 +10588,7 @@
           <a:noFill/>
         </p:spPr>
         <p:txBody>
-          <a:bodyPr wrap="square" lIns="45720" tIns="18288" rIns="45720" bIns="18288" anchor="t">
+          <a:bodyPr wrap="square" anchor="t" lIns="45720" rIns="45720" tIns="18288" bIns="18288">
             <a:spAutoFit/>
           </a:bodyPr>
           <a:lstStyle/>
@@ -10841,7 +10646,7 @@
                 </a:solidFill>
                 <a:latin typeface="Segoe UI"/>
               </a:rPr>
-              <a:t>•  What we learned — and what we'd still improve.</a:t>
+              <a:t>•  Watch for our stand-out features: product views, a search bar on every admin page, exportable audit logs, and recommendations.</a:t>
             </a:r>
           </a:p>
           <a:p>
@@ -10860,7 +10665,7 @@
                 </a:solidFill>
                 <a:latin typeface="Segoe UI"/>
               </a:rPr>
-              <a:t>•  Future feature — the Smart Energy Advisor.</a:t>
+              <a:t>•  What we learned — and what we'd still improve.</a:t>
             </a:r>
           </a:p>
           <a:p>
@@ -10879,7 +10684,7 @@
                 </a:solidFill>
                 <a:latin typeface="Segoe UI"/>
               </a:rPr>
-              <a:t>•  Q&amp;A — jump in any time.</a:t>
+              <a:t>•  Future feature — the Smart Energy Advisor. Q&amp;A any time.</a:t>
             </a:r>
           </a:p>
         </p:txBody>
@@ -10893,7 +10698,7 @@
 </file>
 
 <file path=ppt/slides/slide4.xml><?xml version="1.0" encoding="utf-8"?>
-<p:sld xmlns:a="http://schemas.openxmlformats.org/drawingml/2006/main" xmlns:r="http://schemas.openxmlformats.org/officeDocument/2006/relationships" xmlns:p="http://schemas.openxmlformats.org/presentationml/2006/main">
+<p:sld xmlns:a="http://schemas.openxmlformats.org/drawingml/2006/main" xmlns:p="http://schemas.openxmlformats.org/presentationml/2006/main" xmlns:r="http://schemas.openxmlformats.org/officeDocument/2006/relationships">
   <p:cSld>
     <p:spTree>
       <p:nvGrpSpPr>
@@ -10901,14 +10706,7 @@
         <p:cNvGrpSpPr/>
         <p:nvPr/>
       </p:nvGrpSpPr>
-      <p:grpSpPr>
-        <a:xfrm>
-          <a:off x="0" y="0"/>
-          <a:ext cx="0" cy="0"/>
-          <a:chOff x="0" y="0"/>
-          <a:chExt cx="0" cy="0"/>
-        </a:xfrm>
-      </p:grpSpPr>
+      <p:grpSpPr/>
       <p:sp>
         <p:nvSpPr>
           <p:cNvPr id="2" name="Rectangle 1"/>
@@ -10949,7 +10747,6 @@
           <a:lstStyle/>
           <a:p>
             <a:pPr algn="ctr"/>
-            <a:endParaRPr/>
           </a:p>
         </p:txBody>
       </p:sp>
@@ -10993,7 +10790,6 @@
           <a:lstStyle/>
           <a:p>
             <a:pPr algn="ctr"/>
-            <a:endParaRPr/>
           </a:p>
         </p:txBody>
       </p:sp>
@@ -11014,7 +10810,7 @@
           <a:noFill/>
         </p:spPr>
         <p:txBody>
-          <a:bodyPr wrap="square" lIns="45720" tIns="18288" rIns="45720" bIns="18288" anchor="ctr">
+          <a:bodyPr wrap="square" anchor="ctr" lIns="45720" rIns="45720" tIns="18288" bIns="18288">
             <a:spAutoFit/>
           </a:bodyPr>
           <a:lstStyle/>
@@ -11079,7 +10875,6 @@
           <a:lstStyle/>
           <a:p>
             <a:pPr algn="ctr"/>
-            <a:endParaRPr/>
           </a:p>
         </p:txBody>
       </p:sp>
@@ -11154,7 +10949,7 @@
           <a:noFill/>
         </p:spPr>
         <p:txBody>
-          <a:bodyPr wrap="square" lIns="45720" tIns="18288" rIns="45720" bIns="18288" anchor="t">
+          <a:bodyPr wrap="square" anchor="t" lIns="45720" rIns="45720" tIns="18288" bIns="18288">
             <a:spAutoFit/>
           </a:bodyPr>
           <a:lstStyle/>
@@ -11196,7 +10991,7 @@
           <a:noFill/>
         </p:spPr>
         <p:txBody>
-          <a:bodyPr wrap="square" lIns="45720" tIns="18288" rIns="45720" bIns="18288" anchor="t">
+          <a:bodyPr wrap="square" anchor="t" lIns="45720" rIns="45720" tIns="18288" bIns="18288">
             <a:spAutoFit/>
           </a:bodyPr>
           <a:lstStyle/>
@@ -11259,11 +11054,10 @@
           </a:fontRef>
         </p:style>
         <p:txBody>
-          <a:bodyPr wrap="square" lIns="54864" tIns="27432" rIns="54864" bIns="27432" rtlCol="0" anchor="ctr"/>
+          <a:bodyPr rtlCol="0" anchor="ctr" wrap="square" lIns="54864" rIns="54864" tIns="27432" bIns="27432"/>
           <a:lstStyle/>
           <a:p>
             <a:pPr algn="ctr"/>
-            <a:endParaRPr/>
           </a:p>
         </p:txBody>
       </p:sp>
@@ -11284,7 +11078,7 @@
           <a:noFill/>
         </p:spPr>
         <p:txBody>
-          <a:bodyPr wrap="square" lIns="45720" tIns="18288" rIns="45720" bIns="18288" anchor="t">
+          <a:bodyPr wrap="square" anchor="t" lIns="45720" rIns="45720" tIns="18288" bIns="18288">
             <a:spAutoFit/>
           </a:bodyPr>
           <a:lstStyle/>
@@ -11366,11 +11160,10 @@
           </a:fontRef>
         </p:style>
         <p:txBody>
-          <a:bodyPr wrap="square" lIns="54864" tIns="27432" rIns="54864" bIns="27432" rtlCol="0" anchor="ctr"/>
+          <a:bodyPr rtlCol="0" anchor="ctr" wrap="square" lIns="54864" rIns="54864" tIns="27432" bIns="27432"/>
           <a:lstStyle/>
           <a:p>
             <a:pPr algn="ctr"/>
-            <a:endParaRPr/>
           </a:p>
         </p:txBody>
       </p:sp>
@@ -11391,7 +11184,7 @@
           <a:noFill/>
         </p:spPr>
         <p:txBody>
-          <a:bodyPr wrap="square" lIns="45720" tIns="18288" rIns="45720" bIns="18288" anchor="t">
+          <a:bodyPr wrap="square" anchor="t" lIns="45720" rIns="45720" tIns="18288" bIns="18288">
             <a:spAutoFit/>
           </a:bodyPr>
           <a:lstStyle/>
@@ -11473,11 +11266,10 @@
           </a:fontRef>
         </p:style>
         <p:txBody>
-          <a:bodyPr wrap="square" lIns="54864" tIns="27432" rIns="54864" bIns="27432" rtlCol="0" anchor="ctr"/>
+          <a:bodyPr rtlCol="0" anchor="ctr" wrap="square" lIns="54864" rIns="54864" tIns="27432" bIns="27432"/>
           <a:lstStyle/>
           <a:p>
             <a:pPr algn="ctr"/>
-            <a:endParaRPr/>
           </a:p>
         </p:txBody>
       </p:sp>
@@ -11498,7 +11290,7 @@
           <a:noFill/>
         </p:spPr>
         <p:txBody>
-          <a:bodyPr wrap="square" lIns="45720" tIns="18288" rIns="45720" bIns="18288" anchor="t">
+          <a:bodyPr wrap="square" anchor="t" lIns="45720" rIns="45720" tIns="18288" bIns="18288">
             <a:spAutoFit/>
           </a:bodyPr>
           <a:lstStyle/>
@@ -11570,7 +11362,7 @@
 </file>
 
 <file path=ppt/slides/slide5.xml><?xml version="1.0" encoding="utf-8"?>
-<p:sld xmlns:a="http://schemas.openxmlformats.org/drawingml/2006/main" xmlns:r="http://schemas.openxmlformats.org/officeDocument/2006/relationships" xmlns:p="http://schemas.openxmlformats.org/presentationml/2006/main">
+<p:sld xmlns:a="http://schemas.openxmlformats.org/drawingml/2006/main" xmlns:p="http://schemas.openxmlformats.org/presentationml/2006/main" xmlns:r="http://schemas.openxmlformats.org/officeDocument/2006/relationships">
   <p:cSld>
     <p:spTree>
       <p:nvGrpSpPr>
@@ -11578,14 +11370,7 @@
         <p:cNvGrpSpPr/>
         <p:nvPr/>
       </p:nvGrpSpPr>
-      <p:grpSpPr>
-        <a:xfrm>
-          <a:off x="0" y="0"/>
-          <a:ext cx="0" cy="0"/>
-          <a:chOff x="0" y="0"/>
-          <a:chExt cx="0" cy="0"/>
-        </a:xfrm>
-      </p:grpSpPr>
+      <p:grpSpPr/>
       <p:sp>
         <p:nvSpPr>
           <p:cNvPr id="2" name="Rectangle 1"/>
@@ -11626,7 +11411,6 @@
           <a:lstStyle/>
           <a:p>
             <a:pPr algn="ctr"/>
-            <a:endParaRPr/>
           </a:p>
         </p:txBody>
       </p:sp>
@@ -11670,7 +11454,6 @@
           <a:lstStyle/>
           <a:p>
             <a:pPr algn="ctr"/>
-            <a:endParaRPr/>
           </a:p>
         </p:txBody>
       </p:sp>
@@ -11691,7 +11474,7 @@
           <a:noFill/>
         </p:spPr>
         <p:txBody>
-          <a:bodyPr wrap="square" lIns="45720" tIns="18288" rIns="45720" bIns="18288" anchor="ctr">
+          <a:bodyPr wrap="square" anchor="ctr" lIns="45720" rIns="45720" tIns="18288" bIns="18288">
             <a:spAutoFit/>
           </a:bodyPr>
           <a:lstStyle/>
@@ -11756,7 +11539,6 @@
           <a:lstStyle/>
           <a:p>
             <a:pPr algn="ctr"/>
-            <a:endParaRPr/>
           </a:p>
         </p:txBody>
       </p:sp>
@@ -11831,7 +11613,7 @@
           <a:noFill/>
         </p:spPr>
         <p:txBody>
-          <a:bodyPr wrap="square" lIns="45720" tIns="18288" rIns="45720" bIns="18288" anchor="t">
+          <a:bodyPr wrap="square" anchor="t" lIns="45720" rIns="45720" tIns="18288" bIns="18288">
             <a:spAutoFit/>
           </a:bodyPr>
           <a:lstStyle/>
@@ -11873,7 +11655,7 @@
           <a:noFill/>
         </p:spPr>
         <p:txBody>
-          <a:bodyPr wrap="square" lIns="45720" tIns="18288" rIns="45720" bIns="18288" anchor="t">
+          <a:bodyPr wrap="square" anchor="t" lIns="45720" rIns="45720" tIns="18288" bIns="18288">
             <a:spAutoFit/>
           </a:bodyPr>
           <a:lstStyle/>
@@ -11915,7 +11697,7 @@
           <a:noFill/>
         </p:spPr>
         <p:txBody>
-          <a:bodyPr wrap="square" lIns="45720" tIns="18288" rIns="45720" bIns="18288" anchor="t">
+          <a:bodyPr wrap="square" anchor="t" lIns="45720" rIns="45720" tIns="18288" bIns="18288">
             <a:spAutoFit/>
           </a:bodyPr>
           <a:lstStyle/>
@@ -12006,7 +11788,7 @@
 </file>
 
 <file path=ppt/slides/slide6.xml><?xml version="1.0" encoding="utf-8"?>
-<p:sld xmlns:a="http://schemas.openxmlformats.org/drawingml/2006/main" xmlns:r="http://schemas.openxmlformats.org/officeDocument/2006/relationships" xmlns:p="http://schemas.openxmlformats.org/presentationml/2006/main">
+<p:sld xmlns:a="http://schemas.openxmlformats.org/drawingml/2006/main" xmlns:p="http://schemas.openxmlformats.org/presentationml/2006/main" xmlns:r="http://schemas.openxmlformats.org/officeDocument/2006/relationships">
   <p:cSld>
     <p:spTree>
       <p:nvGrpSpPr>
@@ -12014,14 +11796,7 @@
         <p:cNvGrpSpPr/>
         <p:nvPr/>
       </p:nvGrpSpPr>
-      <p:grpSpPr>
-        <a:xfrm>
-          <a:off x="0" y="0"/>
-          <a:ext cx="0" cy="0"/>
-          <a:chOff x="0" y="0"/>
-          <a:chExt cx="0" cy="0"/>
-        </a:xfrm>
-      </p:grpSpPr>
+      <p:grpSpPr/>
       <p:sp>
         <p:nvSpPr>
           <p:cNvPr id="2" name="Rectangle 1"/>
@@ -12062,7 +11837,6 @@
           <a:lstStyle/>
           <a:p>
             <a:pPr algn="ctr"/>
-            <a:endParaRPr/>
           </a:p>
         </p:txBody>
       </p:sp>
@@ -12106,7 +11880,6 @@
           <a:lstStyle/>
           <a:p>
             <a:pPr algn="ctr"/>
-            <a:endParaRPr/>
           </a:p>
         </p:txBody>
       </p:sp>
@@ -12127,7 +11900,7 @@
           <a:noFill/>
         </p:spPr>
         <p:txBody>
-          <a:bodyPr wrap="square" lIns="45720" tIns="18288" rIns="45720" bIns="18288" anchor="ctr">
+          <a:bodyPr wrap="square" anchor="ctr" lIns="45720" rIns="45720" tIns="18288" bIns="18288">
             <a:spAutoFit/>
           </a:bodyPr>
           <a:lstStyle/>
@@ -12192,7 +11965,6 @@
           <a:lstStyle/>
           <a:p>
             <a:pPr algn="ctr"/>
-            <a:endParaRPr/>
           </a:p>
         </p:txBody>
       </p:sp>
@@ -12267,7 +12039,7 @@
           <a:noFill/>
         </p:spPr>
         <p:txBody>
-          <a:bodyPr wrap="square" lIns="45720" tIns="18288" rIns="45720" bIns="18288" anchor="t">
+          <a:bodyPr wrap="square" anchor="t" lIns="45720" rIns="45720" tIns="18288" bIns="18288">
             <a:spAutoFit/>
           </a:bodyPr>
           <a:lstStyle/>
@@ -12309,7 +12081,7 @@
           <a:noFill/>
         </p:spPr>
         <p:txBody>
-          <a:bodyPr wrap="square" lIns="45720" tIns="18288" rIns="45720" bIns="18288" anchor="t">
+          <a:bodyPr wrap="square" anchor="t" lIns="45720" rIns="45720" tIns="18288" bIns="18288">
             <a:spAutoFit/>
           </a:bodyPr>
           <a:lstStyle/>
@@ -12342,7 +12114,7 @@
         </p:nvSpPr>
         <p:spPr>
           <a:xfrm>
-            <a:off x="4846320" y="2217675"/>
+            <a:off x="4846320" y="1508760"/>
             <a:ext cx="2468880" cy="658368"/>
           </a:xfrm>
           <a:prstGeom prst="roundRect">
@@ -12372,7 +12144,7 @@
           </a:fontRef>
         </p:style>
         <p:txBody>
-          <a:bodyPr wrap="square" lIns="54864" tIns="27432" rIns="54864" bIns="27432" rtlCol="0" anchor="ctr"/>
+          <a:bodyPr rtlCol="0" anchor="ctr" wrap="square" lIns="54864" rIns="54864" tIns="27432" bIns="27432"/>
           <a:lstStyle/>
           <a:p>
             <a:pPr algn="ctr"/>
@@ -12396,7 +12168,7 @@
         </p:nvSpPr>
         <p:spPr>
           <a:xfrm>
-            <a:off x="4846320" y="4869435"/>
+            <a:off x="4846320" y="4160520"/>
             <a:ext cx="2468880" cy="658368"/>
           </a:xfrm>
           <a:prstGeom prst="roundRect">
@@ -12426,12 +12198,12 @@
           </a:fontRef>
         </p:style>
         <p:txBody>
-          <a:bodyPr wrap="square" lIns="54864" tIns="27432" rIns="54864" bIns="27432" rtlCol="0" anchor="ctr"/>
+          <a:bodyPr rtlCol="0" anchor="ctr" wrap="square" lIns="54864" rIns="54864" tIns="27432" bIns="27432"/>
           <a:lstStyle/>
           <a:p>
             <a:pPr algn="ctr"/>
             <a:r>
-              <a:rPr sz="1500" b="1" dirty="0">
+              <a:rPr sz="1500" b="1">
                 <a:solidFill>
                   <a:srgbClr val="F8FAFC"/>
                 </a:solidFill>
@@ -12450,7 +12222,7 @@
         </p:nvSpPr>
         <p:spPr>
           <a:xfrm>
-            <a:off x="640080" y="2446275"/>
+            <a:off x="640080" y="1737360"/>
             <a:ext cx="2468880" cy="502920"/>
           </a:xfrm>
           <a:prstGeom prst="roundRect">
@@ -12480,7 +12252,7 @@
           </a:fontRef>
         </p:style>
         <p:txBody>
-          <a:bodyPr wrap="square" lIns="54864" tIns="27432" rIns="54864" bIns="27432" rtlCol="0" anchor="ctr"/>
+          <a:bodyPr rtlCol="0" anchor="ctr" wrap="square" lIns="54864" rIns="54864" tIns="27432" bIns="27432"/>
           <a:lstStyle/>
           <a:p>
             <a:pPr algn="ctr"/>
@@ -12504,7 +12276,7 @@
         </p:nvCxnSpPr>
         <p:spPr>
           <a:xfrm flipV="1">
-            <a:off x="3108960" y="2537715"/>
+            <a:off x="3108960" y="1828800"/>
             <a:ext cx="1737360" cy="155448"/>
           </a:xfrm>
           <a:prstGeom prst="line">
@@ -12540,7 +12312,7 @@
         </p:nvSpPr>
         <p:spPr>
           <a:xfrm>
-            <a:off x="640080" y="1714755"/>
+            <a:off x="640080" y="1005840"/>
             <a:ext cx="2468880" cy="502920"/>
           </a:xfrm>
           <a:prstGeom prst="roundRect">
@@ -12570,7 +12342,7 @@
           </a:fontRef>
         </p:style>
         <p:txBody>
-          <a:bodyPr wrap="square" lIns="54864" tIns="27432" rIns="54864" bIns="27432" rtlCol="0" anchor="ctr"/>
+          <a:bodyPr rtlCol="0" anchor="ctr" wrap="square" lIns="54864" rIns="54864" tIns="27432" bIns="27432"/>
           <a:lstStyle/>
           <a:p>
             <a:pPr algn="ctr"/>
@@ -12594,7 +12366,7 @@
         </p:nvCxnSpPr>
         <p:spPr>
           <a:xfrm>
-            <a:off x="3108960" y="1961643"/>
+            <a:off x="3108960" y="1252728"/>
             <a:ext cx="1737360" cy="576072"/>
           </a:xfrm>
           <a:prstGeom prst="line">
@@ -12630,7 +12402,7 @@
         </p:nvSpPr>
         <p:spPr>
           <a:xfrm>
-            <a:off x="640080" y="3543555"/>
+            <a:off x="640080" y="2834640"/>
             <a:ext cx="2468880" cy="502920"/>
           </a:xfrm>
           <a:prstGeom prst="roundRect">
@@ -12660,7 +12432,7 @@
           </a:fontRef>
         </p:style>
         <p:txBody>
-          <a:bodyPr wrap="square" lIns="54864" tIns="27432" rIns="54864" bIns="27432" rtlCol="0" anchor="ctr"/>
+          <a:bodyPr rtlCol="0" anchor="ctr" wrap="square" lIns="54864" rIns="54864" tIns="27432" bIns="27432"/>
           <a:lstStyle/>
           <a:p>
             <a:pPr algn="ctr"/>
@@ -12684,7 +12456,7 @@
         </p:nvCxnSpPr>
         <p:spPr>
           <a:xfrm flipV="1">
-            <a:off x="3108960" y="2537715"/>
+            <a:off x="3108960" y="1828800"/>
             <a:ext cx="1737360" cy="1252728"/>
           </a:xfrm>
           <a:prstGeom prst="line">
@@ -12720,7 +12492,7 @@
         </p:nvSpPr>
         <p:spPr>
           <a:xfrm>
-            <a:off x="9052560" y="2263395"/>
+            <a:off x="9052560" y="1554480"/>
             <a:ext cx="2468880" cy="457200"/>
           </a:xfrm>
           <a:prstGeom prst="roundRect">
@@ -12750,7 +12522,7 @@
           </a:fontRef>
         </p:style>
         <p:txBody>
-          <a:bodyPr wrap="square" lIns="54864" tIns="27432" rIns="54864" bIns="27432" rtlCol="0" anchor="ctr"/>
+          <a:bodyPr rtlCol="0" anchor="ctr" wrap="square" lIns="54864" rIns="54864" tIns="27432" bIns="27432"/>
           <a:lstStyle/>
           <a:p>
             <a:pPr algn="ctr"/>
@@ -12774,7 +12546,7 @@
         </p:nvCxnSpPr>
         <p:spPr>
           <a:xfrm flipH="1">
-            <a:off x="7315200" y="2491995"/>
+            <a:off x="7315200" y="1783080"/>
             <a:ext cx="1737360" cy="2697480"/>
           </a:xfrm>
           <a:prstGeom prst="line">
@@ -12810,7 +12582,7 @@
         </p:nvSpPr>
         <p:spPr>
           <a:xfrm>
-            <a:off x="9052560" y="2994915"/>
+            <a:off x="9052560" y="2286000"/>
             <a:ext cx="2468880" cy="457200"/>
           </a:xfrm>
           <a:prstGeom prst="roundRect">
@@ -12840,7 +12612,7 @@
           </a:fontRef>
         </p:style>
         <p:txBody>
-          <a:bodyPr wrap="square" lIns="54864" tIns="27432" rIns="54864" bIns="27432" rtlCol="0" anchor="ctr"/>
+          <a:bodyPr rtlCol="0" anchor="ctr" wrap="square" lIns="54864" rIns="54864" tIns="27432" bIns="27432"/>
           <a:lstStyle/>
           <a:p>
             <a:pPr algn="ctr"/>
@@ -12864,7 +12636,7 @@
         </p:nvCxnSpPr>
         <p:spPr>
           <a:xfrm flipH="1">
-            <a:off x="7315200" y="3223515"/>
+            <a:off x="7315200" y="2514600"/>
             <a:ext cx="1737360" cy="1965960"/>
           </a:xfrm>
           <a:prstGeom prst="line">
@@ -12900,7 +12672,7 @@
         </p:nvSpPr>
         <p:spPr>
           <a:xfrm>
-            <a:off x="9052560" y="3726435"/>
+            <a:off x="9052560" y="3017520"/>
             <a:ext cx="2468880" cy="457200"/>
           </a:xfrm>
           <a:prstGeom prst="roundRect">
@@ -12930,7 +12702,7 @@
           </a:fontRef>
         </p:style>
         <p:txBody>
-          <a:bodyPr wrap="square" lIns="54864" tIns="27432" rIns="54864" bIns="27432" rtlCol="0" anchor="ctr"/>
+          <a:bodyPr rtlCol="0" anchor="ctr" wrap="square" lIns="54864" rIns="54864" tIns="27432" bIns="27432"/>
           <a:lstStyle/>
           <a:p>
             <a:pPr algn="ctr"/>
@@ -12954,7 +12726,7 @@
         </p:nvCxnSpPr>
         <p:spPr>
           <a:xfrm flipH="1">
-            <a:off x="7315200" y="3955035"/>
+            <a:off x="7315200" y="3246120"/>
             <a:ext cx="1737360" cy="1234440"/>
           </a:xfrm>
           <a:prstGeom prst="line">
@@ -12990,7 +12762,7 @@
         </p:nvSpPr>
         <p:spPr>
           <a:xfrm>
-            <a:off x="9052560" y="4457954"/>
+            <a:off x="9052560" y="3749039"/>
             <a:ext cx="2468880" cy="457200"/>
           </a:xfrm>
           <a:prstGeom prst="roundRect">
@@ -13020,7 +12792,7 @@
           </a:fontRef>
         </p:style>
         <p:txBody>
-          <a:bodyPr wrap="square" lIns="54864" tIns="27432" rIns="54864" bIns="27432" rtlCol="0" anchor="ctr"/>
+          <a:bodyPr rtlCol="0" anchor="ctr" wrap="square" lIns="54864" rIns="54864" tIns="27432" bIns="27432"/>
           <a:lstStyle/>
           <a:p>
             <a:pPr algn="ctr"/>
@@ -13044,7 +12816,7 @@
         </p:nvCxnSpPr>
         <p:spPr>
           <a:xfrm flipH="1">
-            <a:off x="7315200" y="4686554"/>
+            <a:off x="7315200" y="3977639"/>
             <a:ext cx="1737360" cy="502921"/>
           </a:xfrm>
           <a:prstGeom prst="line">
@@ -13080,7 +12852,7 @@
         </p:nvSpPr>
         <p:spPr>
           <a:xfrm>
-            <a:off x="9052560" y="5189475"/>
+            <a:off x="9052560" y="4480560"/>
             <a:ext cx="2468880" cy="457200"/>
           </a:xfrm>
           <a:prstGeom prst="roundRect">
@@ -13110,7 +12882,7 @@
           </a:fontRef>
         </p:style>
         <p:txBody>
-          <a:bodyPr wrap="square" lIns="54864" tIns="27432" rIns="54864" bIns="27432" rtlCol="0" anchor="ctr"/>
+          <a:bodyPr rtlCol="0" anchor="ctr" wrap="square" lIns="54864" rIns="54864" tIns="27432" bIns="27432"/>
           <a:lstStyle/>
           <a:p>
             <a:pPr algn="ctr"/>
@@ -13134,7 +12906,7 @@
         </p:nvCxnSpPr>
         <p:spPr>
           <a:xfrm flipH="1" flipV="1">
-            <a:off x="7315200" y="5189475"/>
+            <a:off x="7315200" y="4480560"/>
             <a:ext cx="1737360" cy="228600"/>
           </a:xfrm>
           <a:prstGeom prst="line">
@@ -13170,7 +12942,7 @@
         </p:nvCxnSpPr>
         <p:spPr>
           <a:xfrm>
-            <a:off x="6080760" y="2876043"/>
+            <a:off x="6080760" y="2167128"/>
             <a:ext cx="0" cy="1993392"/>
           </a:xfrm>
           <a:prstGeom prst="line">
@@ -13206,7 +12978,7 @@
         </p:nvSpPr>
         <p:spPr>
           <a:xfrm>
-            <a:off x="6172200" y="3680715"/>
+            <a:off x="6172200" y="2971800"/>
             <a:ext cx="1828800" cy="274320"/>
           </a:xfrm>
           <a:prstGeom prst="rect">
@@ -13215,7 +12987,7 @@
           <a:noFill/>
         </p:spPr>
         <p:txBody>
-          <a:bodyPr wrap="square" lIns="45720" tIns="18288" rIns="45720" bIns="18288" anchor="t">
+          <a:bodyPr wrap="square" anchor="t" lIns="45720" rIns="45720" tIns="18288" bIns="18288">
             <a:spAutoFit/>
           </a:bodyPr>
           <a:lstStyle/>
@@ -13257,7 +13029,7 @@
           <a:noFill/>
         </p:spPr>
         <p:txBody>
-          <a:bodyPr wrap="square" lIns="45720" tIns="18288" rIns="45720" bIns="18288" anchor="t">
+          <a:bodyPr wrap="square" anchor="t" lIns="45720" rIns="45720" tIns="18288" bIns="18288">
             <a:spAutoFit/>
           </a:bodyPr>
           <a:lstStyle/>
@@ -13291,7 +13063,7 @@
 </file>
 
 <file path=ppt/slides/slide7.xml><?xml version="1.0" encoding="utf-8"?>
-<p:sld xmlns:a="http://schemas.openxmlformats.org/drawingml/2006/main" xmlns:r="http://schemas.openxmlformats.org/officeDocument/2006/relationships" xmlns:p="http://schemas.openxmlformats.org/presentationml/2006/main">
+<p:sld xmlns:a="http://schemas.openxmlformats.org/drawingml/2006/main" xmlns:p="http://schemas.openxmlformats.org/presentationml/2006/main" xmlns:r="http://schemas.openxmlformats.org/officeDocument/2006/relationships">
   <p:cSld>
     <p:spTree>
       <p:nvGrpSpPr>
@@ -13299,14 +13071,7 @@
         <p:cNvGrpSpPr/>
         <p:nvPr/>
       </p:nvGrpSpPr>
-      <p:grpSpPr>
-        <a:xfrm>
-          <a:off x="0" y="0"/>
-          <a:ext cx="0" cy="0"/>
-          <a:chOff x="0" y="0"/>
-          <a:chExt cx="0" cy="0"/>
-        </a:xfrm>
-      </p:grpSpPr>
+      <p:grpSpPr/>
       <p:sp>
         <p:nvSpPr>
           <p:cNvPr id="2" name="Rectangle 1"/>
@@ -13347,7 +13112,6 @@
           <a:lstStyle/>
           <a:p>
             <a:pPr algn="ctr"/>
-            <a:endParaRPr/>
           </a:p>
         </p:txBody>
       </p:sp>
@@ -13391,7 +13155,6 @@
           <a:lstStyle/>
           <a:p>
             <a:pPr algn="ctr"/>
-            <a:endParaRPr/>
           </a:p>
         </p:txBody>
       </p:sp>
@@ -13412,7 +13175,7 @@
           <a:noFill/>
         </p:spPr>
         <p:txBody>
-          <a:bodyPr wrap="square" lIns="45720" tIns="18288" rIns="45720" bIns="18288" anchor="ctr">
+          <a:bodyPr wrap="square" anchor="ctr" lIns="45720" rIns="45720" tIns="18288" bIns="18288">
             <a:spAutoFit/>
           </a:bodyPr>
           <a:lstStyle/>
@@ -13477,7 +13240,6 @@
           <a:lstStyle/>
           <a:p>
             <a:pPr algn="ctr"/>
-            <a:endParaRPr/>
           </a:p>
         </p:txBody>
       </p:sp>
@@ -13552,7 +13314,7 @@
           <a:noFill/>
         </p:spPr>
         <p:txBody>
-          <a:bodyPr wrap="square" lIns="45720" tIns="18288" rIns="45720" bIns="18288" anchor="t">
+          <a:bodyPr wrap="square" anchor="t" lIns="45720" rIns="45720" tIns="18288" bIns="18288">
             <a:spAutoFit/>
           </a:bodyPr>
           <a:lstStyle/>
@@ -13594,7 +13356,7 @@
           <a:noFill/>
         </p:spPr>
         <p:txBody>
-          <a:bodyPr wrap="square" lIns="45720" tIns="18288" rIns="45720" bIns="18288" anchor="t">
+          <a:bodyPr wrap="square" anchor="t" lIns="45720" rIns="45720" tIns="18288" bIns="18288">
             <a:spAutoFit/>
           </a:bodyPr>
           <a:lstStyle/>
@@ -13657,11 +13419,10 @@
           </a:fontRef>
         </p:style>
         <p:txBody>
-          <a:bodyPr wrap="square" lIns="54864" tIns="27432" rIns="54864" bIns="27432" rtlCol="0" anchor="ctr"/>
+          <a:bodyPr rtlCol="0" anchor="ctr" wrap="square" lIns="54864" rIns="54864" tIns="27432" bIns="27432"/>
           <a:lstStyle/>
           <a:p>
             <a:pPr algn="ctr"/>
-            <a:endParaRPr/>
           </a:p>
         </p:txBody>
       </p:sp>
@@ -13682,7 +13443,7 @@
           <a:noFill/>
         </p:spPr>
         <p:txBody>
-          <a:bodyPr wrap="square" lIns="45720" tIns="18288" rIns="45720" bIns="18288" anchor="t">
+          <a:bodyPr wrap="square" anchor="t" lIns="45720" rIns="45720" tIns="18288" bIns="18288">
             <a:spAutoFit/>
           </a:bodyPr>
           <a:lstStyle/>
@@ -13745,7 +13506,7 @@
           </a:fontRef>
         </p:style>
         <p:txBody>
-          <a:bodyPr wrap="square" lIns="54864" tIns="27432" rIns="54864" bIns="27432" rtlCol="0" anchor="ctr"/>
+          <a:bodyPr rtlCol="0" anchor="ctr" wrap="square" lIns="54864" rIns="54864" tIns="27432" bIns="27432"/>
           <a:lstStyle/>
           <a:p>
             <a:pPr algn="ctr"/>
@@ -13799,7 +13560,7 @@
           </a:fontRef>
         </p:style>
         <p:txBody>
-          <a:bodyPr wrap="square" lIns="54864" tIns="27432" rIns="54864" bIns="27432" rtlCol="0" anchor="ctr"/>
+          <a:bodyPr rtlCol="0" anchor="ctr" wrap="square" lIns="54864" rIns="54864" tIns="27432" bIns="27432"/>
           <a:lstStyle/>
           <a:p>
             <a:pPr algn="ctr"/>
@@ -13853,7 +13614,7 @@
           </a:fontRef>
         </p:style>
         <p:txBody>
-          <a:bodyPr wrap="square" lIns="54864" tIns="27432" rIns="54864" bIns="27432" rtlCol="0" anchor="ctr"/>
+          <a:bodyPr rtlCol="0" anchor="ctr" wrap="square" lIns="54864" rIns="54864" tIns="27432" bIns="27432"/>
           <a:lstStyle/>
           <a:p>
             <a:pPr algn="ctr"/>
@@ -13907,11 +13668,10 @@
           </a:fontRef>
         </p:style>
         <p:txBody>
-          <a:bodyPr wrap="square" lIns="54864" tIns="27432" rIns="54864" bIns="27432" rtlCol="0" anchor="ctr"/>
+          <a:bodyPr rtlCol="0" anchor="ctr" wrap="square" lIns="54864" rIns="54864" tIns="27432" bIns="27432"/>
           <a:lstStyle/>
           <a:p>
             <a:pPr algn="ctr"/>
-            <a:endParaRPr/>
           </a:p>
         </p:txBody>
       </p:sp>
@@ -13932,7 +13692,7 @@
           <a:noFill/>
         </p:spPr>
         <p:txBody>
-          <a:bodyPr wrap="square" lIns="45720" tIns="18288" rIns="45720" bIns="18288" anchor="t">
+          <a:bodyPr wrap="square" anchor="t" lIns="45720" rIns="45720" tIns="18288" bIns="18288">
             <a:spAutoFit/>
           </a:bodyPr>
           <a:lstStyle/>
@@ -13995,7 +13755,7 @@
           </a:fontRef>
         </p:style>
         <p:txBody>
-          <a:bodyPr wrap="square" lIns="54864" tIns="27432" rIns="54864" bIns="27432" rtlCol="0" anchor="ctr"/>
+          <a:bodyPr rtlCol="0" anchor="ctr" wrap="square" lIns="54864" rIns="54864" tIns="27432" bIns="27432"/>
           <a:lstStyle/>
           <a:p>
             <a:pPr algn="ctr"/>
@@ -14061,7 +13821,7 @@
           </a:fontRef>
         </p:style>
         <p:txBody>
-          <a:bodyPr wrap="square" lIns="54864" tIns="27432" rIns="54864" bIns="27432" rtlCol="0" anchor="ctr"/>
+          <a:bodyPr rtlCol="0" anchor="ctr" wrap="square" lIns="54864" rIns="54864" tIns="27432" bIns="27432"/>
           <a:lstStyle/>
           <a:p>
             <a:pPr algn="ctr"/>
@@ -14115,7 +13875,7 @@
           </a:fontRef>
         </p:style>
         <p:txBody>
-          <a:bodyPr wrap="square" lIns="54864" tIns="27432" rIns="54864" bIns="27432" rtlCol="0" anchor="ctr"/>
+          <a:bodyPr rtlCol="0" anchor="ctr" wrap="square" lIns="54864" rIns="54864" tIns="27432" bIns="27432"/>
           <a:lstStyle/>
           <a:p>
             <a:pPr algn="ctr"/>
@@ -14169,7 +13929,7 @@
           </a:fontRef>
         </p:style>
         <p:txBody>
-          <a:bodyPr wrap="square" lIns="54864" tIns="27432" rIns="54864" bIns="27432" rtlCol="0" anchor="ctr"/>
+          <a:bodyPr rtlCol="0" anchor="ctr" wrap="square" lIns="54864" rIns="54864" tIns="27432" bIns="27432"/>
           <a:lstStyle/>
           <a:p>
             <a:pPr algn="ctr"/>
@@ -14223,11 +13983,10 @@
           </a:fontRef>
         </p:style>
         <p:txBody>
-          <a:bodyPr wrap="square" lIns="54864" tIns="27432" rIns="54864" bIns="27432" rtlCol="0" anchor="ctr"/>
+          <a:bodyPr rtlCol="0" anchor="ctr" wrap="square" lIns="54864" rIns="54864" tIns="27432" bIns="27432"/>
           <a:lstStyle/>
           <a:p>
             <a:pPr algn="ctr"/>
-            <a:endParaRPr/>
           </a:p>
         </p:txBody>
       </p:sp>
@@ -14248,7 +14007,7 @@
           <a:noFill/>
         </p:spPr>
         <p:txBody>
-          <a:bodyPr wrap="square" lIns="45720" tIns="18288" rIns="45720" bIns="18288" anchor="t">
+          <a:bodyPr wrap="square" anchor="t" lIns="45720" rIns="45720" tIns="18288" bIns="18288">
             <a:spAutoFit/>
           </a:bodyPr>
           <a:lstStyle/>
@@ -14311,7 +14070,7 @@
           </a:fontRef>
         </p:style>
         <p:txBody>
-          <a:bodyPr wrap="square" lIns="54864" tIns="27432" rIns="54864" bIns="27432" rtlCol="0" anchor="ctr"/>
+          <a:bodyPr rtlCol="0" anchor="ctr" wrap="square" lIns="54864" rIns="54864" tIns="27432" bIns="27432"/>
           <a:lstStyle/>
           <a:p>
             <a:pPr algn="ctr"/>
@@ -14365,7 +14124,7 @@
           </a:fontRef>
         </p:style>
         <p:txBody>
-          <a:bodyPr wrap="square" lIns="54864" tIns="27432" rIns="54864" bIns="27432" rtlCol="0" anchor="ctr"/>
+          <a:bodyPr rtlCol="0" anchor="ctr" wrap="square" lIns="54864" rIns="54864" tIns="27432" bIns="27432"/>
           <a:lstStyle/>
           <a:p>
             <a:pPr algn="ctr"/>
@@ -14419,7 +14178,7 @@
           </a:fontRef>
         </p:style>
         <p:txBody>
-          <a:bodyPr wrap="square" lIns="54864" tIns="27432" rIns="54864" bIns="27432" rtlCol="0" anchor="ctr"/>
+          <a:bodyPr rtlCol="0" anchor="ctr" wrap="square" lIns="54864" rIns="54864" tIns="27432" bIns="27432"/>
           <a:lstStyle/>
           <a:p>
             <a:pPr algn="ctr"/>
@@ -14473,7 +14232,7 @@
           </a:fontRef>
         </p:style>
         <p:txBody>
-          <a:bodyPr wrap="square" lIns="54864" tIns="27432" rIns="54864" bIns="27432" rtlCol="0" anchor="ctr"/>
+          <a:bodyPr rtlCol="0" anchor="ctr" wrap="square" lIns="54864" rIns="54864" tIns="27432" bIns="27432"/>
           <a:lstStyle/>
           <a:p>
             <a:pPr algn="ctr"/>
@@ -14578,7 +14337,7 @@
           <a:noFill/>
         </p:spPr>
         <p:txBody>
-          <a:bodyPr wrap="square" lIns="45720" tIns="18288" rIns="45720" bIns="18288" anchor="t">
+          <a:bodyPr wrap="square" anchor="t" lIns="45720" rIns="45720" tIns="18288" bIns="18288">
             <a:spAutoFit/>
           </a:bodyPr>
           <a:lstStyle/>
@@ -14612,7 +14371,7 @@
 </file>
 
 <file path=ppt/slides/slide8.xml><?xml version="1.0" encoding="utf-8"?>
-<p:sld xmlns:a="http://schemas.openxmlformats.org/drawingml/2006/main" xmlns:r="http://schemas.openxmlformats.org/officeDocument/2006/relationships" xmlns:p="http://schemas.openxmlformats.org/presentationml/2006/main">
+<p:sld xmlns:a="http://schemas.openxmlformats.org/drawingml/2006/main" xmlns:p="http://schemas.openxmlformats.org/presentationml/2006/main" xmlns:r="http://schemas.openxmlformats.org/officeDocument/2006/relationships">
   <p:cSld>
     <p:spTree>
       <p:nvGrpSpPr>
@@ -14620,14 +14379,7 @@
         <p:cNvGrpSpPr/>
         <p:nvPr/>
       </p:nvGrpSpPr>
-      <p:grpSpPr>
-        <a:xfrm>
-          <a:off x="0" y="0"/>
-          <a:ext cx="0" cy="0"/>
-          <a:chOff x="0" y="0"/>
-          <a:chExt cx="0" cy="0"/>
-        </a:xfrm>
-      </p:grpSpPr>
+      <p:grpSpPr/>
       <p:sp>
         <p:nvSpPr>
           <p:cNvPr id="2" name="Rectangle 1"/>
@@ -14668,7 +14420,6 @@
           <a:lstStyle/>
           <a:p>
             <a:pPr algn="ctr"/>
-            <a:endParaRPr/>
           </a:p>
         </p:txBody>
       </p:sp>
@@ -14712,7 +14463,6 @@
           <a:lstStyle/>
           <a:p>
             <a:pPr algn="ctr"/>
-            <a:endParaRPr/>
           </a:p>
         </p:txBody>
       </p:sp>
@@ -14733,7 +14483,7 @@
           <a:noFill/>
         </p:spPr>
         <p:txBody>
-          <a:bodyPr wrap="square" lIns="45720" tIns="18288" rIns="45720" bIns="18288" anchor="ctr">
+          <a:bodyPr wrap="square" anchor="ctr" lIns="45720" rIns="45720" tIns="18288" bIns="18288">
             <a:spAutoFit/>
           </a:bodyPr>
           <a:lstStyle/>
@@ -14798,7 +14548,6 @@
           <a:lstStyle/>
           <a:p>
             <a:pPr algn="ctr"/>
-            <a:endParaRPr/>
           </a:p>
         </p:txBody>
       </p:sp>
@@ -14873,7 +14622,7 @@
           <a:noFill/>
         </p:spPr>
         <p:txBody>
-          <a:bodyPr wrap="square" lIns="45720" tIns="18288" rIns="45720" bIns="18288" anchor="t">
+          <a:bodyPr wrap="square" anchor="t" lIns="45720" rIns="45720" tIns="18288" bIns="18288">
             <a:spAutoFit/>
           </a:bodyPr>
           <a:lstStyle/>
@@ -14915,7 +14664,7 @@
           <a:noFill/>
         </p:spPr>
         <p:txBody>
-          <a:bodyPr wrap="square" lIns="45720" tIns="18288" rIns="45720" bIns="18288" anchor="t">
+          <a:bodyPr wrap="square" anchor="t" lIns="45720" rIns="45720" tIns="18288" bIns="18288">
             <a:spAutoFit/>
           </a:bodyPr>
           <a:lstStyle/>
@@ -14949,7 +14698,7 @@
         <p:spPr>
           <a:xfrm>
             <a:off x="640080" y="1554480"/>
-            <a:ext cx="7680960" cy="2404504"/>
+            <a:ext cx="7680960" cy="4572000"/>
           </a:xfrm>
           <a:prstGeom prst="rect">
             <a:avLst/>
@@ -14957,7 +14706,7 @@
           <a:noFill/>
         </p:spPr>
         <p:txBody>
-          <a:bodyPr wrap="square" lIns="45720" tIns="18288" rIns="45720" bIns="18288" anchor="t">
+          <a:bodyPr wrap="square" anchor="t" lIns="45720" rIns="45720" tIns="18288" bIns="18288">
             <a:spAutoFit/>
           </a:bodyPr>
           <a:lstStyle/>
@@ -14971,31 +14720,13 @@
               </a:spcAft>
             </a:pPr>
             <a:r>
-              <a:rPr sz="1700" b="0" dirty="0">
+              <a:rPr sz="1700" b="0">
                 <a:solidFill>
                   <a:srgbClr val="E2E8F0"/>
                 </a:solidFill>
                 <a:latin typeface="Segoe UI"/>
               </a:rPr>
-              <a:t>•  Planned as 11 </a:t>
-            </a:r>
-            <a:r>
-              <a:rPr lang="en-US" sz="1700" b="0" dirty="0">
-                <a:solidFill>
-                  <a:srgbClr val="E2E8F0"/>
-                </a:solidFill>
-                <a:latin typeface="Segoe UI"/>
-              </a:rPr>
-              <a:t>stories</a:t>
-            </a:r>
-            <a:r>
-              <a:rPr sz="1700" b="0" dirty="0">
-                <a:solidFill>
-                  <a:srgbClr val="E2E8F0"/>
-                </a:solidFill>
-                <a:latin typeface="Segoe UI"/>
-              </a:rPr>
-              <a:t> → 40 sub-tasks → 311 story points, split evenly by strength (Jira board).</a:t>
+              <a:t>•  Planned as 11 epics → 40 sub-tasks → 311 story points, split evenly by strength (Jira board).</a:t>
             </a:r>
           </a:p>
           <a:p>
@@ -15008,7 +14739,7 @@
               </a:spcAft>
             </a:pPr>
             <a:r>
-              <a:rPr sz="1700" b="0" dirty="0">
+              <a:rPr sz="1700" b="0">
                 <a:solidFill>
                   <a:srgbClr val="E2E8F0"/>
                 </a:solidFill>
@@ -15018,7 +14749,7 @@
             </a:r>
           </a:p>
           <a:p>
-            <a:pPr lvl="1" algn="l">
+            <a:pPr algn="l" lvl="1">
               <a:lnSpc>
                 <a:spcPct val="114000"/>
               </a:lnSpc>
@@ -15027,7 +14758,7 @@
               </a:spcAft>
             </a:pPr>
             <a:r>
-              <a:rPr sz="1500" b="0" dirty="0">
+              <a:rPr sz="1500" b="0">
                 <a:solidFill>
                   <a:srgbClr val="94A3B8"/>
                 </a:solidFill>
@@ -15037,7 +14768,7 @@
             </a:r>
           </a:p>
           <a:p>
-            <a:pPr lvl="1" algn="l">
+            <a:pPr algn="l" lvl="1">
               <a:lnSpc>
                 <a:spcPct val="114000"/>
               </a:lnSpc>
@@ -15046,7 +14777,7 @@
               </a:spcAft>
             </a:pPr>
             <a:r>
-              <a:rPr sz="1500" b="0" dirty="0">
+              <a:rPr sz="1500" b="0">
                 <a:solidFill>
                   <a:srgbClr val="94A3B8"/>
                 </a:solidFill>
@@ -15065,7 +14796,7 @@
               </a:spcAft>
             </a:pPr>
             <a:r>
-              <a:rPr sz="1700" b="0" dirty="0">
+              <a:rPr sz="1700" b="0">
                 <a:solidFill>
                   <a:srgbClr val="E2E8F0"/>
                 </a:solidFill>
@@ -15085,7 +14816,7 @@
 </file>
 
 <file path=ppt/slides/slide9.xml><?xml version="1.0" encoding="utf-8"?>
-<p:sld xmlns:a="http://schemas.openxmlformats.org/drawingml/2006/main" xmlns:r="http://schemas.openxmlformats.org/officeDocument/2006/relationships" xmlns:p="http://schemas.openxmlformats.org/presentationml/2006/main">
+<p:sld xmlns:a="http://schemas.openxmlformats.org/drawingml/2006/main" xmlns:p="http://schemas.openxmlformats.org/presentationml/2006/main" xmlns:r="http://schemas.openxmlformats.org/officeDocument/2006/relationships">
   <p:cSld>
     <p:spTree>
       <p:nvGrpSpPr>
@@ -15093,14 +14824,7 @@
         <p:cNvGrpSpPr/>
         <p:nvPr/>
       </p:nvGrpSpPr>
-      <p:grpSpPr>
-        <a:xfrm>
-          <a:off x="0" y="0"/>
-          <a:ext cx="0" cy="0"/>
-          <a:chOff x="0" y="0"/>
-          <a:chExt cx="0" cy="0"/>
-        </a:xfrm>
-      </p:grpSpPr>
+      <p:grpSpPr/>
       <p:sp>
         <p:nvSpPr>
           <p:cNvPr id="2" name="Rectangle 1"/>
@@ -15141,7 +14865,6 @@
           <a:lstStyle/>
           <a:p>
             <a:pPr algn="ctr"/>
-            <a:endParaRPr/>
           </a:p>
         </p:txBody>
       </p:sp>
@@ -15185,7 +14908,6 @@
           <a:lstStyle/>
           <a:p>
             <a:pPr algn="ctr"/>
-            <a:endParaRPr/>
           </a:p>
         </p:txBody>
       </p:sp>
@@ -15206,7 +14928,7 @@
           <a:noFill/>
         </p:spPr>
         <p:txBody>
-          <a:bodyPr wrap="square" lIns="45720" tIns="18288" rIns="45720" bIns="18288" anchor="ctr">
+          <a:bodyPr wrap="square" anchor="ctr" lIns="45720" rIns="45720" tIns="18288" bIns="18288">
             <a:spAutoFit/>
           </a:bodyPr>
           <a:lstStyle/>
@@ -15271,7 +14993,6 @@
           <a:lstStyle/>
           <a:p>
             <a:pPr algn="ctr"/>
-            <a:endParaRPr/>
           </a:p>
         </p:txBody>
       </p:sp>
@@ -15346,7 +15067,7 @@
           <a:noFill/>
         </p:spPr>
         <p:txBody>
-          <a:bodyPr wrap="square" lIns="45720" tIns="18288" rIns="45720" bIns="18288" anchor="t">
+          <a:bodyPr wrap="square" anchor="t" lIns="45720" rIns="45720" tIns="18288" bIns="18288">
             <a:spAutoFit/>
           </a:bodyPr>
           <a:lstStyle/>
@@ -15388,7 +15109,7 @@
           <a:noFill/>
         </p:spPr>
         <p:txBody>
-          <a:bodyPr wrap="square" lIns="45720" tIns="18288" rIns="45720" bIns="18288" anchor="t">
+          <a:bodyPr wrap="square" anchor="t" lIns="45720" rIns="45720" tIns="18288" bIns="18288">
             <a:spAutoFit/>
           </a:bodyPr>
           <a:lstStyle/>
@@ -15430,7 +15151,7 @@
           <a:noFill/>
         </p:spPr>
         <p:txBody>
-          <a:bodyPr wrap="square" lIns="45720" tIns="18288" rIns="45720" bIns="18288" anchor="t">
+          <a:bodyPr wrap="square" anchor="t" lIns="45720" rIns="45720" tIns="18288" bIns="18288">
             <a:spAutoFit/>
           </a:bodyPr>
           <a:lstStyle/>

--- a/presentation/OptiCart_Main.pptx
+++ b/presentation/OptiCart_Main.pptx
@@ -6423,7 +6423,7 @@
                 </a:solidFill>
                 <a:latin typeface="Segoe UI"/>
               </a:rPr>
-              <a:t>Haya — Single-flight refresh</a:t>
+              <a:t>Haya — How login really works</a:t>
             </a:r>
           </a:p>
           <a:p>
@@ -6442,7 +6442,7 @@
                 </a:solidFill>
                 <a:latin typeface="Segoe UI"/>
               </a:rPr>
-              <a:t>N concurrent 401s trigger ONE refresh, not N. The fix wasn't more state — it was one point of coordination. And why a token belongs in memory, not storage.</a:t>
+              <a:t>Why the login token lives in the app's memory, not the browser's storage — so a sneaky script can't read it and pretend to be you. Web security became real, not just a word.</a:t>
             </a:r>
           </a:p>
         </p:txBody>
@@ -6529,7 +6529,7 @@
                 </a:solidFill>
                 <a:latin typeface="Segoe UI"/>
               </a:rPr>
-              <a:t>Malik — Compensating transactions</a:t>
+              <a:t>Malik — Plan for failure</a:t>
             </a:r>
           </a:p>
           <a:p>
@@ -6548,7 +6548,7 @@
                 </a:solidFill>
                 <a:latin typeface="Segoe UI"/>
               </a:rPr>
-              <a:t>When an operation spans two documents, make the second step reversible and undo the first on failure — instead of heavy machinery. It made our costing feature safe.</a:t>
+              <a:t>When one action changes two things, if the second step fails I undo the first — so we're never left half-finished (stock up, but the record never saved). "What if this fails?" made my code safer.</a:t>
             </a:r>
           </a:p>
         </p:txBody>
@@ -6635,7 +6635,7 @@
                 </a:solidFill>
                 <a:latin typeface="Segoe UI"/>
               </a:rPr>
-              <a:t>Mahmod — Partial indexes</a:t>
+              <a:t>Mahmod — The database enforces the rules</a:t>
             </a:r>
           </a:p>
           <a:p>
@@ -6654,7 +6654,7 @@
                 </a:solidFill>
                 <a:latin typeface="Segoe UI"/>
               </a:rPr>
-              <a:t>A unique constraint on a filtered subset turned a real bug into an elegant rule: one active low-stock alert per variant, unlimited history — enforced by the database.</a:t>
+              <a:t>One simple database rule guarantees one review per customer per product — so even a bug can't create duplicates. The database protects our data; it isn't just a passive box.</a:t>
             </a:r>
           </a:p>
         </p:txBody>
@@ -9399,7 +9399,7 @@
                 </a:solidFill>
                 <a:latin typeface="Segoe UI"/>
               </a:rPr>
-              <a:t>•  Rate limiting + scheduler assume a single instance → Redis store + cron leader-lock.</a:t>
+              <a:t>•  Rate limiting works today (counts requests per user/IP, blocks floods); multi-server needs a shared Redis store.</a:t>
             </a:r>
           </a:p>
           <a:p>
